--- a/6th Semester/Level-3, Semester-II/CCE 321  Computer Peripheral and Interfacing/Shorna ma'am/Display Basics_2.pptx
+++ b/6th Semester/Level-3, Semester-II/CCE 321  Computer Peripheral and Interfacing/Shorna ma'am/Display Basics_2.pptx
@@ -1,28 +1,31 @@
 
 <file path=ppt/presentation.xml><?xml version="1.0" encoding="utf-8"?>
-<p:presentation xmlns:a="http://schemas.openxmlformats.org/drawingml/2006/main" xmlns:r="http://schemas.openxmlformats.org/officeDocument/2006/relationships" xmlns:p="http://schemas.openxmlformats.org/presentationml/2006/main" saveSubsetFonts="1">
+<p:presentation xmlns:a="http://schemas.openxmlformats.org/drawingml/2006/main" xmlns:r="http://schemas.openxmlformats.org/officeDocument/2006/relationships" xmlns:p="http://schemas.openxmlformats.org/presentationml/2006/main" xmlns:m="http://schemas.openxmlformats.org/officeDocument/2006/math" xmlns:w="http://schemas.openxmlformats.org/wordprocessingml/2006/main" saveSubsetFonts="1">
   <p:sldMasterIdLst>
     <p:sldMasterId id="2147483648" r:id="rId1"/>
   </p:sldMasterIdLst>
+  <p:notesMasterIdLst>
+    <p:notesMasterId r:id="rId22"/>
+  </p:notesMasterIdLst>
   <p:sldIdLst>
-    <p:sldId id="256" r:id="rId2"/>
-    <p:sldId id="295" r:id="rId3"/>
-    <p:sldId id="296" r:id="rId4"/>
-    <p:sldId id="297" r:id="rId5"/>
-    <p:sldId id="298" r:id="rId6"/>
-    <p:sldId id="311" r:id="rId7"/>
-    <p:sldId id="299" r:id="rId8"/>
-    <p:sldId id="300" r:id="rId9"/>
-    <p:sldId id="301" r:id="rId10"/>
-    <p:sldId id="302" r:id="rId11"/>
-    <p:sldId id="303" r:id="rId12"/>
-    <p:sldId id="304" r:id="rId13"/>
-    <p:sldId id="305" r:id="rId14"/>
-    <p:sldId id="306" r:id="rId15"/>
-    <p:sldId id="307" r:id="rId16"/>
-    <p:sldId id="308" r:id="rId17"/>
-    <p:sldId id="309" r:id="rId18"/>
-    <p:sldId id="310" r:id="rId19"/>
+    <p:sldId id="256" r:id="rId4"/>
+    <p:sldId id="257" r:id="rId5"/>
+    <p:sldId id="258" r:id="rId6"/>
+    <p:sldId id="259" r:id="rId7"/>
+    <p:sldId id="260" r:id="rId8"/>
+    <p:sldId id="261" r:id="rId9"/>
+    <p:sldId id="262" r:id="rId10"/>
+    <p:sldId id="263" r:id="rId11"/>
+    <p:sldId id="264" r:id="rId12"/>
+    <p:sldId id="265" r:id="rId13"/>
+    <p:sldId id="266" r:id="rId14"/>
+    <p:sldId id="267" r:id="rId15"/>
+    <p:sldId id="268" r:id="rId16"/>
+    <p:sldId id="269" r:id="rId17"/>
+    <p:sldId id="270" r:id="rId18"/>
+    <p:sldId id="271" r:id="rId19"/>
+    <p:sldId id="272" r:id="rId20"/>
+    <p:sldId id="273" r:id="rId21"/>
   </p:sldIdLst>
   <p:sldSz cx="9144000" cy="6858000" type="screen4x3"/>
   <p:notesSz cx="6858000" cy="9144000"/>
@@ -30,8 +33,8 @@
     <a:defPPr>
       <a:defRPr lang="en-US"/>
     </a:defPPr>
-    <a:lvl1pPr marL="0" algn="l" defTabSz="914400" rtl="0" eaLnBrk="1" latinLnBrk="0" hangingPunct="1">
-      <a:defRPr sz="1800" kern="1200">
+    <a:lvl1pPr marL="0" algn="l" defTabSz="914400" rtl="0">
+      <a:defRPr sz="1800">
         <a:solidFill>
           <a:schemeClr val="tx1"/>
         </a:solidFill>
@@ -40,8 +43,8 @@
         <a:cs typeface="+mn-cs"/>
       </a:defRPr>
     </a:lvl1pPr>
-    <a:lvl2pPr marL="457200" algn="l" defTabSz="914400" rtl="0" eaLnBrk="1" latinLnBrk="0" hangingPunct="1">
-      <a:defRPr sz="1800" kern="1200">
+    <a:lvl2pPr marL="457200" algn="l" defTabSz="914400" rtl="0">
+      <a:defRPr sz="1800">
         <a:solidFill>
           <a:schemeClr val="tx1"/>
         </a:solidFill>
@@ -50,8 +53,8 @@
         <a:cs typeface="+mn-cs"/>
       </a:defRPr>
     </a:lvl2pPr>
-    <a:lvl3pPr marL="914400" algn="l" defTabSz="914400" rtl="0" eaLnBrk="1" latinLnBrk="0" hangingPunct="1">
-      <a:defRPr sz="1800" kern="1200">
+    <a:lvl3pPr marL="914400" algn="l" defTabSz="914400" rtl="0">
+      <a:defRPr sz="1800">
         <a:solidFill>
           <a:schemeClr val="tx1"/>
         </a:solidFill>
@@ -60,8 +63,8 @@
         <a:cs typeface="+mn-cs"/>
       </a:defRPr>
     </a:lvl3pPr>
-    <a:lvl4pPr marL="1371600" algn="l" defTabSz="914400" rtl="0" eaLnBrk="1" latinLnBrk="0" hangingPunct="1">
-      <a:defRPr sz="1800" kern="1200">
+    <a:lvl4pPr marL="1371600" algn="l" defTabSz="914400" rtl="0">
+      <a:defRPr sz="1800">
         <a:solidFill>
           <a:schemeClr val="tx1"/>
         </a:solidFill>
@@ -70,8 +73,8 @@
         <a:cs typeface="+mn-cs"/>
       </a:defRPr>
     </a:lvl4pPr>
-    <a:lvl5pPr marL="1828800" algn="l" defTabSz="914400" rtl="0" eaLnBrk="1" latinLnBrk="0" hangingPunct="1">
-      <a:defRPr sz="1800" kern="1200">
+    <a:lvl5pPr marL="1828800" algn="l" defTabSz="914400" rtl="0">
+      <a:defRPr sz="1800">
         <a:solidFill>
           <a:schemeClr val="tx1"/>
         </a:solidFill>
@@ -80,8 +83,8 @@
         <a:cs typeface="+mn-cs"/>
       </a:defRPr>
     </a:lvl5pPr>
-    <a:lvl6pPr marL="2286000" algn="l" defTabSz="914400" rtl="0" eaLnBrk="1" latinLnBrk="0" hangingPunct="1">
-      <a:defRPr sz="1800" kern="1200">
+    <a:lvl6pPr marL="2286000" algn="l" defTabSz="914400" rtl="0">
+      <a:defRPr sz="1800">
         <a:solidFill>
           <a:schemeClr val="tx1"/>
         </a:solidFill>
@@ -90,8 +93,8 @@
         <a:cs typeface="+mn-cs"/>
       </a:defRPr>
     </a:lvl6pPr>
-    <a:lvl7pPr marL="2743200" algn="l" defTabSz="914400" rtl="0" eaLnBrk="1" latinLnBrk="0" hangingPunct="1">
-      <a:defRPr sz="1800" kern="1200">
+    <a:lvl7pPr marL="2743200" algn="l" defTabSz="914400" rtl="0">
+      <a:defRPr sz="1800">
         <a:solidFill>
           <a:schemeClr val="tx1"/>
         </a:solidFill>
@@ -100,8 +103,8 @@
         <a:cs typeface="+mn-cs"/>
       </a:defRPr>
     </a:lvl7pPr>
-    <a:lvl8pPr marL="3200400" algn="l" defTabSz="914400" rtl="0" eaLnBrk="1" latinLnBrk="0" hangingPunct="1">
-      <a:defRPr sz="1800" kern="1200">
+    <a:lvl8pPr marL="3200400" algn="l" defTabSz="914400" rtl="0">
+      <a:defRPr sz="1800">
         <a:solidFill>
           <a:schemeClr val="tx1"/>
         </a:solidFill>
@@ -110,8 +113,8 @@
         <a:cs typeface="+mn-cs"/>
       </a:defRPr>
     </a:lvl8pPr>
-    <a:lvl9pPr marL="3657600" algn="l" defTabSz="914400" rtl="0" eaLnBrk="1" latinLnBrk="0" hangingPunct="1">
-      <a:defRPr sz="1800" kern="1200">
+    <a:lvl9pPr marL="3657600" algn="l" defTabSz="914400" rtl="0">
+      <a:defRPr sz="1800">
         <a:solidFill>
           <a:schemeClr val="tx1"/>
         </a:solidFill>
@@ -121,27 +124,1861 @@
       </a:defRPr>
     </a:lvl9pPr>
   </p:defaultTextStyle>
-  <p:extLst>
-    <p:ext uri="{EFAFB233-063F-42B5-8137-9DF3F51BA10A}">
-      <p15:sldGuideLst xmlns:p15="http://schemas.microsoft.com/office/powerpoint/2012/main">
-        <p15:guide id="1" orient="horz" pos="2160">
-          <p15:clr>
-            <a:srgbClr val="A4A3A4"/>
-          </p15:clr>
-        </p15:guide>
-        <p15:guide id="2" pos="2880">
-          <p15:clr>
-            <a:srgbClr val="A4A3A4"/>
-          </p15:clr>
-        </p15:guide>
-      </p15:sldGuideLst>
-    </p:ext>
-  </p:extLst>
 </p:presentation>
 </file>
 
+<file path=ppt/notesMasters/notesMaster1.xml><?xml version="1.0" encoding="utf-8"?>
+<p:notesMaster xmlns:a="http://schemas.openxmlformats.org/drawingml/2006/main" xmlns:r="http://schemas.openxmlformats.org/officeDocument/2006/relationships" xmlns:p="http://schemas.openxmlformats.org/presentationml/2006/main">
+  <p:cSld name="">
+    <p:bg>
+      <p:bgRef idx="1001">
+        <a:schemeClr val="bg1"/>
+      </p:bgRef>
+    </p:bg>
+    <p:spTree>
+      <p:nvGrpSpPr>
+        <p:cNvPr id="1" name=""/>
+        <p:cNvGrpSpPr/>
+        <p:nvPr/>
+      </p:nvGrpSpPr>
+      <p:grpSpPr bwMode="auto">
+        <a:xfrm>
+          <a:off x="0" y="0"/>
+          <a:ext cx="0" cy="0"/>
+          <a:chOff x="0" y="0"/>
+          <a:chExt cx="0" cy="0"/>
+        </a:xfrm>
+      </p:grpSpPr>
+      <p:sp>
+        <p:nvSpPr>
+          <p:cNvPr id="2" name="Header Placeholder 1"/>
+          <p:cNvSpPr>
+            <a:spLocks noGrp="1"/>
+          </p:cNvSpPr>
+          <p:nvPr>
+            <p:ph type="hdr" sz="quarter"/>
+          </p:nvPr>
+        </p:nvSpPr>
+        <p:spPr bwMode="auto">
+          <a:xfrm>
+            <a:off x="0" y="0"/>
+            <a:ext cx="2971800" cy="458788"/>
+          </a:xfrm>
+          <a:prstGeom prst="rect">
+            <a:avLst/>
+          </a:prstGeom>
+        </p:spPr>
+        <p:txBody>
+          <a:bodyPr vert="horz" lIns="91440" tIns="45720" rIns="91440" bIns="45720" rtlCol="0" anchor="ctr"/>
+          <a:lstStyle>
+            <a:lvl1pPr algn="l">
+              <a:defRPr sz="1200"/>
+            </a:lvl1pPr>
+          </a:lstStyle>
+          <a:p>
+            <a:pPr>
+              <a:defRPr/>
+            </a:pPr>
+            <a:endParaRPr/>
+          </a:p>
+        </p:txBody>
+      </p:sp>
+      <p:sp>
+        <p:nvSpPr>
+          <p:cNvPr id="3" name="Date Placeholder 2"/>
+          <p:cNvSpPr>
+            <a:spLocks noGrp="1"/>
+          </p:cNvSpPr>
+          <p:nvPr>
+            <p:ph type="dt" idx="2"/>
+          </p:nvPr>
+        </p:nvSpPr>
+        <p:spPr bwMode="auto">
+          <a:xfrm>
+            <a:off x="3884613" y="0"/>
+            <a:ext cx="2971800" cy="458788"/>
+          </a:xfrm>
+          <a:prstGeom prst="rect">
+            <a:avLst/>
+          </a:prstGeom>
+        </p:spPr>
+        <p:txBody>
+          <a:bodyPr vert="horz" lIns="91440" tIns="45720" rIns="91440" bIns="45720" rtlCol="0" anchor="ctr"/>
+          <a:lstStyle>
+            <a:lvl1pPr algn="r">
+              <a:defRPr sz="1200"/>
+            </a:lvl1pPr>
+          </a:lstStyle>
+          <a:p>
+            <a:pPr>
+              <a:defRPr/>
+            </a:pPr>
+            <a:endParaRPr/>
+          </a:p>
+        </p:txBody>
+      </p:sp>
+      <p:sp>
+        <p:nvSpPr>
+          <p:cNvPr id="3" name="Date Placeholder 2"/>
+          <p:cNvSpPr>
+            <a:spLocks noGrp="1"/>
+          </p:cNvSpPr>
+          <p:nvPr>
+            <p:ph type="dt" idx="3"/>
+          </p:nvPr>
+        </p:nvSpPr>
+        <p:spPr bwMode="auto">
+          <a:xfrm>
+            <a:off x="3884613" y="0"/>
+            <a:ext cx="2971800" cy="458788"/>
+          </a:xfrm>
+          <a:prstGeom prst="rect">
+            <a:avLst/>
+          </a:prstGeom>
+        </p:spPr>
+        <p:txBody>
+          <a:bodyPr vert="horz" lIns="91440" tIns="45720" rIns="91440" bIns="45720" rtlCol="0" anchor="ctr"/>
+          <a:lstStyle>
+            <a:lvl1pPr algn="r">
+              <a:defRPr sz="1200"/>
+            </a:lvl1pPr>
+          </a:lstStyle>
+          <a:p>
+            <a:pPr>
+              <a:defRPr/>
+            </a:pPr>
+            <a:endParaRPr/>
+          </a:p>
+        </p:txBody>
+      </p:sp>
+      <p:sp>
+        <p:nvSpPr>
+          <p:cNvPr id="5" name="Notes Placeholder 4"/>
+          <p:cNvSpPr>
+            <a:spLocks noGrp="1"/>
+          </p:cNvSpPr>
+          <p:nvPr>
+            <p:ph type="body" sz="quarter" idx="1"/>
+          </p:nvPr>
+        </p:nvSpPr>
+        <p:spPr bwMode="auto">
+          <a:xfrm>
+            <a:off x="685800" y="4400550"/>
+            <a:ext cx="5486400" cy="3600450"/>
+          </a:xfrm>
+          <a:prstGeom prst="rect">
+            <a:avLst/>
+          </a:prstGeom>
+        </p:spPr>
+        <p:txBody>
+          <a:bodyPr vert="horz" lIns="91440" tIns="45720" rIns="91440" bIns="45720" rtlCol="0" anchor="ctr"/>
+          <a:lstStyle/>
+          <a:p>
+            <a:pPr>
+              <a:defRPr/>
+            </a:pPr>
+            <a:endParaRPr/>
+          </a:p>
+        </p:txBody>
+      </p:sp>
+      <p:sp>
+        <p:nvSpPr>
+          <p:cNvPr id="6" name="Footer Placeholder 5"/>
+          <p:cNvSpPr>
+            <a:spLocks noGrp="1"/>
+          </p:cNvSpPr>
+          <p:nvPr>
+            <p:ph type="ftr" sz="quarter" idx="4"/>
+          </p:nvPr>
+        </p:nvSpPr>
+        <p:spPr bwMode="auto">
+          <a:xfrm>
+            <a:off x="0" y="8685213"/>
+            <a:ext cx="2971800" cy="458787"/>
+          </a:xfrm>
+          <a:prstGeom prst="rect">
+            <a:avLst/>
+          </a:prstGeom>
+        </p:spPr>
+        <p:txBody>
+          <a:bodyPr vert="horz" lIns="91440" tIns="45720" rIns="91440" bIns="45720" rtlCol="0" anchor="b"/>
+          <a:lstStyle>
+            <a:lvl1pPr algn="l">
+              <a:defRPr sz="1200"/>
+            </a:lvl1pPr>
+          </a:lstStyle>
+          <a:p>
+            <a:pPr>
+              <a:defRPr/>
+            </a:pPr>
+            <a:endParaRPr/>
+          </a:p>
+        </p:txBody>
+      </p:sp>
+      <p:sp>
+        <p:nvSpPr>
+          <p:cNvPr id="7" name="Slide Number Placeholder 6"/>
+          <p:cNvSpPr>
+            <a:spLocks noGrp="1"/>
+          </p:cNvSpPr>
+          <p:nvPr>
+            <p:ph type="sldNum" sz="quarter" idx="10"/>
+          </p:nvPr>
+        </p:nvSpPr>
+        <p:spPr bwMode="auto">
+          <a:xfrm>
+            <a:off x="3884613" y="8685213"/>
+            <a:ext cx="2971800" cy="458787"/>
+          </a:xfrm>
+          <a:prstGeom prst="rect">
+            <a:avLst/>
+          </a:prstGeom>
+        </p:spPr>
+        <p:txBody>
+          <a:bodyPr vert="horz" lIns="91440" tIns="45720" rIns="91440" bIns="45720" rtlCol="0" anchor="b"/>
+          <a:lstStyle>
+            <a:lvl1pPr algn="r">
+              <a:defRPr sz="1200"/>
+            </a:lvl1pPr>
+          </a:lstStyle>
+          <a:p>
+            <a:pPr>
+              <a:defRPr/>
+            </a:pPr>
+            <a:endParaRPr/>
+          </a:p>
+        </p:txBody>
+      </p:sp>
+    </p:spTree>
+  </p:cSld>
+  <p:clrMap bg1="lt1" tx1="dk1" bg2="lt2" tx2="dk2" accent1="accent1" accent2="accent2" accent3="accent3" accent4="accent4" accent5="accent5" accent6="accent6" hlink="hlink" folHlink="folHlink"/>
+  <p:notesStyle>
+    <a:lvl1pPr marL="0" algn="l" defTabSz="914400">
+      <a:defRPr sz="1200">
+        <a:solidFill>
+          <a:schemeClr val="tx1"/>
+        </a:solidFill>
+        <a:latin typeface="+mn-lt"/>
+        <a:ea typeface="+mn-ea"/>
+        <a:cs typeface="+mn-cs"/>
+      </a:defRPr>
+    </a:lvl1pPr>
+    <a:lvl2pPr marL="457200" algn="l" defTabSz="914400">
+      <a:defRPr sz="1200">
+        <a:solidFill>
+          <a:schemeClr val="tx1"/>
+        </a:solidFill>
+        <a:latin typeface="+mn-lt"/>
+        <a:ea typeface="+mn-ea"/>
+        <a:cs typeface="+mn-cs"/>
+      </a:defRPr>
+    </a:lvl2pPr>
+    <a:lvl3pPr marL="914400" algn="l" defTabSz="914400">
+      <a:defRPr sz="1200">
+        <a:solidFill>
+          <a:schemeClr val="tx1"/>
+        </a:solidFill>
+        <a:latin typeface="+mn-lt"/>
+        <a:ea typeface="+mn-ea"/>
+        <a:cs typeface="+mn-cs"/>
+      </a:defRPr>
+    </a:lvl3pPr>
+    <a:lvl4pPr marL="1371600" algn="l" defTabSz="914400">
+      <a:defRPr sz="1200">
+        <a:solidFill>
+          <a:schemeClr val="tx1"/>
+        </a:solidFill>
+        <a:latin typeface="+mn-lt"/>
+        <a:ea typeface="+mn-ea"/>
+        <a:cs typeface="+mn-cs"/>
+      </a:defRPr>
+    </a:lvl4pPr>
+    <a:lvl5pPr marL="1828800" algn="l" defTabSz="914400">
+      <a:defRPr sz="1200">
+        <a:solidFill>
+          <a:schemeClr val="tx1"/>
+        </a:solidFill>
+        <a:latin typeface="+mn-lt"/>
+        <a:ea typeface="+mn-ea"/>
+        <a:cs typeface="+mn-cs"/>
+      </a:defRPr>
+    </a:lvl5pPr>
+    <a:lvl6pPr marL="2286000" algn="l" defTabSz="914400">
+      <a:defRPr sz="1200">
+        <a:solidFill>
+          <a:schemeClr val="tx1"/>
+        </a:solidFill>
+        <a:latin typeface="+mn-lt"/>
+        <a:ea typeface="+mn-ea"/>
+        <a:cs typeface="+mn-cs"/>
+      </a:defRPr>
+    </a:lvl6pPr>
+    <a:lvl7pPr marL="2743200" algn="l" defTabSz="914400">
+      <a:defRPr sz="1200">
+        <a:solidFill>
+          <a:schemeClr val="tx1"/>
+        </a:solidFill>
+        <a:latin typeface="+mn-lt"/>
+        <a:ea typeface="+mn-ea"/>
+        <a:cs typeface="+mn-cs"/>
+      </a:defRPr>
+    </a:lvl7pPr>
+    <a:lvl8pPr marL="3200400" algn="l" defTabSz="914400">
+      <a:defRPr sz="1200">
+        <a:solidFill>
+          <a:schemeClr val="tx1"/>
+        </a:solidFill>
+        <a:latin typeface="+mn-lt"/>
+        <a:ea typeface="+mn-ea"/>
+        <a:cs typeface="+mn-cs"/>
+      </a:defRPr>
+    </a:lvl8pPr>
+    <a:lvl9pPr marL="3657600" algn="l" defTabSz="914400">
+      <a:defRPr sz="1200">
+        <a:solidFill>
+          <a:schemeClr val="tx1"/>
+        </a:solidFill>
+        <a:latin typeface="+mn-lt"/>
+        <a:ea typeface="+mn-ea"/>
+        <a:cs typeface="+mn-cs"/>
+      </a:defRPr>
+    </a:lvl9pPr>
+  </p:notesStyle>
+</p:notesMaster>
+</file>
+
+<file path=ppt/notesSlides/notesSlide1.xml><?xml version="1.0" encoding="utf-8"?>
+<p:notes xmlns:a="http://schemas.openxmlformats.org/drawingml/2006/main" xmlns:r="http://schemas.openxmlformats.org/officeDocument/2006/relationships" xmlns:p="http://schemas.openxmlformats.org/presentationml/2006/main" xmlns:m="http://schemas.openxmlformats.org/officeDocument/2006/math" xmlns:w="http://schemas.openxmlformats.org/wordprocessingml/2006/main">
+  <p:cSld name="">
+    <p:spTree>
+      <p:nvGrpSpPr>
+        <p:cNvPr id="1" name=""/>
+        <p:cNvGrpSpPr/>
+        <p:nvPr/>
+      </p:nvGrpSpPr>
+      <p:grpSpPr bwMode="auto">
+        <a:xfrm>
+          <a:off x="0" y="0"/>
+          <a:ext cx="0" cy="0"/>
+          <a:chOff x="0" y="0"/>
+          <a:chExt cx="0" cy="0"/>
+        </a:xfrm>
+      </p:grpSpPr>
+      <p:sp>
+        <p:nvSpPr>
+          <p:cNvPr id="2" name="Slide Image Placeholder 1"/>
+          <p:cNvSpPr>
+            <a:spLocks noChangeAspect="1" noGrp="1" noRot="1"/>
+          </p:cNvSpPr>
+          <p:nvPr>
+            <p:ph type="sldImg"/>
+          </p:nvPr>
+        </p:nvSpPr>
+        <p:spPr bwMode="auto"/>
+      </p:sp>
+      <p:sp>
+        <p:nvSpPr>
+          <p:cNvPr id="3" name="Notes Placeholder 2"/>
+          <p:cNvSpPr>
+            <a:spLocks noGrp="1"/>
+          </p:cNvSpPr>
+          <p:nvPr>
+            <p:ph type="body" idx="1"/>
+          </p:nvPr>
+        </p:nvSpPr>
+        <p:spPr bwMode="auto"/>
+        <p:txBody>
+          <a:bodyPr/>
+          <a:lstStyle/>
+          <a:p>
+            <a:pPr>
+              <a:defRPr/>
+            </a:pPr>
+            <a:endParaRPr/>
+          </a:p>
+        </p:txBody>
+      </p:sp>
+      <p:sp>
+        <p:nvSpPr>
+          <p:cNvPr id="4" name="Slide Number Placeholder 3"/>
+          <p:cNvSpPr>
+            <a:spLocks noGrp="1"/>
+          </p:cNvSpPr>
+          <p:nvPr>
+            <p:ph type="sldNum" sz="quarter" idx="10"/>
+          </p:nvPr>
+        </p:nvSpPr>
+        <p:spPr bwMode="auto"/>
+        <p:txBody>
+          <a:bodyPr/>
+          <a:lstStyle/>
+          <a:p>
+            <a:pPr>
+              <a:defRPr/>
+            </a:pPr>
+            <a:fld id="{D46D69DA-A7FC-577A-FF82-3B9F30E47693}" type="slidenum">
+              <a:rPr/>
+              <a:t/>
+            </a:fld>
+            <a:endParaRPr/>
+          </a:p>
+        </p:txBody>
+      </p:sp>
+    </p:spTree>
+  </p:cSld>
+  <p:clrMapOvr>
+    <a:masterClrMapping/>
+  </p:clrMapOvr>
+</p:notes>
+</file>
+
+<file path=ppt/notesSlides/notesSlide10.xml><?xml version="1.0" encoding="utf-8"?>
+<p:notes xmlns:a="http://schemas.openxmlformats.org/drawingml/2006/main" xmlns:r="http://schemas.openxmlformats.org/officeDocument/2006/relationships" xmlns:p="http://schemas.openxmlformats.org/presentationml/2006/main" xmlns:m="http://schemas.openxmlformats.org/officeDocument/2006/math" xmlns:w="http://schemas.openxmlformats.org/wordprocessingml/2006/main">
+  <p:cSld name="">
+    <p:spTree>
+      <p:nvGrpSpPr>
+        <p:cNvPr id="1" name=""/>
+        <p:cNvGrpSpPr/>
+        <p:nvPr/>
+      </p:nvGrpSpPr>
+      <p:grpSpPr bwMode="auto">
+        <a:xfrm>
+          <a:off x="0" y="0"/>
+          <a:ext cx="0" cy="0"/>
+          <a:chOff x="0" y="0"/>
+          <a:chExt cx="0" cy="0"/>
+        </a:xfrm>
+      </p:grpSpPr>
+      <p:sp>
+        <p:nvSpPr>
+          <p:cNvPr id="2" name="Slide Image Placeholder 1"/>
+          <p:cNvSpPr>
+            <a:spLocks noChangeAspect="1" noGrp="1" noRot="1"/>
+          </p:cNvSpPr>
+          <p:nvPr>
+            <p:ph type="sldImg"/>
+          </p:nvPr>
+        </p:nvSpPr>
+        <p:spPr bwMode="auto"/>
+      </p:sp>
+      <p:sp>
+        <p:nvSpPr>
+          <p:cNvPr id="3" name="Notes Placeholder 2"/>
+          <p:cNvSpPr>
+            <a:spLocks noGrp="1"/>
+          </p:cNvSpPr>
+          <p:nvPr>
+            <p:ph type="body" idx="1"/>
+          </p:nvPr>
+        </p:nvSpPr>
+        <p:spPr bwMode="auto"/>
+        <p:txBody>
+          <a:bodyPr/>
+          <a:lstStyle/>
+          <a:p>
+            <a:pPr>
+              <a:defRPr/>
+            </a:pPr>
+            <a:endParaRPr/>
+          </a:p>
+        </p:txBody>
+      </p:sp>
+      <p:sp>
+        <p:nvSpPr>
+          <p:cNvPr id="4" name="Slide Number Placeholder 3"/>
+          <p:cNvSpPr>
+            <a:spLocks noGrp="1"/>
+          </p:cNvSpPr>
+          <p:nvPr>
+            <p:ph type="sldNum" sz="quarter" idx="10"/>
+          </p:nvPr>
+        </p:nvSpPr>
+        <p:spPr bwMode="auto"/>
+        <p:txBody>
+          <a:bodyPr/>
+          <a:lstStyle/>
+          <a:p>
+            <a:pPr>
+              <a:defRPr/>
+            </a:pPr>
+            <a:fld id="{81069770-22CE-DE61-3297-548772185850}" type="slidenum">
+              <a:rPr/>
+              <a:t/>
+            </a:fld>
+            <a:endParaRPr/>
+          </a:p>
+        </p:txBody>
+      </p:sp>
+    </p:spTree>
+  </p:cSld>
+  <p:clrMapOvr>
+    <a:masterClrMapping/>
+  </p:clrMapOvr>
+</p:notes>
+</file>
+
+<file path=ppt/notesSlides/notesSlide11.xml><?xml version="1.0" encoding="utf-8"?>
+<p:notes xmlns:a="http://schemas.openxmlformats.org/drawingml/2006/main" xmlns:r="http://schemas.openxmlformats.org/officeDocument/2006/relationships" xmlns:p="http://schemas.openxmlformats.org/presentationml/2006/main" xmlns:m="http://schemas.openxmlformats.org/officeDocument/2006/math" xmlns:w="http://schemas.openxmlformats.org/wordprocessingml/2006/main">
+  <p:cSld name="">
+    <p:spTree>
+      <p:nvGrpSpPr>
+        <p:cNvPr id="1" name=""/>
+        <p:cNvGrpSpPr/>
+        <p:nvPr/>
+      </p:nvGrpSpPr>
+      <p:grpSpPr bwMode="auto">
+        <a:xfrm>
+          <a:off x="0" y="0"/>
+          <a:ext cx="0" cy="0"/>
+          <a:chOff x="0" y="0"/>
+          <a:chExt cx="0" cy="0"/>
+        </a:xfrm>
+      </p:grpSpPr>
+      <p:sp>
+        <p:nvSpPr>
+          <p:cNvPr id="2" name="Slide Image Placeholder 1"/>
+          <p:cNvSpPr>
+            <a:spLocks noChangeAspect="1" noGrp="1" noRot="1"/>
+          </p:cNvSpPr>
+          <p:nvPr>
+            <p:ph type="sldImg"/>
+          </p:nvPr>
+        </p:nvSpPr>
+        <p:spPr bwMode="auto"/>
+      </p:sp>
+      <p:sp>
+        <p:nvSpPr>
+          <p:cNvPr id="3" name="Notes Placeholder 2"/>
+          <p:cNvSpPr>
+            <a:spLocks noGrp="1"/>
+          </p:cNvSpPr>
+          <p:nvPr>
+            <p:ph type="body" idx="1"/>
+          </p:nvPr>
+        </p:nvSpPr>
+        <p:spPr bwMode="auto"/>
+        <p:txBody>
+          <a:bodyPr/>
+          <a:lstStyle/>
+          <a:p>
+            <a:pPr>
+              <a:defRPr/>
+            </a:pPr>
+            <a:endParaRPr/>
+          </a:p>
+        </p:txBody>
+      </p:sp>
+      <p:sp>
+        <p:nvSpPr>
+          <p:cNvPr id="4" name="Slide Number Placeholder 3"/>
+          <p:cNvSpPr>
+            <a:spLocks noGrp="1"/>
+          </p:cNvSpPr>
+          <p:nvPr>
+            <p:ph type="sldNum" sz="quarter" idx="10"/>
+          </p:nvPr>
+        </p:nvSpPr>
+        <p:spPr bwMode="auto"/>
+        <p:txBody>
+          <a:bodyPr/>
+          <a:lstStyle/>
+          <a:p>
+            <a:pPr>
+              <a:defRPr/>
+            </a:pPr>
+            <a:fld id="{E103B682-B4F8-D79A-01B9-8B244EFF41E6}" type="slidenum">
+              <a:rPr/>
+              <a:t/>
+            </a:fld>
+            <a:endParaRPr/>
+          </a:p>
+        </p:txBody>
+      </p:sp>
+    </p:spTree>
+  </p:cSld>
+  <p:clrMapOvr>
+    <a:masterClrMapping/>
+  </p:clrMapOvr>
+</p:notes>
+</file>
+
+<file path=ppt/notesSlides/notesSlide12.xml><?xml version="1.0" encoding="utf-8"?>
+<p:notes xmlns:a="http://schemas.openxmlformats.org/drawingml/2006/main" xmlns:r="http://schemas.openxmlformats.org/officeDocument/2006/relationships" xmlns:p="http://schemas.openxmlformats.org/presentationml/2006/main" xmlns:m="http://schemas.openxmlformats.org/officeDocument/2006/math" xmlns:w="http://schemas.openxmlformats.org/wordprocessingml/2006/main">
+  <p:cSld name="">
+    <p:spTree>
+      <p:nvGrpSpPr>
+        <p:cNvPr id="1" name=""/>
+        <p:cNvGrpSpPr/>
+        <p:nvPr/>
+      </p:nvGrpSpPr>
+      <p:grpSpPr bwMode="auto">
+        <a:xfrm>
+          <a:off x="0" y="0"/>
+          <a:ext cx="0" cy="0"/>
+          <a:chOff x="0" y="0"/>
+          <a:chExt cx="0" cy="0"/>
+        </a:xfrm>
+      </p:grpSpPr>
+      <p:sp>
+        <p:nvSpPr>
+          <p:cNvPr id="2" name="Slide Image Placeholder 1"/>
+          <p:cNvSpPr>
+            <a:spLocks noChangeAspect="1" noGrp="1" noRot="1"/>
+          </p:cNvSpPr>
+          <p:nvPr>
+            <p:ph type="sldImg"/>
+          </p:nvPr>
+        </p:nvSpPr>
+        <p:spPr bwMode="auto"/>
+      </p:sp>
+      <p:sp>
+        <p:nvSpPr>
+          <p:cNvPr id="3" name="Notes Placeholder 2"/>
+          <p:cNvSpPr>
+            <a:spLocks noGrp="1"/>
+          </p:cNvSpPr>
+          <p:nvPr>
+            <p:ph type="body" idx="1"/>
+          </p:nvPr>
+        </p:nvSpPr>
+        <p:spPr bwMode="auto"/>
+        <p:txBody>
+          <a:bodyPr/>
+          <a:lstStyle/>
+          <a:p>
+            <a:pPr>
+              <a:defRPr/>
+            </a:pPr>
+            <a:endParaRPr/>
+          </a:p>
+        </p:txBody>
+      </p:sp>
+      <p:sp>
+        <p:nvSpPr>
+          <p:cNvPr id="4" name="Slide Number Placeholder 3"/>
+          <p:cNvSpPr>
+            <a:spLocks noGrp="1"/>
+          </p:cNvSpPr>
+          <p:nvPr>
+            <p:ph type="sldNum" sz="quarter" idx="10"/>
+          </p:nvPr>
+        </p:nvSpPr>
+        <p:spPr bwMode="auto"/>
+        <p:txBody>
+          <a:bodyPr/>
+          <a:lstStyle/>
+          <a:p>
+            <a:pPr>
+              <a:defRPr/>
+            </a:pPr>
+            <a:fld id="{53344A5E-C6BF-777D-7951-C15A128C5491}" type="slidenum">
+              <a:rPr/>
+              <a:t/>
+            </a:fld>
+            <a:endParaRPr/>
+          </a:p>
+        </p:txBody>
+      </p:sp>
+    </p:spTree>
+  </p:cSld>
+  <p:clrMapOvr>
+    <a:masterClrMapping/>
+  </p:clrMapOvr>
+</p:notes>
+</file>
+
+<file path=ppt/notesSlides/notesSlide13.xml><?xml version="1.0" encoding="utf-8"?>
+<p:notes xmlns:a="http://schemas.openxmlformats.org/drawingml/2006/main" xmlns:r="http://schemas.openxmlformats.org/officeDocument/2006/relationships" xmlns:p="http://schemas.openxmlformats.org/presentationml/2006/main" xmlns:m="http://schemas.openxmlformats.org/officeDocument/2006/math" xmlns:w="http://schemas.openxmlformats.org/wordprocessingml/2006/main">
+  <p:cSld name="">
+    <p:spTree>
+      <p:nvGrpSpPr>
+        <p:cNvPr id="1" name=""/>
+        <p:cNvGrpSpPr/>
+        <p:nvPr/>
+      </p:nvGrpSpPr>
+      <p:grpSpPr bwMode="auto">
+        <a:xfrm>
+          <a:off x="0" y="0"/>
+          <a:ext cx="0" cy="0"/>
+          <a:chOff x="0" y="0"/>
+          <a:chExt cx="0" cy="0"/>
+        </a:xfrm>
+      </p:grpSpPr>
+      <p:sp>
+        <p:nvSpPr>
+          <p:cNvPr id="2" name="Slide Image Placeholder 1"/>
+          <p:cNvSpPr>
+            <a:spLocks noChangeAspect="1" noGrp="1" noRot="1"/>
+          </p:cNvSpPr>
+          <p:nvPr>
+            <p:ph type="sldImg"/>
+          </p:nvPr>
+        </p:nvSpPr>
+        <p:spPr bwMode="auto"/>
+      </p:sp>
+      <p:sp>
+        <p:nvSpPr>
+          <p:cNvPr id="3" name="Notes Placeholder 2"/>
+          <p:cNvSpPr>
+            <a:spLocks noGrp="1"/>
+          </p:cNvSpPr>
+          <p:nvPr>
+            <p:ph type="body" idx="1"/>
+          </p:nvPr>
+        </p:nvSpPr>
+        <p:spPr bwMode="auto"/>
+        <p:txBody>
+          <a:bodyPr/>
+          <a:lstStyle/>
+          <a:p>
+            <a:pPr>
+              <a:defRPr/>
+            </a:pPr>
+            <a:endParaRPr/>
+          </a:p>
+        </p:txBody>
+      </p:sp>
+      <p:sp>
+        <p:nvSpPr>
+          <p:cNvPr id="4" name="Slide Number Placeholder 3"/>
+          <p:cNvSpPr>
+            <a:spLocks noGrp="1"/>
+          </p:cNvSpPr>
+          <p:nvPr>
+            <p:ph type="sldNum" sz="quarter" idx="10"/>
+          </p:nvPr>
+        </p:nvSpPr>
+        <p:spPr bwMode="auto"/>
+        <p:txBody>
+          <a:bodyPr/>
+          <a:lstStyle/>
+          <a:p>
+            <a:pPr>
+              <a:defRPr/>
+            </a:pPr>
+            <a:fld id="{4D2A06D5-7839-C250-790A-1450DD73051A}" type="slidenum">
+              <a:rPr/>
+              <a:t/>
+            </a:fld>
+            <a:endParaRPr/>
+          </a:p>
+        </p:txBody>
+      </p:sp>
+    </p:spTree>
+  </p:cSld>
+  <p:clrMapOvr>
+    <a:masterClrMapping/>
+  </p:clrMapOvr>
+</p:notes>
+</file>
+
+<file path=ppt/notesSlides/notesSlide14.xml><?xml version="1.0" encoding="utf-8"?>
+<p:notes xmlns:a="http://schemas.openxmlformats.org/drawingml/2006/main" xmlns:r="http://schemas.openxmlformats.org/officeDocument/2006/relationships" xmlns:p="http://schemas.openxmlformats.org/presentationml/2006/main" xmlns:m="http://schemas.openxmlformats.org/officeDocument/2006/math" xmlns:w="http://schemas.openxmlformats.org/wordprocessingml/2006/main">
+  <p:cSld name="">
+    <p:spTree>
+      <p:nvGrpSpPr>
+        <p:cNvPr id="1" name=""/>
+        <p:cNvGrpSpPr/>
+        <p:nvPr/>
+      </p:nvGrpSpPr>
+      <p:grpSpPr bwMode="auto">
+        <a:xfrm>
+          <a:off x="0" y="0"/>
+          <a:ext cx="0" cy="0"/>
+          <a:chOff x="0" y="0"/>
+          <a:chExt cx="0" cy="0"/>
+        </a:xfrm>
+      </p:grpSpPr>
+      <p:sp>
+        <p:nvSpPr>
+          <p:cNvPr id="2" name="Slide Image Placeholder 1"/>
+          <p:cNvSpPr>
+            <a:spLocks noChangeAspect="1" noGrp="1" noRot="1"/>
+          </p:cNvSpPr>
+          <p:nvPr>
+            <p:ph type="sldImg"/>
+          </p:nvPr>
+        </p:nvSpPr>
+        <p:spPr bwMode="auto"/>
+      </p:sp>
+      <p:sp>
+        <p:nvSpPr>
+          <p:cNvPr id="3" name="Notes Placeholder 2"/>
+          <p:cNvSpPr>
+            <a:spLocks noGrp="1"/>
+          </p:cNvSpPr>
+          <p:nvPr>
+            <p:ph type="body" idx="1"/>
+          </p:nvPr>
+        </p:nvSpPr>
+        <p:spPr bwMode="auto"/>
+        <p:txBody>
+          <a:bodyPr/>
+          <a:lstStyle/>
+          <a:p>
+            <a:pPr>
+              <a:defRPr/>
+            </a:pPr>
+            <a:endParaRPr/>
+          </a:p>
+        </p:txBody>
+      </p:sp>
+      <p:sp>
+        <p:nvSpPr>
+          <p:cNvPr id="4" name="Slide Number Placeholder 3"/>
+          <p:cNvSpPr>
+            <a:spLocks noGrp="1"/>
+          </p:cNvSpPr>
+          <p:nvPr>
+            <p:ph type="sldNum" sz="quarter" idx="10"/>
+          </p:nvPr>
+        </p:nvSpPr>
+        <p:spPr bwMode="auto"/>
+        <p:txBody>
+          <a:bodyPr/>
+          <a:lstStyle/>
+          <a:p>
+            <a:pPr>
+              <a:defRPr/>
+            </a:pPr>
+            <a:fld id="{3D409256-7D90-5423-7F9F-83F09C64045C}" type="slidenum">
+              <a:rPr/>
+              <a:t/>
+            </a:fld>
+            <a:endParaRPr/>
+          </a:p>
+        </p:txBody>
+      </p:sp>
+    </p:spTree>
+  </p:cSld>
+  <p:clrMapOvr>
+    <a:masterClrMapping/>
+  </p:clrMapOvr>
+</p:notes>
+</file>
+
+<file path=ppt/notesSlides/notesSlide15.xml><?xml version="1.0" encoding="utf-8"?>
+<p:notes xmlns:a="http://schemas.openxmlformats.org/drawingml/2006/main" xmlns:r="http://schemas.openxmlformats.org/officeDocument/2006/relationships" xmlns:p="http://schemas.openxmlformats.org/presentationml/2006/main" xmlns:m="http://schemas.openxmlformats.org/officeDocument/2006/math" xmlns:w="http://schemas.openxmlformats.org/wordprocessingml/2006/main">
+  <p:cSld name="">
+    <p:spTree>
+      <p:nvGrpSpPr>
+        <p:cNvPr id="1" name=""/>
+        <p:cNvGrpSpPr/>
+        <p:nvPr/>
+      </p:nvGrpSpPr>
+      <p:grpSpPr bwMode="auto">
+        <a:xfrm>
+          <a:off x="0" y="0"/>
+          <a:ext cx="0" cy="0"/>
+          <a:chOff x="0" y="0"/>
+          <a:chExt cx="0" cy="0"/>
+        </a:xfrm>
+      </p:grpSpPr>
+      <p:sp>
+        <p:nvSpPr>
+          <p:cNvPr id="2" name="Slide Image Placeholder 1"/>
+          <p:cNvSpPr>
+            <a:spLocks noChangeAspect="1" noGrp="1" noRot="1"/>
+          </p:cNvSpPr>
+          <p:nvPr>
+            <p:ph type="sldImg"/>
+          </p:nvPr>
+        </p:nvSpPr>
+        <p:spPr bwMode="auto"/>
+      </p:sp>
+      <p:sp>
+        <p:nvSpPr>
+          <p:cNvPr id="3" name="Notes Placeholder 2"/>
+          <p:cNvSpPr>
+            <a:spLocks noGrp="1"/>
+          </p:cNvSpPr>
+          <p:nvPr>
+            <p:ph type="body" idx="1"/>
+          </p:nvPr>
+        </p:nvSpPr>
+        <p:spPr bwMode="auto"/>
+        <p:txBody>
+          <a:bodyPr/>
+          <a:lstStyle/>
+          <a:p>
+            <a:pPr>
+              <a:defRPr/>
+            </a:pPr>
+            <a:endParaRPr/>
+          </a:p>
+        </p:txBody>
+      </p:sp>
+      <p:sp>
+        <p:nvSpPr>
+          <p:cNvPr id="4" name="Slide Number Placeholder 3"/>
+          <p:cNvSpPr>
+            <a:spLocks noGrp="1"/>
+          </p:cNvSpPr>
+          <p:nvPr>
+            <p:ph type="sldNum" sz="quarter" idx="10"/>
+          </p:nvPr>
+        </p:nvSpPr>
+        <p:spPr bwMode="auto"/>
+        <p:txBody>
+          <a:bodyPr/>
+          <a:lstStyle/>
+          <a:p>
+            <a:pPr>
+              <a:defRPr/>
+            </a:pPr>
+            <a:fld id="{6F6C7261-C33D-3E24-3483-F85AC158A710}" type="slidenum">
+              <a:rPr/>
+              <a:t/>
+            </a:fld>
+            <a:endParaRPr/>
+          </a:p>
+        </p:txBody>
+      </p:sp>
+    </p:spTree>
+  </p:cSld>
+  <p:clrMapOvr>
+    <a:masterClrMapping/>
+  </p:clrMapOvr>
+</p:notes>
+</file>
+
+<file path=ppt/notesSlides/notesSlide16.xml><?xml version="1.0" encoding="utf-8"?>
+<p:notes xmlns:a="http://schemas.openxmlformats.org/drawingml/2006/main" xmlns:r="http://schemas.openxmlformats.org/officeDocument/2006/relationships" xmlns:p="http://schemas.openxmlformats.org/presentationml/2006/main" xmlns:m="http://schemas.openxmlformats.org/officeDocument/2006/math" xmlns:w="http://schemas.openxmlformats.org/wordprocessingml/2006/main">
+  <p:cSld name="">
+    <p:spTree>
+      <p:nvGrpSpPr>
+        <p:cNvPr id="1" name=""/>
+        <p:cNvGrpSpPr/>
+        <p:nvPr/>
+      </p:nvGrpSpPr>
+      <p:grpSpPr bwMode="auto">
+        <a:xfrm>
+          <a:off x="0" y="0"/>
+          <a:ext cx="0" cy="0"/>
+          <a:chOff x="0" y="0"/>
+          <a:chExt cx="0" cy="0"/>
+        </a:xfrm>
+      </p:grpSpPr>
+      <p:sp>
+        <p:nvSpPr>
+          <p:cNvPr id="2" name="Slide Image Placeholder 1"/>
+          <p:cNvSpPr>
+            <a:spLocks noChangeAspect="1" noGrp="1" noRot="1"/>
+          </p:cNvSpPr>
+          <p:nvPr>
+            <p:ph type="sldImg"/>
+          </p:nvPr>
+        </p:nvSpPr>
+        <p:spPr bwMode="auto"/>
+      </p:sp>
+      <p:sp>
+        <p:nvSpPr>
+          <p:cNvPr id="3" name="Notes Placeholder 2"/>
+          <p:cNvSpPr>
+            <a:spLocks noGrp="1"/>
+          </p:cNvSpPr>
+          <p:nvPr>
+            <p:ph type="body" idx="1"/>
+          </p:nvPr>
+        </p:nvSpPr>
+        <p:spPr bwMode="auto"/>
+        <p:txBody>
+          <a:bodyPr/>
+          <a:lstStyle/>
+          <a:p>
+            <a:pPr>
+              <a:defRPr/>
+            </a:pPr>
+            <a:endParaRPr/>
+          </a:p>
+        </p:txBody>
+      </p:sp>
+      <p:sp>
+        <p:nvSpPr>
+          <p:cNvPr id="4" name="Slide Number Placeholder 3"/>
+          <p:cNvSpPr>
+            <a:spLocks noGrp="1"/>
+          </p:cNvSpPr>
+          <p:nvPr>
+            <p:ph type="sldNum" sz="quarter" idx="10"/>
+          </p:nvPr>
+        </p:nvSpPr>
+        <p:spPr bwMode="auto"/>
+        <p:txBody>
+          <a:bodyPr/>
+          <a:lstStyle/>
+          <a:p>
+            <a:pPr>
+              <a:defRPr/>
+            </a:pPr>
+            <a:fld id="{D0B572CF-1D11-AEEB-D3AA-903A5EDC969B}" type="slidenum">
+              <a:rPr/>
+              <a:t/>
+            </a:fld>
+            <a:endParaRPr/>
+          </a:p>
+        </p:txBody>
+      </p:sp>
+    </p:spTree>
+  </p:cSld>
+  <p:clrMapOvr>
+    <a:masterClrMapping/>
+  </p:clrMapOvr>
+</p:notes>
+</file>
+
+<file path=ppt/notesSlides/notesSlide17.xml><?xml version="1.0" encoding="utf-8"?>
+<p:notes xmlns:a="http://schemas.openxmlformats.org/drawingml/2006/main" xmlns:r="http://schemas.openxmlformats.org/officeDocument/2006/relationships" xmlns:p="http://schemas.openxmlformats.org/presentationml/2006/main" xmlns:m="http://schemas.openxmlformats.org/officeDocument/2006/math" xmlns:w="http://schemas.openxmlformats.org/wordprocessingml/2006/main">
+  <p:cSld name="">
+    <p:spTree>
+      <p:nvGrpSpPr>
+        <p:cNvPr id="1" name=""/>
+        <p:cNvGrpSpPr/>
+        <p:nvPr/>
+      </p:nvGrpSpPr>
+      <p:grpSpPr bwMode="auto">
+        <a:xfrm>
+          <a:off x="0" y="0"/>
+          <a:ext cx="0" cy="0"/>
+          <a:chOff x="0" y="0"/>
+          <a:chExt cx="0" cy="0"/>
+        </a:xfrm>
+      </p:grpSpPr>
+      <p:sp>
+        <p:nvSpPr>
+          <p:cNvPr id="2" name="Slide Image Placeholder 1"/>
+          <p:cNvSpPr>
+            <a:spLocks noChangeAspect="1" noGrp="1" noRot="1"/>
+          </p:cNvSpPr>
+          <p:nvPr>
+            <p:ph type="sldImg"/>
+          </p:nvPr>
+        </p:nvSpPr>
+        <p:spPr bwMode="auto"/>
+      </p:sp>
+      <p:sp>
+        <p:nvSpPr>
+          <p:cNvPr id="3" name="Notes Placeholder 2"/>
+          <p:cNvSpPr>
+            <a:spLocks noGrp="1"/>
+          </p:cNvSpPr>
+          <p:nvPr>
+            <p:ph type="body" idx="1"/>
+          </p:nvPr>
+        </p:nvSpPr>
+        <p:spPr bwMode="auto"/>
+        <p:txBody>
+          <a:bodyPr/>
+          <a:lstStyle/>
+          <a:p>
+            <a:pPr>
+              <a:defRPr/>
+            </a:pPr>
+            <a:endParaRPr/>
+          </a:p>
+        </p:txBody>
+      </p:sp>
+      <p:sp>
+        <p:nvSpPr>
+          <p:cNvPr id="4" name="Slide Number Placeholder 3"/>
+          <p:cNvSpPr>
+            <a:spLocks noGrp="1"/>
+          </p:cNvSpPr>
+          <p:nvPr>
+            <p:ph type="sldNum" sz="quarter" idx="10"/>
+          </p:nvPr>
+        </p:nvSpPr>
+        <p:spPr bwMode="auto"/>
+        <p:txBody>
+          <a:bodyPr/>
+          <a:lstStyle/>
+          <a:p>
+            <a:pPr>
+              <a:defRPr/>
+            </a:pPr>
+            <a:fld id="{191B6F1C-017B-EB86-7AED-AB3BEC804ABF}" type="slidenum">
+              <a:rPr/>
+              <a:t/>
+            </a:fld>
+            <a:endParaRPr/>
+          </a:p>
+        </p:txBody>
+      </p:sp>
+    </p:spTree>
+  </p:cSld>
+  <p:clrMapOvr>
+    <a:masterClrMapping/>
+  </p:clrMapOvr>
+</p:notes>
+</file>
+
+<file path=ppt/notesSlides/notesSlide18.xml><?xml version="1.0" encoding="utf-8"?>
+<p:notes xmlns:a="http://schemas.openxmlformats.org/drawingml/2006/main" xmlns:r="http://schemas.openxmlformats.org/officeDocument/2006/relationships" xmlns:p="http://schemas.openxmlformats.org/presentationml/2006/main" xmlns:m="http://schemas.openxmlformats.org/officeDocument/2006/math" xmlns:w="http://schemas.openxmlformats.org/wordprocessingml/2006/main">
+  <p:cSld name="">
+    <p:spTree>
+      <p:nvGrpSpPr>
+        <p:cNvPr id="1" name=""/>
+        <p:cNvGrpSpPr/>
+        <p:nvPr/>
+      </p:nvGrpSpPr>
+      <p:grpSpPr bwMode="auto">
+        <a:xfrm>
+          <a:off x="0" y="0"/>
+          <a:ext cx="0" cy="0"/>
+          <a:chOff x="0" y="0"/>
+          <a:chExt cx="0" cy="0"/>
+        </a:xfrm>
+      </p:grpSpPr>
+      <p:sp>
+        <p:nvSpPr>
+          <p:cNvPr id="2" name="Slide Image Placeholder 1"/>
+          <p:cNvSpPr>
+            <a:spLocks noChangeAspect="1" noGrp="1" noRot="1"/>
+          </p:cNvSpPr>
+          <p:nvPr>
+            <p:ph type="sldImg"/>
+          </p:nvPr>
+        </p:nvSpPr>
+        <p:spPr bwMode="auto"/>
+      </p:sp>
+      <p:sp>
+        <p:nvSpPr>
+          <p:cNvPr id="3" name="Notes Placeholder 2"/>
+          <p:cNvSpPr>
+            <a:spLocks noGrp="1"/>
+          </p:cNvSpPr>
+          <p:nvPr>
+            <p:ph type="body" idx="1"/>
+          </p:nvPr>
+        </p:nvSpPr>
+        <p:spPr bwMode="auto"/>
+        <p:txBody>
+          <a:bodyPr/>
+          <a:lstStyle/>
+          <a:p>
+            <a:pPr>
+              <a:defRPr/>
+            </a:pPr>
+            <a:endParaRPr/>
+          </a:p>
+        </p:txBody>
+      </p:sp>
+      <p:sp>
+        <p:nvSpPr>
+          <p:cNvPr id="4" name="Slide Number Placeholder 3"/>
+          <p:cNvSpPr>
+            <a:spLocks noGrp="1"/>
+          </p:cNvSpPr>
+          <p:nvPr>
+            <p:ph type="sldNum" sz="quarter" idx="10"/>
+          </p:nvPr>
+        </p:nvSpPr>
+        <p:spPr bwMode="auto"/>
+        <p:txBody>
+          <a:bodyPr/>
+          <a:lstStyle/>
+          <a:p>
+            <a:pPr>
+              <a:defRPr/>
+            </a:pPr>
+            <a:fld id="{C182BEBC-B8A5-F8D9-0B18-6F516F8A464B}" type="slidenum">
+              <a:rPr/>
+              <a:t/>
+            </a:fld>
+            <a:endParaRPr/>
+          </a:p>
+        </p:txBody>
+      </p:sp>
+    </p:spTree>
+  </p:cSld>
+  <p:clrMapOvr>
+    <a:masterClrMapping/>
+  </p:clrMapOvr>
+</p:notes>
+</file>
+
+<file path=ppt/notesSlides/notesSlide2.xml><?xml version="1.0" encoding="utf-8"?>
+<p:notes xmlns:a="http://schemas.openxmlformats.org/drawingml/2006/main" xmlns:r="http://schemas.openxmlformats.org/officeDocument/2006/relationships" xmlns:p="http://schemas.openxmlformats.org/presentationml/2006/main" xmlns:m="http://schemas.openxmlformats.org/officeDocument/2006/math" xmlns:w="http://schemas.openxmlformats.org/wordprocessingml/2006/main">
+  <p:cSld name="">
+    <p:spTree>
+      <p:nvGrpSpPr>
+        <p:cNvPr id="1" name=""/>
+        <p:cNvGrpSpPr/>
+        <p:nvPr/>
+      </p:nvGrpSpPr>
+      <p:grpSpPr bwMode="auto">
+        <a:xfrm>
+          <a:off x="0" y="0"/>
+          <a:ext cx="0" cy="0"/>
+          <a:chOff x="0" y="0"/>
+          <a:chExt cx="0" cy="0"/>
+        </a:xfrm>
+      </p:grpSpPr>
+      <p:sp>
+        <p:nvSpPr>
+          <p:cNvPr id="2" name="Slide Image Placeholder 1"/>
+          <p:cNvSpPr>
+            <a:spLocks noChangeAspect="1" noGrp="1" noRot="1"/>
+          </p:cNvSpPr>
+          <p:nvPr>
+            <p:ph type="sldImg"/>
+          </p:nvPr>
+        </p:nvSpPr>
+        <p:spPr bwMode="auto"/>
+      </p:sp>
+      <p:sp>
+        <p:nvSpPr>
+          <p:cNvPr id="3" name="Notes Placeholder 2"/>
+          <p:cNvSpPr>
+            <a:spLocks noGrp="1"/>
+          </p:cNvSpPr>
+          <p:nvPr>
+            <p:ph type="body" idx="1"/>
+          </p:nvPr>
+        </p:nvSpPr>
+        <p:spPr bwMode="auto"/>
+        <p:txBody>
+          <a:bodyPr/>
+          <a:lstStyle/>
+          <a:p>
+            <a:pPr>
+              <a:defRPr/>
+            </a:pPr>
+            <a:endParaRPr/>
+          </a:p>
+        </p:txBody>
+      </p:sp>
+      <p:sp>
+        <p:nvSpPr>
+          <p:cNvPr id="4" name="Slide Number Placeholder 3"/>
+          <p:cNvSpPr>
+            <a:spLocks noGrp="1"/>
+          </p:cNvSpPr>
+          <p:nvPr>
+            <p:ph type="sldNum" sz="quarter" idx="10"/>
+          </p:nvPr>
+        </p:nvSpPr>
+        <p:spPr bwMode="auto"/>
+        <p:txBody>
+          <a:bodyPr/>
+          <a:lstStyle/>
+          <a:p>
+            <a:pPr>
+              <a:defRPr/>
+            </a:pPr>
+            <a:fld id="{5D0F7342-C76F-47F6-C7AB-682D61E7B350}" type="slidenum">
+              <a:rPr/>
+              <a:t/>
+            </a:fld>
+            <a:endParaRPr/>
+          </a:p>
+        </p:txBody>
+      </p:sp>
+    </p:spTree>
+  </p:cSld>
+  <p:clrMapOvr>
+    <a:masterClrMapping/>
+  </p:clrMapOvr>
+</p:notes>
+</file>
+
+<file path=ppt/notesSlides/notesSlide3.xml><?xml version="1.0" encoding="utf-8"?>
+<p:notes xmlns:a="http://schemas.openxmlformats.org/drawingml/2006/main" xmlns:r="http://schemas.openxmlformats.org/officeDocument/2006/relationships" xmlns:p="http://schemas.openxmlformats.org/presentationml/2006/main" xmlns:m="http://schemas.openxmlformats.org/officeDocument/2006/math" xmlns:w="http://schemas.openxmlformats.org/wordprocessingml/2006/main">
+  <p:cSld name="">
+    <p:spTree>
+      <p:nvGrpSpPr>
+        <p:cNvPr id="1" name=""/>
+        <p:cNvGrpSpPr/>
+        <p:nvPr/>
+      </p:nvGrpSpPr>
+      <p:grpSpPr bwMode="auto">
+        <a:xfrm>
+          <a:off x="0" y="0"/>
+          <a:ext cx="0" cy="0"/>
+          <a:chOff x="0" y="0"/>
+          <a:chExt cx="0" cy="0"/>
+        </a:xfrm>
+      </p:grpSpPr>
+      <p:sp>
+        <p:nvSpPr>
+          <p:cNvPr id="2" name="Slide Image Placeholder 1"/>
+          <p:cNvSpPr>
+            <a:spLocks noChangeAspect="1" noGrp="1" noRot="1"/>
+          </p:cNvSpPr>
+          <p:nvPr>
+            <p:ph type="sldImg"/>
+          </p:nvPr>
+        </p:nvSpPr>
+        <p:spPr bwMode="auto"/>
+      </p:sp>
+      <p:sp>
+        <p:nvSpPr>
+          <p:cNvPr id="3" name="Notes Placeholder 2"/>
+          <p:cNvSpPr>
+            <a:spLocks noGrp="1"/>
+          </p:cNvSpPr>
+          <p:nvPr>
+            <p:ph type="body" idx="1"/>
+          </p:nvPr>
+        </p:nvSpPr>
+        <p:spPr bwMode="auto"/>
+        <p:txBody>
+          <a:bodyPr/>
+          <a:lstStyle/>
+          <a:p>
+            <a:pPr>
+              <a:defRPr/>
+            </a:pPr>
+            <a:endParaRPr/>
+          </a:p>
+        </p:txBody>
+      </p:sp>
+      <p:sp>
+        <p:nvSpPr>
+          <p:cNvPr id="4" name="Slide Number Placeholder 3"/>
+          <p:cNvSpPr>
+            <a:spLocks noGrp="1"/>
+          </p:cNvSpPr>
+          <p:nvPr>
+            <p:ph type="sldNum" sz="quarter" idx="10"/>
+          </p:nvPr>
+        </p:nvSpPr>
+        <p:spPr bwMode="auto"/>
+        <p:txBody>
+          <a:bodyPr/>
+          <a:lstStyle/>
+          <a:p>
+            <a:pPr>
+              <a:defRPr/>
+            </a:pPr>
+            <a:fld id="{BC79854A-CA9E-F6DD-89DD-EA39538DE9E7}" type="slidenum">
+              <a:rPr/>
+              <a:t/>
+            </a:fld>
+            <a:endParaRPr/>
+          </a:p>
+        </p:txBody>
+      </p:sp>
+    </p:spTree>
+  </p:cSld>
+  <p:clrMapOvr>
+    <a:masterClrMapping/>
+  </p:clrMapOvr>
+</p:notes>
+</file>
+
+<file path=ppt/notesSlides/notesSlide4.xml><?xml version="1.0" encoding="utf-8"?>
+<p:notes xmlns:a="http://schemas.openxmlformats.org/drawingml/2006/main" xmlns:r="http://schemas.openxmlformats.org/officeDocument/2006/relationships" xmlns:p="http://schemas.openxmlformats.org/presentationml/2006/main" xmlns:m="http://schemas.openxmlformats.org/officeDocument/2006/math" xmlns:w="http://schemas.openxmlformats.org/wordprocessingml/2006/main">
+  <p:cSld name="">
+    <p:spTree>
+      <p:nvGrpSpPr>
+        <p:cNvPr id="1" name=""/>
+        <p:cNvGrpSpPr/>
+        <p:nvPr/>
+      </p:nvGrpSpPr>
+      <p:grpSpPr bwMode="auto">
+        <a:xfrm>
+          <a:off x="0" y="0"/>
+          <a:ext cx="0" cy="0"/>
+          <a:chOff x="0" y="0"/>
+          <a:chExt cx="0" cy="0"/>
+        </a:xfrm>
+      </p:grpSpPr>
+      <p:sp>
+        <p:nvSpPr>
+          <p:cNvPr id="2" name="Slide Image Placeholder 1"/>
+          <p:cNvSpPr>
+            <a:spLocks noChangeAspect="1" noGrp="1" noRot="1"/>
+          </p:cNvSpPr>
+          <p:nvPr>
+            <p:ph type="sldImg"/>
+          </p:nvPr>
+        </p:nvSpPr>
+        <p:spPr bwMode="auto"/>
+      </p:sp>
+      <p:sp>
+        <p:nvSpPr>
+          <p:cNvPr id="3" name="Notes Placeholder 2"/>
+          <p:cNvSpPr>
+            <a:spLocks noGrp="1"/>
+          </p:cNvSpPr>
+          <p:nvPr>
+            <p:ph type="body" idx="1"/>
+          </p:nvPr>
+        </p:nvSpPr>
+        <p:spPr bwMode="auto"/>
+        <p:txBody>
+          <a:bodyPr/>
+          <a:lstStyle/>
+          <a:p>
+            <a:pPr>
+              <a:defRPr/>
+            </a:pPr>
+            <a:endParaRPr/>
+          </a:p>
+        </p:txBody>
+      </p:sp>
+      <p:sp>
+        <p:nvSpPr>
+          <p:cNvPr id="4" name="Slide Number Placeholder 3"/>
+          <p:cNvSpPr>
+            <a:spLocks noGrp="1"/>
+          </p:cNvSpPr>
+          <p:nvPr>
+            <p:ph type="sldNum" sz="quarter" idx="10"/>
+          </p:nvPr>
+        </p:nvSpPr>
+        <p:spPr bwMode="auto"/>
+        <p:txBody>
+          <a:bodyPr/>
+          <a:lstStyle/>
+          <a:p>
+            <a:pPr>
+              <a:defRPr/>
+            </a:pPr>
+            <a:fld id="{BB6FF71E-A472-A1F8-8309-6A067A2C56B7}" type="slidenum">
+              <a:rPr/>
+              <a:t/>
+            </a:fld>
+            <a:endParaRPr/>
+          </a:p>
+        </p:txBody>
+      </p:sp>
+    </p:spTree>
+  </p:cSld>
+  <p:clrMapOvr>
+    <a:masterClrMapping/>
+  </p:clrMapOvr>
+</p:notes>
+</file>
+
+<file path=ppt/notesSlides/notesSlide5.xml><?xml version="1.0" encoding="utf-8"?>
+<p:notes xmlns:a="http://schemas.openxmlformats.org/drawingml/2006/main" xmlns:r="http://schemas.openxmlformats.org/officeDocument/2006/relationships" xmlns:p="http://schemas.openxmlformats.org/presentationml/2006/main" xmlns:m="http://schemas.openxmlformats.org/officeDocument/2006/math" xmlns:w="http://schemas.openxmlformats.org/wordprocessingml/2006/main">
+  <p:cSld name="">
+    <p:spTree>
+      <p:nvGrpSpPr>
+        <p:cNvPr id="1" name=""/>
+        <p:cNvGrpSpPr/>
+        <p:nvPr/>
+      </p:nvGrpSpPr>
+      <p:grpSpPr bwMode="auto">
+        <a:xfrm>
+          <a:off x="0" y="0"/>
+          <a:ext cx="0" cy="0"/>
+          <a:chOff x="0" y="0"/>
+          <a:chExt cx="0" cy="0"/>
+        </a:xfrm>
+      </p:grpSpPr>
+      <p:sp>
+        <p:nvSpPr>
+          <p:cNvPr id="2" name="Slide Image Placeholder 1"/>
+          <p:cNvSpPr>
+            <a:spLocks noChangeAspect="1" noGrp="1" noRot="1"/>
+          </p:cNvSpPr>
+          <p:nvPr>
+            <p:ph type="sldImg"/>
+          </p:nvPr>
+        </p:nvSpPr>
+        <p:spPr bwMode="auto"/>
+      </p:sp>
+      <p:sp>
+        <p:nvSpPr>
+          <p:cNvPr id="3" name="Notes Placeholder 2"/>
+          <p:cNvSpPr>
+            <a:spLocks noGrp="1"/>
+          </p:cNvSpPr>
+          <p:nvPr>
+            <p:ph type="body" idx="1"/>
+          </p:nvPr>
+        </p:nvSpPr>
+        <p:spPr bwMode="auto"/>
+        <p:txBody>
+          <a:bodyPr/>
+          <a:lstStyle/>
+          <a:p>
+            <a:pPr>
+              <a:defRPr/>
+            </a:pPr>
+            <a:endParaRPr/>
+          </a:p>
+        </p:txBody>
+      </p:sp>
+      <p:sp>
+        <p:nvSpPr>
+          <p:cNvPr id="4" name="Slide Number Placeholder 3"/>
+          <p:cNvSpPr>
+            <a:spLocks noGrp="1"/>
+          </p:cNvSpPr>
+          <p:nvPr>
+            <p:ph type="sldNum" sz="quarter" idx="10"/>
+          </p:nvPr>
+        </p:nvSpPr>
+        <p:spPr bwMode="auto"/>
+        <p:txBody>
+          <a:bodyPr/>
+          <a:lstStyle/>
+          <a:p>
+            <a:pPr>
+              <a:defRPr/>
+            </a:pPr>
+            <a:fld id="{1A2E13F6-B24D-63FE-3329-83779C9B6BF2}" type="slidenum">
+              <a:rPr/>
+              <a:t/>
+            </a:fld>
+            <a:endParaRPr/>
+          </a:p>
+        </p:txBody>
+      </p:sp>
+    </p:spTree>
+  </p:cSld>
+  <p:clrMapOvr>
+    <a:masterClrMapping/>
+  </p:clrMapOvr>
+</p:notes>
+</file>
+
+<file path=ppt/notesSlides/notesSlide6.xml><?xml version="1.0" encoding="utf-8"?>
+<p:notes xmlns:a="http://schemas.openxmlformats.org/drawingml/2006/main" xmlns:r="http://schemas.openxmlformats.org/officeDocument/2006/relationships" xmlns:p="http://schemas.openxmlformats.org/presentationml/2006/main" xmlns:m="http://schemas.openxmlformats.org/officeDocument/2006/math" xmlns:w="http://schemas.openxmlformats.org/wordprocessingml/2006/main">
+  <p:cSld name="">
+    <p:spTree>
+      <p:nvGrpSpPr>
+        <p:cNvPr id="1" name=""/>
+        <p:cNvGrpSpPr/>
+        <p:nvPr/>
+      </p:nvGrpSpPr>
+      <p:grpSpPr bwMode="auto">
+        <a:xfrm>
+          <a:off x="0" y="0"/>
+          <a:ext cx="0" cy="0"/>
+          <a:chOff x="0" y="0"/>
+          <a:chExt cx="0" cy="0"/>
+        </a:xfrm>
+      </p:grpSpPr>
+      <p:sp>
+        <p:nvSpPr>
+          <p:cNvPr id="2" name="Slide Image Placeholder 1"/>
+          <p:cNvSpPr>
+            <a:spLocks noChangeAspect="1" noGrp="1" noRot="1"/>
+          </p:cNvSpPr>
+          <p:nvPr>
+            <p:ph type="sldImg"/>
+          </p:nvPr>
+        </p:nvSpPr>
+        <p:spPr bwMode="auto"/>
+      </p:sp>
+      <p:sp>
+        <p:nvSpPr>
+          <p:cNvPr id="3" name="Notes Placeholder 2"/>
+          <p:cNvSpPr>
+            <a:spLocks noGrp="1"/>
+          </p:cNvSpPr>
+          <p:nvPr>
+            <p:ph type="body" idx="1"/>
+          </p:nvPr>
+        </p:nvSpPr>
+        <p:spPr bwMode="auto"/>
+        <p:txBody>
+          <a:bodyPr/>
+          <a:lstStyle/>
+          <a:p>
+            <a:pPr>
+              <a:defRPr/>
+            </a:pPr>
+            <a:endParaRPr/>
+          </a:p>
+        </p:txBody>
+      </p:sp>
+      <p:sp>
+        <p:nvSpPr>
+          <p:cNvPr id="4" name="Slide Number Placeholder 3"/>
+          <p:cNvSpPr>
+            <a:spLocks noGrp="1"/>
+          </p:cNvSpPr>
+          <p:nvPr>
+            <p:ph type="sldNum" sz="quarter" idx="10"/>
+          </p:nvPr>
+        </p:nvSpPr>
+        <p:spPr bwMode="auto"/>
+        <p:txBody>
+          <a:bodyPr/>
+          <a:lstStyle/>
+          <a:p>
+            <a:pPr>
+              <a:defRPr/>
+            </a:pPr>
+            <a:fld id="{B9502745-93DF-8E61-7600-FF2FCE12253F}" type="slidenum">
+              <a:rPr/>
+              <a:t/>
+            </a:fld>
+            <a:endParaRPr/>
+          </a:p>
+        </p:txBody>
+      </p:sp>
+    </p:spTree>
+  </p:cSld>
+  <p:clrMapOvr>
+    <a:masterClrMapping/>
+  </p:clrMapOvr>
+</p:notes>
+</file>
+
+<file path=ppt/notesSlides/notesSlide7.xml><?xml version="1.0" encoding="utf-8"?>
+<p:notes xmlns:a="http://schemas.openxmlformats.org/drawingml/2006/main" xmlns:r="http://schemas.openxmlformats.org/officeDocument/2006/relationships" xmlns:p="http://schemas.openxmlformats.org/presentationml/2006/main" xmlns:m="http://schemas.openxmlformats.org/officeDocument/2006/math" xmlns:w="http://schemas.openxmlformats.org/wordprocessingml/2006/main">
+  <p:cSld name="">
+    <p:spTree>
+      <p:nvGrpSpPr>
+        <p:cNvPr id="1" name=""/>
+        <p:cNvGrpSpPr/>
+        <p:nvPr/>
+      </p:nvGrpSpPr>
+      <p:grpSpPr bwMode="auto">
+        <a:xfrm>
+          <a:off x="0" y="0"/>
+          <a:ext cx="0" cy="0"/>
+          <a:chOff x="0" y="0"/>
+          <a:chExt cx="0" cy="0"/>
+        </a:xfrm>
+      </p:grpSpPr>
+      <p:sp>
+        <p:nvSpPr>
+          <p:cNvPr id="2" name="Slide Image Placeholder 1"/>
+          <p:cNvSpPr>
+            <a:spLocks noChangeAspect="1" noGrp="1" noRot="1"/>
+          </p:cNvSpPr>
+          <p:nvPr>
+            <p:ph type="sldImg"/>
+          </p:nvPr>
+        </p:nvSpPr>
+        <p:spPr bwMode="auto"/>
+      </p:sp>
+      <p:sp>
+        <p:nvSpPr>
+          <p:cNvPr id="3" name="Notes Placeholder 2"/>
+          <p:cNvSpPr>
+            <a:spLocks noGrp="1"/>
+          </p:cNvSpPr>
+          <p:nvPr>
+            <p:ph type="body" idx="1"/>
+          </p:nvPr>
+        </p:nvSpPr>
+        <p:spPr bwMode="auto"/>
+        <p:txBody>
+          <a:bodyPr/>
+          <a:lstStyle/>
+          <a:p>
+            <a:pPr>
+              <a:defRPr/>
+            </a:pPr>
+            <a:endParaRPr/>
+          </a:p>
+        </p:txBody>
+      </p:sp>
+      <p:sp>
+        <p:nvSpPr>
+          <p:cNvPr id="4" name="Slide Number Placeholder 3"/>
+          <p:cNvSpPr>
+            <a:spLocks noGrp="1"/>
+          </p:cNvSpPr>
+          <p:nvPr>
+            <p:ph type="sldNum" sz="quarter" idx="10"/>
+          </p:nvPr>
+        </p:nvSpPr>
+        <p:spPr bwMode="auto"/>
+        <p:txBody>
+          <a:bodyPr/>
+          <a:lstStyle/>
+          <a:p>
+            <a:pPr>
+              <a:defRPr/>
+            </a:pPr>
+            <a:fld id="{095DFB68-EB80-8B3E-0D98-C9C2F0A0E814}" type="slidenum">
+              <a:rPr/>
+              <a:t/>
+            </a:fld>
+            <a:endParaRPr/>
+          </a:p>
+        </p:txBody>
+      </p:sp>
+    </p:spTree>
+  </p:cSld>
+  <p:clrMapOvr>
+    <a:masterClrMapping/>
+  </p:clrMapOvr>
+</p:notes>
+</file>
+
+<file path=ppt/notesSlides/notesSlide8.xml><?xml version="1.0" encoding="utf-8"?>
+<p:notes xmlns:a="http://schemas.openxmlformats.org/drawingml/2006/main" xmlns:r="http://schemas.openxmlformats.org/officeDocument/2006/relationships" xmlns:p="http://schemas.openxmlformats.org/presentationml/2006/main" xmlns:m="http://schemas.openxmlformats.org/officeDocument/2006/math" xmlns:w="http://schemas.openxmlformats.org/wordprocessingml/2006/main">
+  <p:cSld name="">
+    <p:spTree>
+      <p:nvGrpSpPr>
+        <p:cNvPr id="1" name=""/>
+        <p:cNvGrpSpPr/>
+        <p:nvPr/>
+      </p:nvGrpSpPr>
+      <p:grpSpPr bwMode="auto">
+        <a:xfrm>
+          <a:off x="0" y="0"/>
+          <a:ext cx="0" cy="0"/>
+          <a:chOff x="0" y="0"/>
+          <a:chExt cx="0" cy="0"/>
+        </a:xfrm>
+      </p:grpSpPr>
+      <p:sp>
+        <p:nvSpPr>
+          <p:cNvPr id="2" name="Slide Image Placeholder 1"/>
+          <p:cNvSpPr>
+            <a:spLocks noChangeAspect="1" noGrp="1" noRot="1"/>
+          </p:cNvSpPr>
+          <p:nvPr>
+            <p:ph type="sldImg"/>
+          </p:nvPr>
+        </p:nvSpPr>
+        <p:spPr bwMode="auto"/>
+      </p:sp>
+      <p:sp>
+        <p:nvSpPr>
+          <p:cNvPr id="3" name="Notes Placeholder 2"/>
+          <p:cNvSpPr>
+            <a:spLocks noGrp="1"/>
+          </p:cNvSpPr>
+          <p:nvPr>
+            <p:ph type="body" idx="1"/>
+          </p:nvPr>
+        </p:nvSpPr>
+        <p:spPr bwMode="auto"/>
+        <p:txBody>
+          <a:bodyPr/>
+          <a:lstStyle/>
+          <a:p>
+            <a:pPr>
+              <a:defRPr/>
+            </a:pPr>
+            <a:endParaRPr/>
+          </a:p>
+        </p:txBody>
+      </p:sp>
+      <p:sp>
+        <p:nvSpPr>
+          <p:cNvPr id="4" name="Slide Number Placeholder 3"/>
+          <p:cNvSpPr>
+            <a:spLocks noGrp="1"/>
+          </p:cNvSpPr>
+          <p:nvPr>
+            <p:ph type="sldNum" sz="quarter" idx="10"/>
+          </p:nvPr>
+        </p:nvSpPr>
+        <p:spPr bwMode="auto"/>
+        <p:txBody>
+          <a:bodyPr/>
+          <a:lstStyle/>
+          <a:p>
+            <a:pPr>
+              <a:defRPr/>
+            </a:pPr>
+            <a:fld id="{8929C8FC-7C58-B6FB-18DB-A499D270B57F}" type="slidenum">
+              <a:rPr/>
+              <a:t/>
+            </a:fld>
+            <a:endParaRPr/>
+          </a:p>
+        </p:txBody>
+      </p:sp>
+    </p:spTree>
+  </p:cSld>
+  <p:clrMapOvr>
+    <a:masterClrMapping/>
+  </p:clrMapOvr>
+</p:notes>
+</file>
+
+<file path=ppt/notesSlides/notesSlide9.xml><?xml version="1.0" encoding="utf-8"?>
+<p:notes xmlns:a="http://schemas.openxmlformats.org/drawingml/2006/main" xmlns:r="http://schemas.openxmlformats.org/officeDocument/2006/relationships" xmlns:p="http://schemas.openxmlformats.org/presentationml/2006/main" xmlns:m="http://schemas.openxmlformats.org/officeDocument/2006/math" xmlns:w="http://schemas.openxmlformats.org/wordprocessingml/2006/main">
+  <p:cSld name="">
+    <p:spTree>
+      <p:nvGrpSpPr>
+        <p:cNvPr id="1" name=""/>
+        <p:cNvGrpSpPr/>
+        <p:nvPr/>
+      </p:nvGrpSpPr>
+      <p:grpSpPr bwMode="auto">
+        <a:xfrm>
+          <a:off x="0" y="0"/>
+          <a:ext cx="0" cy="0"/>
+          <a:chOff x="0" y="0"/>
+          <a:chExt cx="0" cy="0"/>
+        </a:xfrm>
+      </p:grpSpPr>
+      <p:sp>
+        <p:nvSpPr>
+          <p:cNvPr id="2" name="Slide Image Placeholder 1"/>
+          <p:cNvSpPr>
+            <a:spLocks noChangeAspect="1" noGrp="1" noRot="1"/>
+          </p:cNvSpPr>
+          <p:nvPr>
+            <p:ph type="sldImg"/>
+          </p:nvPr>
+        </p:nvSpPr>
+        <p:spPr bwMode="auto"/>
+      </p:sp>
+      <p:sp>
+        <p:nvSpPr>
+          <p:cNvPr id="3" name="Notes Placeholder 2"/>
+          <p:cNvSpPr>
+            <a:spLocks noGrp="1"/>
+          </p:cNvSpPr>
+          <p:nvPr>
+            <p:ph type="body" idx="1"/>
+          </p:nvPr>
+        </p:nvSpPr>
+        <p:spPr bwMode="auto"/>
+        <p:txBody>
+          <a:bodyPr/>
+          <a:lstStyle/>
+          <a:p>
+            <a:pPr>
+              <a:defRPr/>
+            </a:pPr>
+            <a:endParaRPr/>
+          </a:p>
+        </p:txBody>
+      </p:sp>
+      <p:sp>
+        <p:nvSpPr>
+          <p:cNvPr id="4" name="Slide Number Placeholder 3"/>
+          <p:cNvSpPr>
+            <a:spLocks noGrp="1"/>
+          </p:cNvSpPr>
+          <p:nvPr>
+            <p:ph type="sldNum" sz="quarter" idx="10"/>
+          </p:nvPr>
+        </p:nvSpPr>
+        <p:spPr bwMode="auto"/>
+        <p:txBody>
+          <a:bodyPr/>
+          <a:lstStyle/>
+          <a:p>
+            <a:pPr>
+              <a:defRPr/>
+            </a:pPr>
+            <a:fld id="{DF2FE612-D819-470F-07C5-77CFBFBEEAE5}" type="slidenum">
+              <a:rPr/>
+              <a:t/>
+            </a:fld>
+            <a:endParaRPr/>
+          </a:p>
+        </p:txBody>
+      </p:sp>
+    </p:spTree>
+  </p:cSld>
+  <p:clrMapOvr>
+    <a:masterClrMapping/>
+  </p:clrMapOvr>
+</p:notes>
+</file>
+
 <file path=ppt/slideLayouts/slideLayout1.xml><?xml version="1.0" encoding="utf-8"?>
-<p:sldLayout xmlns:a="http://schemas.openxmlformats.org/drawingml/2006/main" xmlns:r="http://schemas.openxmlformats.org/officeDocument/2006/relationships" xmlns:p="http://schemas.openxmlformats.org/presentationml/2006/main" type="title" preserve="1">
+<p:sldLayout xmlns:a="http://schemas.openxmlformats.org/drawingml/2006/main" xmlns:r="http://schemas.openxmlformats.org/officeDocument/2006/relationships" xmlns:p="http://schemas.openxmlformats.org/presentationml/2006/main" xmlns:m="http://schemas.openxmlformats.org/officeDocument/2006/math" xmlns:w="http://schemas.openxmlformats.org/wordprocessingml/2006/main" matchingName="" preserve="1" showMasterPhAnim="0" showMasterSp="1" type="title" userDrawn="1">
   <p:cSld name="Title Slide">
     <p:spTree>
       <p:nvGrpSpPr>
@@ -149,7 +1986,7 @@
         <p:cNvGrpSpPr/>
         <p:nvPr/>
       </p:nvGrpSpPr>
-      <p:grpSpPr>
+      <p:grpSpPr bwMode="auto">
         <a:xfrm>
           <a:off x="0" y="0"/>
           <a:ext cx="0" cy="0"/>
@@ -159,7 +1996,7 @@
       </p:grpSpPr>
       <p:sp>
         <p:nvSpPr>
-          <p:cNvPr id="2" name="Title 1"/>
+          <p:cNvPr id="411337710" name="Title 1"/>
           <p:cNvSpPr>
             <a:spLocks noGrp="1"/>
           </p:cNvSpPr>
@@ -167,7 +2004,7 @@
             <p:ph type="ctrTitle"/>
           </p:nvPr>
         </p:nvSpPr>
-        <p:spPr>
+        <p:spPr bwMode="auto">
           <a:xfrm>
             <a:off x="685800" y="2130425"/>
             <a:ext cx="7772400" cy="1470025"/>
@@ -177,8 +2014,11 @@
           <a:bodyPr/>
           <a:lstStyle/>
           <a:p>
-            <a:r>
-              <a:rPr lang="en-US" smtClean="0"/>
+            <a:pPr>
+              <a:defRPr/>
+            </a:pPr>
+            <a:r>
+              <a:rPr lang="en-US"/>
               <a:t>Click to edit Master title style</a:t>
             </a:r>
             <a:endParaRPr lang="en-US"/>
@@ -187,7 +2027,7 @@
       </p:sp>
       <p:sp>
         <p:nvSpPr>
-          <p:cNvPr id="3" name="Subtitle 2"/>
+          <p:cNvPr id="1643585663" name="Subtitle 2"/>
           <p:cNvSpPr>
             <a:spLocks noGrp="1"/>
           </p:cNvSpPr>
@@ -195,10 +2035,10 @@
             <p:ph type="subTitle" idx="1"/>
           </p:nvPr>
         </p:nvSpPr>
-        <p:spPr>
+        <p:spPr bwMode="auto">
           <a:xfrm>
             <a:off x="1371600" y="3886200"/>
-            <a:ext cx="6400800" cy="1752600"/>
+            <a:ext cx="6400800" cy="1752599"/>
           </a:xfrm>
         </p:spPr>
         <p:txBody>
@@ -296,8 +2136,11 @@
             </a:lvl9pPr>
           </a:lstStyle>
           <a:p>
-            <a:r>
-              <a:rPr lang="en-US" smtClean="0"/>
+            <a:pPr>
+              <a:defRPr/>
+            </a:pPr>
+            <a:r>
+              <a:rPr lang="en-US"/>
               <a:t>Click to edit Master subtitle style</a:t>
             </a:r>
             <a:endParaRPr lang="en-US"/>
@@ -306,7 +2149,7 @@
       </p:sp>
       <p:sp>
         <p:nvSpPr>
-          <p:cNvPr id="4" name="Date Placeholder 3"/>
+          <p:cNvPr id="2132747256" name="Date Placeholder 3"/>
           <p:cNvSpPr>
             <a:spLocks noGrp="1"/>
           </p:cNvSpPr>
@@ -314,14 +2157,16 @@
             <p:ph type="dt" sz="half" idx="10"/>
           </p:nvPr>
         </p:nvSpPr>
-        <p:spPr/>
-        <p:txBody>
-          <a:bodyPr/>
-          <a:lstStyle/>
-          <a:p>
+        <p:spPr bwMode="auto"/>
+        <p:txBody>
+          <a:bodyPr/>
+          <a:lstStyle/>
+          <a:p>
+            <a:pPr>
+              <a:defRPr/>
+            </a:pPr>
             <a:fld id="{1D8BD707-D9CF-40AE-B4C6-C98DA3205C09}" type="datetimeFigureOut">
-              <a:rPr lang="en-US" smtClean="0"/>
-              <a:pPr/>
+              <a:rPr lang="en-US"/>
               <a:t>3/8/2026</a:t>
             </a:fld>
             <a:endParaRPr lang="en-US"/>
@@ -330,7 +2175,7 @@
       </p:sp>
       <p:sp>
         <p:nvSpPr>
-          <p:cNvPr id="5" name="Footer Placeholder 4"/>
+          <p:cNvPr id="1681745538" name="Footer Placeholder 4"/>
           <p:cNvSpPr>
             <a:spLocks noGrp="1"/>
           </p:cNvSpPr>
@@ -338,18 +2183,21 @@
             <p:ph type="ftr" sz="quarter" idx="11"/>
           </p:nvPr>
         </p:nvSpPr>
-        <p:spPr/>
-        <p:txBody>
-          <a:bodyPr/>
-          <a:lstStyle/>
-          <a:p>
+        <p:spPr bwMode="auto"/>
+        <p:txBody>
+          <a:bodyPr/>
+          <a:lstStyle/>
+          <a:p>
+            <a:pPr>
+              <a:defRPr/>
+            </a:pPr>
             <a:endParaRPr lang="en-US"/>
           </a:p>
         </p:txBody>
       </p:sp>
       <p:sp>
         <p:nvSpPr>
-          <p:cNvPr id="6" name="Slide Number Placeholder 5"/>
+          <p:cNvPr id="1305205899" name="Slide Number Placeholder 5"/>
           <p:cNvSpPr>
             <a:spLocks noGrp="1"/>
           </p:cNvSpPr>
@@ -357,14 +2205,16 @@
             <p:ph type="sldNum" sz="quarter" idx="12"/>
           </p:nvPr>
         </p:nvSpPr>
-        <p:spPr/>
-        <p:txBody>
-          <a:bodyPr/>
-          <a:lstStyle/>
-          <a:p>
+        <p:spPr bwMode="auto"/>
+        <p:txBody>
+          <a:bodyPr/>
+          <a:lstStyle/>
+          <a:p>
+            <a:pPr>
+              <a:defRPr/>
+            </a:pPr>
             <a:fld id="{B6F15528-21DE-4FAA-801E-634DDDAF4B2B}" type="slidenum">
-              <a:rPr lang="en-US" smtClean="0"/>
-              <a:pPr/>
+              <a:rPr lang="en-US"/>
               <a:t>‹#›</a:t>
             </a:fld>
             <a:endParaRPr lang="en-US"/>
@@ -380,7 +2230,7 @@
 </file>
 
 <file path=ppt/slideLayouts/slideLayout10.xml><?xml version="1.0" encoding="utf-8"?>
-<p:sldLayout xmlns:a="http://schemas.openxmlformats.org/drawingml/2006/main" xmlns:r="http://schemas.openxmlformats.org/officeDocument/2006/relationships" xmlns:p="http://schemas.openxmlformats.org/presentationml/2006/main" type="vertTx" preserve="1">
+<p:sldLayout xmlns:a="http://schemas.openxmlformats.org/drawingml/2006/main" xmlns:r="http://schemas.openxmlformats.org/officeDocument/2006/relationships" xmlns:p="http://schemas.openxmlformats.org/presentationml/2006/main" xmlns:m="http://schemas.openxmlformats.org/officeDocument/2006/math" xmlns:w="http://schemas.openxmlformats.org/wordprocessingml/2006/main" matchingName="" preserve="1" showMasterPhAnim="0" showMasterSp="1" type="vertTx" userDrawn="1">
   <p:cSld name="Title and Vertical Text">
     <p:spTree>
       <p:nvGrpSpPr>
@@ -388,7 +2238,7 @@
         <p:cNvGrpSpPr/>
         <p:nvPr/>
       </p:nvGrpSpPr>
-      <p:grpSpPr>
+      <p:grpSpPr bwMode="auto">
         <a:xfrm>
           <a:off x="0" y="0"/>
           <a:ext cx="0" cy="0"/>
@@ -398,7 +2248,7 @@
       </p:grpSpPr>
       <p:sp>
         <p:nvSpPr>
-          <p:cNvPr id="2" name="Title 1"/>
+          <p:cNvPr id="23542123" name="Title 1"/>
           <p:cNvSpPr>
             <a:spLocks noGrp="1"/>
           </p:cNvSpPr>
@@ -406,13 +2256,16 @@
             <p:ph type="title"/>
           </p:nvPr>
         </p:nvSpPr>
-        <p:spPr/>
-        <p:txBody>
-          <a:bodyPr/>
-          <a:lstStyle/>
-          <a:p>
-            <a:r>
-              <a:rPr lang="en-US" smtClean="0"/>
+        <p:spPr bwMode="auto"/>
+        <p:txBody>
+          <a:bodyPr/>
+          <a:lstStyle/>
+          <a:p>
+            <a:pPr>
+              <a:defRPr/>
+            </a:pPr>
+            <a:r>
+              <a:rPr lang="en-US"/>
               <a:t>Click to edit Master title style</a:t>
             </a:r>
             <a:endParaRPr lang="en-US"/>
@@ -421,7 +2274,7 @@
       </p:sp>
       <p:sp>
         <p:nvSpPr>
-          <p:cNvPr id="3" name="Vertical Text Placeholder 2"/>
+          <p:cNvPr id="564344227" name="Vertical Text Placeholder 2"/>
           <p:cNvSpPr>
             <a:spLocks noGrp="1"/>
           </p:cNvSpPr>
@@ -429,42 +2282,56 @@
             <p:ph type="body" orient="vert" idx="1"/>
           </p:nvPr>
         </p:nvSpPr>
-        <p:spPr/>
+        <p:spPr bwMode="auto"/>
         <p:txBody>
           <a:bodyPr vert="eaVert"/>
           <a:lstStyle/>
           <a:p>
-            <a:pPr lvl="0"/>
-            <a:r>
-              <a:rPr lang="en-US" smtClean="0"/>
+            <a:pPr lvl="0">
+              <a:defRPr/>
+            </a:pPr>
+            <a:r>
+              <a:rPr lang="en-US"/>
               <a:t>Click to edit Master text styles</a:t>
             </a:r>
-          </a:p>
-          <a:p>
-            <a:pPr lvl="1"/>
-            <a:r>
-              <a:rPr lang="en-US" smtClean="0"/>
+            <a:endParaRPr/>
+          </a:p>
+          <a:p>
+            <a:pPr lvl="1">
+              <a:defRPr/>
+            </a:pPr>
+            <a:r>
+              <a:rPr lang="en-US"/>
               <a:t>Second level</a:t>
             </a:r>
-          </a:p>
-          <a:p>
-            <a:pPr lvl="2"/>
-            <a:r>
-              <a:rPr lang="en-US" smtClean="0"/>
+            <a:endParaRPr/>
+          </a:p>
+          <a:p>
+            <a:pPr lvl="2">
+              <a:defRPr/>
+            </a:pPr>
+            <a:r>
+              <a:rPr lang="en-US"/>
               <a:t>Third level</a:t>
             </a:r>
-          </a:p>
-          <a:p>
-            <a:pPr lvl="3"/>
-            <a:r>
-              <a:rPr lang="en-US" smtClean="0"/>
+            <a:endParaRPr/>
+          </a:p>
+          <a:p>
+            <a:pPr lvl="3">
+              <a:defRPr/>
+            </a:pPr>
+            <a:r>
+              <a:rPr lang="en-US"/>
               <a:t>Fourth level</a:t>
             </a:r>
-          </a:p>
-          <a:p>
-            <a:pPr lvl="4"/>
-            <a:r>
-              <a:rPr lang="en-US" smtClean="0"/>
+            <a:endParaRPr/>
+          </a:p>
+          <a:p>
+            <a:pPr lvl="4">
+              <a:defRPr/>
+            </a:pPr>
+            <a:r>
+              <a:rPr lang="en-US"/>
               <a:t>Fifth level</a:t>
             </a:r>
             <a:endParaRPr lang="en-US"/>
@@ -473,7 +2340,7 @@
       </p:sp>
       <p:sp>
         <p:nvSpPr>
-          <p:cNvPr id="4" name="Date Placeholder 3"/>
+          <p:cNvPr id="975300976" name="Date Placeholder 3"/>
           <p:cNvSpPr>
             <a:spLocks noGrp="1"/>
           </p:cNvSpPr>
@@ -481,14 +2348,16 @@
             <p:ph type="dt" sz="half" idx="10"/>
           </p:nvPr>
         </p:nvSpPr>
-        <p:spPr/>
-        <p:txBody>
-          <a:bodyPr/>
-          <a:lstStyle/>
-          <a:p>
+        <p:spPr bwMode="auto"/>
+        <p:txBody>
+          <a:bodyPr/>
+          <a:lstStyle/>
+          <a:p>
+            <a:pPr>
+              <a:defRPr/>
+            </a:pPr>
             <a:fld id="{1D8BD707-D9CF-40AE-B4C6-C98DA3205C09}" type="datetimeFigureOut">
-              <a:rPr lang="en-US" smtClean="0"/>
-              <a:pPr/>
+              <a:rPr lang="en-US"/>
               <a:t>3/8/2026</a:t>
             </a:fld>
             <a:endParaRPr lang="en-US"/>
@@ -497,7 +2366,7 @@
       </p:sp>
       <p:sp>
         <p:nvSpPr>
-          <p:cNvPr id="5" name="Footer Placeholder 4"/>
+          <p:cNvPr id="1466279052" name="Footer Placeholder 4"/>
           <p:cNvSpPr>
             <a:spLocks noGrp="1"/>
           </p:cNvSpPr>
@@ -505,18 +2374,21 @@
             <p:ph type="ftr" sz="quarter" idx="11"/>
           </p:nvPr>
         </p:nvSpPr>
-        <p:spPr/>
-        <p:txBody>
-          <a:bodyPr/>
-          <a:lstStyle/>
-          <a:p>
+        <p:spPr bwMode="auto"/>
+        <p:txBody>
+          <a:bodyPr/>
+          <a:lstStyle/>
+          <a:p>
+            <a:pPr>
+              <a:defRPr/>
+            </a:pPr>
             <a:endParaRPr lang="en-US"/>
           </a:p>
         </p:txBody>
       </p:sp>
       <p:sp>
         <p:nvSpPr>
-          <p:cNvPr id="6" name="Slide Number Placeholder 5"/>
+          <p:cNvPr id="1459459565" name="Slide Number Placeholder 5"/>
           <p:cNvSpPr>
             <a:spLocks noGrp="1"/>
           </p:cNvSpPr>
@@ -524,14 +2396,16 @@
             <p:ph type="sldNum" sz="quarter" idx="12"/>
           </p:nvPr>
         </p:nvSpPr>
-        <p:spPr/>
-        <p:txBody>
-          <a:bodyPr/>
-          <a:lstStyle/>
-          <a:p>
+        <p:spPr bwMode="auto"/>
+        <p:txBody>
+          <a:bodyPr/>
+          <a:lstStyle/>
+          <a:p>
+            <a:pPr>
+              <a:defRPr/>
+            </a:pPr>
             <a:fld id="{B6F15528-21DE-4FAA-801E-634DDDAF4B2B}" type="slidenum">
-              <a:rPr lang="en-US" smtClean="0"/>
-              <a:pPr/>
+              <a:rPr lang="en-US"/>
               <a:t>‹#›</a:t>
             </a:fld>
             <a:endParaRPr lang="en-US"/>
@@ -547,7 +2421,7 @@
 </file>
 
 <file path=ppt/slideLayouts/slideLayout11.xml><?xml version="1.0" encoding="utf-8"?>
-<p:sldLayout xmlns:a="http://schemas.openxmlformats.org/drawingml/2006/main" xmlns:r="http://schemas.openxmlformats.org/officeDocument/2006/relationships" xmlns:p="http://schemas.openxmlformats.org/presentationml/2006/main" type="vertTitleAndTx" preserve="1">
+<p:sldLayout xmlns:a="http://schemas.openxmlformats.org/drawingml/2006/main" xmlns:r="http://schemas.openxmlformats.org/officeDocument/2006/relationships" xmlns:p="http://schemas.openxmlformats.org/presentationml/2006/main" xmlns:m="http://schemas.openxmlformats.org/officeDocument/2006/math" xmlns:w="http://schemas.openxmlformats.org/wordprocessingml/2006/main" matchingName="" preserve="1" showMasterPhAnim="0" showMasterSp="1" type="vertTitleAndTx" userDrawn="1">
   <p:cSld name="Vertical Title and Text">
     <p:spTree>
       <p:nvGrpSpPr>
@@ -555,7 +2429,7 @@
         <p:cNvGrpSpPr/>
         <p:nvPr/>
       </p:nvGrpSpPr>
-      <p:grpSpPr>
+      <p:grpSpPr bwMode="auto">
         <a:xfrm>
           <a:off x="0" y="0"/>
           <a:ext cx="0" cy="0"/>
@@ -565,7 +2439,7 @@
       </p:grpSpPr>
       <p:sp>
         <p:nvSpPr>
-          <p:cNvPr id="2" name="Vertical Title 1"/>
+          <p:cNvPr id="99091354" name="Vertical Title 1"/>
           <p:cNvSpPr>
             <a:spLocks noGrp="1"/>
           </p:cNvSpPr>
@@ -573,7 +2447,7 @@
             <p:ph type="title" orient="vert"/>
           </p:nvPr>
         </p:nvSpPr>
-        <p:spPr>
+        <p:spPr bwMode="auto">
           <a:xfrm>
             <a:off x="6629400" y="274638"/>
             <a:ext cx="2057400" cy="5851525"/>
@@ -583,8 +2457,11 @@
           <a:bodyPr vert="eaVert"/>
           <a:lstStyle/>
           <a:p>
-            <a:r>
-              <a:rPr lang="en-US" smtClean="0"/>
+            <a:pPr>
+              <a:defRPr/>
+            </a:pPr>
+            <a:r>
+              <a:rPr lang="en-US"/>
               <a:t>Click to edit Master title style</a:t>
             </a:r>
             <a:endParaRPr lang="en-US"/>
@@ -593,7 +2470,7 @@
       </p:sp>
       <p:sp>
         <p:nvSpPr>
-          <p:cNvPr id="3" name="Vertical Text Placeholder 2"/>
+          <p:cNvPr id="1421914313" name="Vertical Text Placeholder 2"/>
           <p:cNvSpPr>
             <a:spLocks noGrp="1"/>
           </p:cNvSpPr>
@@ -601,7 +2478,7 @@
             <p:ph type="body" orient="vert" idx="1"/>
           </p:nvPr>
         </p:nvSpPr>
-        <p:spPr>
+        <p:spPr bwMode="auto">
           <a:xfrm>
             <a:off x="457200" y="274638"/>
             <a:ext cx="6019800" cy="5851525"/>
@@ -611,37 +2488,51 @@
           <a:bodyPr vert="eaVert"/>
           <a:lstStyle/>
           <a:p>
-            <a:pPr lvl="0"/>
-            <a:r>
-              <a:rPr lang="en-US" smtClean="0"/>
+            <a:pPr lvl="0">
+              <a:defRPr/>
+            </a:pPr>
+            <a:r>
+              <a:rPr lang="en-US"/>
               <a:t>Click to edit Master text styles</a:t>
             </a:r>
-          </a:p>
-          <a:p>
-            <a:pPr lvl="1"/>
-            <a:r>
-              <a:rPr lang="en-US" smtClean="0"/>
+            <a:endParaRPr/>
+          </a:p>
+          <a:p>
+            <a:pPr lvl="1">
+              <a:defRPr/>
+            </a:pPr>
+            <a:r>
+              <a:rPr lang="en-US"/>
               <a:t>Second level</a:t>
             </a:r>
-          </a:p>
-          <a:p>
-            <a:pPr lvl="2"/>
-            <a:r>
-              <a:rPr lang="en-US" smtClean="0"/>
+            <a:endParaRPr/>
+          </a:p>
+          <a:p>
+            <a:pPr lvl="2">
+              <a:defRPr/>
+            </a:pPr>
+            <a:r>
+              <a:rPr lang="en-US"/>
               <a:t>Third level</a:t>
             </a:r>
-          </a:p>
-          <a:p>
-            <a:pPr lvl="3"/>
-            <a:r>
-              <a:rPr lang="en-US" smtClean="0"/>
+            <a:endParaRPr/>
+          </a:p>
+          <a:p>
+            <a:pPr lvl="3">
+              <a:defRPr/>
+            </a:pPr>
+            <a:r>
+              <a:rPr lang="en-US"/>
               <a:t>Fourth level</a:t>
             </a:r>
-          </a:p>
-          <a:p>
-            <a:pPr lvl="4"/>
-            <a:r>
-              <a:rPr lang="en-US" smtClean="0"/>
+            <a:endParaRPr/>
+          </a:p>
+          <a:p>
+            <a:pPr lvl="4">
+              <a:defRPr/>
+            </a:pPr>
+            <a:r>
+              <a:rPr lang="en-US"/>
               <a:t>Fifth level</a:t>
             </a:r>
             <a:endParaRPr lang="en-US"/>
@@ -650,7 +2541,7 @@
       </p:sp>
       <p:sp>
         <p:nvSpPr>
-          <p:cNvPr id="4" name="Date Placeholder 3"/>
+          <p:cNvPr id="1225518112" name="Date Placeholder 3"/>
           <p:cNvSpPr>
             <a:spLocks noGrp="1"/>
           </p:cNvSpPr>
@@ -658,14 +2549,16 @@
             <p:ph type="dt" sz="half" idx="10"/>
           </p:nvPr>
         </p:nvSpPr>
-        <p:spPr/>
-        <p:txBody>
-          <a:bodyPr/>
-          <a:lstStyle/>
-          <a:p>
+        <p:spPr bwMode="auto"/>
+        <p:txBody>
+          <a:bodyPr/>
+          <a:lstStyle/>
+          <a:p>
+            <a:pPr>
+              <a:defRPr/>
+            </a:pPr>
             <a:fld id="{1D8BD707-D9CF-40AE-B4C6-C98DA3205C09}" type="datetimeFigureOut">
-              <a:rPr lang="en-US" smtClean="0"/>
-              <a:pPr/>
+              <a:rPr lang="en-US"/>
               <a:t>3/8/2026</a:t>
             </a:fld>
             <a:endParaRPr lang="en-US"/>
@@ -674,7 +2567,7 @@
       </p:sp>
       <p:sp>
         <p:nvSpPr>
-          <p:cNvPr id="5" name="Footer Placeholder 4"/>
+          <p:cNvPr id="853199712" name="Footer Placeholder 4"/>
           <p:cNvSpPr>
             <a:spLocks noGrp="1"/>
           </p:cNvSpPr>
@@ -682,18 +2575,21 @@
             <p:ph type="ftr" sz="quarter" idx="11"/>
           </p:nvPr>
         </p:nvSpPr>
-        <p:spPr/>
-        <p:txBody>
-          <a:bodyPr/>
-          <a:lstStyle/>
-          <a:p>
+        <p:spPr bwMode="auto"/>
+        <p:txBody>
+          <a:bodyPr/>
+          <a:lstStyle/>
+          <a:p>
+            <a:pPr>
+              <a:defRPr/>
+            </a:pPr>
             <a:endParaRPr lang="en-US"/>
           </a:p>
         </p:txBody>
       </p:sp>
       <p:sp>
         <p:nvSpPr>
-          <p:cNvPr id="6" name="Slide Number Placeholder 5"/>
+          <p:cNvPr id="192995253" name="Slide Number Placeholder 5"/>
           <p:cNvSpPr>
             <a:spLocks noGrp="1"/>
           </p:cNvSpPr>
@@ -701,14 +2597,16 @@
             <p:ph type="sldNum" sz="quarter" idx="12"/>
           </p:nvPr>
         </p:nvSpPr>
-        <p:spPr/>
-        <p:txBody>
-          <a:bodyPr/>
-          <a:lstStyle/>
-          <a:p>
+        <p:spPr bwMode="auto"/>
+        <p:txBody>
+          <a:bodyPr/>
+          <a:lstStyle/>
+          <a:p>
+            <a:pPr>
+              <a:defRPr/>
+            </a:pPr>
             <a:fld id="{B6F15528-21DE-4FAA-801E-634DDDAF4B2B}" type="slidenum">
-              <a:rPr lang="en-US" smtClean="0"/>
-              <a:pPr/>
+              <a:rPr lang="en-US"/>
               <a:t>‹#›</a:t>
             </a:fld>
             <a:endParaRPr lang="en-US"/>
@@ -724,7 +2622,7 @@
 </file>
 
 <file path=ppt/slideLayouts/slideLayout2.xml><?xml version="1.0" encoding="utf-8"?>
-<p:sldLayout xmlns:a="http://schemas.openxmlformats.org/drawingml/2006/main" xmlns:r="http://schemas.openxmlformats.org/officeDocument/2006/relationships" xmlns:p="http://schemas.openxmlformats.org/presentationml/2006/main" type="obj" preserve="1">
+<p:sldLayout xmlns:a="http://schemas.openxmlformats.org/drawingml/2006/main" xmlns:r="http://schemas.openxmlformats.org/officeDocument/2006/relationships" xmlns:p="http://schemas.openxmlformats.org/presentationml/2006/main" xmlns:m="http://schemas.openxmlformats.org/officeDocument/2006/math" xmlns:w="http://schemas.openxmlformats.org/wordprocessingml/2006/main" matchingName="" preserve="1" showMasterPhAnim="0" showMasterSp="1" type="obj" userDrawn="1">
   <p:cSld name="Title and Content">
     <p:spTree>
       <p:nvGrpSpPr>
@@ -732,7 +2630,7 @@
         <p:cNvGrpSpPr/>
         <p:nvPr/>
       </p:nvGrpSpPr>
-      <p:grpSpPr>
+      <p:grpSpPr bwMode="auto">
         <a:xfrm>
           <a:off x="0" y="0"/>
           <a:ext cx="0" cy="0"/>
@@ -742,7 +2640,7 @@
       </p:grpSpPr>
       <p:sp>
         <p:nvSpPr>
-          <p:cNvPr id="2" name="Title 1"/>
+          <p:cNvPr id="869267183" name="Title 1"/>
           <p:cNvSpPr>
             <a:spLocks noGrp="1"/>
           </p:cNvSpPr>
@@ -750,13 +2648,16 @@
             <p:ph type="title"/>
           </p:nvPr>
         </p:nvSpPr>
-        <p:spPr/>
-        <p:txBody>
-          <a:bodyPr/>
-          <a:lstStyle/>
-          <a:p>
-            <a:r>
-              <a:rPr lang="en-US" smtClean="0"/>
+        <p:spPr bwMode="auto"/>
+        <p:txBody>
+          <a:bodyPr/>
+          <a:lstStyle/>
+          <a:p>
+            <a:pPr>
+              <a:defRPr/>
+            </a:pPr>
+            <a:r>
+              <a:rPr lang="en-US"/>
               <a:t>Click to edit Master title style</a:t>
             </a:r>
             <a:endParaRPr lang="en-US"/>
@@ -765,7 +2666,7 @@
       </p:sp>
       <p:sp>
         <p:nvSpPr>
-          <p:cNvPr id="3" name="Content Placeholder 2"/>
+          <p:cNvPr id="631557551" name="Content Placeholder 2"/>
           <p:cNvSpPr>
             <a:spLocks noGrp="1"/>
           </p:cNvSpPr>
@@ -773,42 +2674,56 @@
             <p:ph idx="1"/>
           </p:nvPr>
         </p:nvSpPr>
-        <p:spPr/>
-        <p:txBody>
-          <a:bodyPr/>
-          <a:lstStyle/>
-          <a:p>
-            <a:pPr lvl="0"/>
-            <a:r>
-              <a:rPr lang="en-US" smtClean="0"/>
+        <p:spPr bwMode="auto"/>
+        <p:txBody>
+          <a:bodyPr/>
+          <a:lstStyle/>
+          <a:p>
+            <a:pPr lvl="0">
+              <a:defRPr/>
+            </a:pPr>
+            <a:r>
+              <a:rPr lang="en-US"/>
               <a:t>Click to edit Master text styles</a:t>
             </a:r>
-          </a:p>
-          <a:p>
-            <a:pPr lvl="1"/>
-            <a:r>
-              <a:rPr lang="en-US" smtClean="0"/>
+            <a:endParaRPr/>
+          </a:p>
+          <a:p>
+            <a:pPr lvl="1">
+              <a:defRPr/>
+            </a:pPr>
+            <a:r>
+              <a:rPr lang="en-US"/>
               <a:t>Second level</a:t>
             </a:r>
-          </a:p>
-          <a:p>
-            <a:pPr lvl="2"/>
-            <a:r>
-              <a:rPr lang="en-US" smtClean="0"/>
+            <a:endParaRPr/>
+          </a:p>
+          <a:p>
+            <a:pPr lvl="2">
+              <a:defRPr/>
+            </a:pPr>
+            <a:r>
+              <a:rPr lang="en-US"/>
               <a:t>Third level</a:t>
             </a:r>
-          </a:p>
-          <a:p>
-            <a:pPr lvl="3"/>
-            <a:r>
-              <a:rPr lang="en-US" smtClean="0"/>
+            <a:endParaRPr/>
+          </a:p>
+          <a:p>
+            <a:pPr lvl="3">
+              <a:defRPr/>
+            </a:pPr>
+            <a:r>
+              <a:rPr lang="en-US"/>
               <a:t>Fourth level</a:t>
             </a:r>
-          </a:p>
-          <a:p>
-            <a:pPr lvl="4"/>
-            <a:r>
-              <a:rPr lang="en-US" smtClean="0"/>
+            <a:endParaRPr/>
+          </a:p>
+          <a:p>
+            <a:pPr lvl="4">
+              <a:defRPr/>
+            </a:pPr>
+            <a:r>
+              <a:rPr lang="en-US"/>
               <a:t>Fifth level</a:t>
             </a:r>
             <a:endParaRPr lang="en-US"/>
@@ -817,7 +2732,7 @@
       </p:sp>
       <p:sp>
         <p:nvSpPr>
-          <p:cNvPr id="4" name="Date Placeholder 3"/>
+          <p:cNvPr id="1675811332" name="Date Placeholder 3"/>
           <p:cNvSpPr>
             <a:spLocks noGrp="1"/>
           </p:cNvSpPr>
@@ -825,14 +2740,16 @@
             <p:ph type="dt" sz="half" idx="10"/>
           </p:nvPr>
         </p:nvSpPr>
-        <p:spPr/>
-        <p:txBody>
-          <a:bodyPr/>
-          <a:lstStyle/>
-          <a:p>
+        <p:spPr bwMode="auto"/>
+        <p:txBody>
+          <a:bodyPr/>
+          <a:lstStyle/>
+          <a:p>
+            <a:pPr>
+              <a:defRPr/>
+            </a:pPr>
             <a:fld id="{1D8BD707-D9CF-40AE-B4C6-C98DA3205C09}" type="datetimeFigureOut">
-              <a:rPr lang="en-US" smtClean="0"/>
-              <a:pPr/>
+              <a:rPr lang="en-US"/>
               <a:t>3/8/2026</a:t>
             </a:fld>
             <a:endParaRPr lang="en-US"/>
@@ -841,7 +2758,7 @@
       </p:sp>
       <p:sp>
         <p:nvSpPr>
-          <p:cNvPr id="5" name="Footer Placeholder 4"/>
+          <p:cNvPr id="1953727786" name="Footer Placeholder 4"/>
           <p:cNvSpPr>
             <a:spLocks noGrp="1"/>
           </p:cNvSpPr>
@@ -849,18 +2766,21 @@
             <p:ph type="ftr" sz="quarter" idx="11"/>
           </p:nvPr>
         </p:nvSpPr>
-        <p:spPr/>
-        <p:txBody>
-          <a:bodyPr/>
-          <a:lstStyle/>
-          <a:p>
+        <p:spPr bwMode="auto"/>
+        <p:txBody>
+          <a:bodyPr/>
+          <a:lstStyle/>
+          <a:p>
+            <a:pPr>
+              <a:defRPr/>
+            </a:pPr>
             <a:endParaRPr lang="en-US"/>
           </a:p>
         </p:txBody>
       </p:sp>
       <p:sp>
         <p:nvSpPr>
-          <p:cNvPr id="6" name="Slide Number Placeholder 5"/>
+          <p:cNvPr id="213786843" name="Slide Number Placeholder 5"/>
           <p:cNvSpPr>
             <a:spLocks noGrp="1"/>
           </p:cNvSpPr>
@@ -868,14 +2788,16 @@
             <p:ph type="sldNum" sz="quarter" idx="12"/>
           </p:nvPr>
         </p:nvSpPr>
-        <p:spPr/>
-        <p:txBody>
-          <a:bodyPr/>
-          <a:lstStyle/>
-          <a:p>
+        <p:spPr bwMode="auto"/>
+        <p:txBody>
+          <a:bodyPr/>
+          <a:lstStyle/>
+          <a:p>
+            <a:pPr>
+              <a:defRPr/>
+            </a:pPr>
             <a:fld id="{B6F15528-21DE-4FAA-801E-634DDDAF4B2B}" type="slidenum">
-              <a:rPr lang="en-US" smtClean="0"/>
-              <a:pPr/>
+              <a:rPr lang="en-US"/>
               <a:t>‹#›</a:t>
             </a:fld>
             <a:endParaRPr lang="en-US"/>
@@ -891,7 +2813,7 @@
 </file>
 
 <file path=ppt/slideLayouts/slideLayout3.xml><?xml version="1.0" encoding="utf-8"?>
-<p:sldLayout xmlns:a="http://schemas.openxmlformats.org/drawingml/2006/main" xmlns:r="http://schemas.openxmlformats.org/officeDocument/2006/relationships" xmlns:p="http://schemas.openxmlformats.org/presentationml/2006/main" type="secHead" preserve="1">
+<p:sldLayout xmlns:a="http://schemas.openxmlformats.org/drawingml/2006/main" xmlns:r="http://schemas.openxmlformats.org/officeDocument/2006/relationships" xmlns:p="http://schemas.openxmlformats.org/presentationml/2006/main" xmlns:m="http://schemas.openxmlformats.org/officeDocument/2006/math" xmlns:w="http://schemas.openxmlformats.org/wordprocessingml/2006/main" matchingName="" preserve="1" showMasterPhAnim="0" showMasterSp="1" type="secHead" userDrawn="1">
   <p:cSld name="Section Header">
     <p:spTree>
       <p:nvGrpSpPr>
@@ -899,7 +2821,7 @@
         <p:cNvGrpSpPr/>
         <p:nvPr/>
       </p:nvGrpSpPr>
-      <p:grpSpPr>
+      <p:grpSpPr bwMode="auto">
         <a:xfrm>
           <a:off x="0" y="0"/>
           <a:ext cx="0" cy="0"/>
@@ -909,7 +2831,7 @@
       </p:grpSpPr>
       <p:sp>
         <p:nvSpPr>
-          <p:cNvPr id="2" name="Title 1"/>
+          <p:cNvPr id="507379143" name="Title 1"/>
           <p:cNvSpPr>
             <a:spLocks noGrp="1"/>
           </p:cNvSpPr>
@@ -917,7 +2839,7 @@
             <p:ph type="title"/>
           </p:nvPr>
         </p:nvSpPr>
-        <p:spPr>
+        <p:spPr bwMode="auto">
           <a:xfrm>
             <a:off x="722313" y="4406900"/>
             <a:ext cx="7772400" cy="1362075"/>
@@ -931,8 +2853,11 @@
             </a:lvl1pPr>
           </a:lstStyle>
           <a:p>
-            <a:r>
-              <a:rPr lang="en-US" smtClean="0"/>
+            <a:pPr>
+              <a:defRPr/>
+            </a:pPr>
+            <a:r>
+              <a:rPr lang="en-US"/>
               <a:t>Click to edit Master title style</a:t>
             </a:r>
             <a:endParaRPr lang="en-US"/>
@@ -941,7 +2866,7 @@
       </p:sp>
       <p:sp>
         <p:nvSpPr>
-          <p:cNvPr id="3" name="Text Placeholder 2"/>
+          <p:cNvPr id="144214998" name="Text Placeholder 2"/>
           <p:cNvSpPr>
             <a:spLocks noGrp="1"/>
           </p:cNvSpPr>
@@ -949,7 +2874,7 @@
             <p:ph type="body" idx="1"/>
           </p:nvPr>
         </p:nvSpPr>
-        <p:spPr>
+        <p:spPr bwMode="auto">
           <a:xfrm>
             <a:off x="722313" y="2906713"/>
             <a:ext cx="7772400" cy="1500187"/>
@@ -1050,17 +2975,20 @@
             </a:lvl9pPr>
           </a:lstStyle>
           <a:p>
-            <a:pPr lvl="0"/>
-            <a:r>
-              <a:rPr lang="en-US" smtClean="0"/>
+            <a:pPr lvl="0">
+              <a:defRPr/>
+            </a:pPr>
+            <a:r>
+              <a:rPr lang="en-US"/>
               <a:t>Click to edit Master text styles</a:t>
             </a:r>
-          </a:p>
-        </p:txBody>
-      </p:sp>
-      <p:sp>
-        <p:nvSpPr>
-          <p:cNvPr id="4" name="Date Placeholder 3"/>
+            <a:endParaRPr/>
+          </a:p>
+        </p:txBody>
+      </p:sp>
+      <p:sp>
+        <p:nvSpPr>
+          <p:cNvPr id="741201568" name="Date Placeholder 3"/>
           <p:cNvSpPr>
             <a:spLocks noGrp="1"/>
           </p:cNvSpPr>
@@ -1068,14 +2996,16 @@
             <p:ph type="dt" sz="half" idx="10"/>
           </p:nvPr>
         </p:nvSpPr>
-        <p:spPr/>
-        <p:txBody>
-          <a:bodyPr/>
-          <a:lstStyle/>
-          <a:p>
+        <p:spPr bwMode="auto"/>
+        <p:txBody>
+          <a:bodyPr/>
+          <a:lstStyle/>
+          <a:p>
+            <a:pPr>
+              <a:defRPr/>
+            </a:pPr>
             <a:fld id="{1D8BD707-D9CF-40AE-B4C6-C98DA3205C09}" type="datetimeFigureOut">
-              <a:rPr lang="en-US" smtClean="0"/>
-              <a:pPr/>
+              <a:rPr lang="en-US"/>
               <a:t>3/8/2026</a:t>
             </a:fld>
             <a:endParaRPr lang="en-US"/>
@@ -1084,7 +3014,7 @@
       </p:sp>
       <p:sp>
         <p:nvSpPr>
-          <p:cNvPr id="5" name="Footer Placeholder 4"/>
+          <p:cNvPr id="1808463691" name="Footer Placeholder 4"/>
           <p:cNvSpPr>
             <a:spLocks noGrp="1"/>
           </p:cNvSpPr>
@@ -1092,18 +3022,21 @@
             <p:ph type="ftr" sz="quarter" idx="11"/>
           </p:nvPr>
         </p:nvSpPr>
-        <p:spPr/>
-        <p:txBody>
-          <a:bodyPr/>
-          <a:lstStyle/>
-          <a:p>
+        <p:spPr bwMode="auto"/>
+        <p:txBody>
+          <a:bodyPr/>
+          <a:lstStyle/>
+          <a:p>
+            <a:pPr>
+              <a:defRPr/>
+            </a:pPr>
             <a:endParaRPr lang="en-US"/>
           </a:p>
         </p:txBody>
       </p:sp>
       <p:sp>
         <p:nvSpPr>
-          <p:cNvPr id="6" name="Slide Number Placeholder 5"/>
+          <p:cNvPr id="447946575" name="Slide Number Placeholder 5"/>
           <p:cNvSpPr>
             <a:spLocks noGrp="1"/>
           </p:cNvSpPr>
@@ -1111,14 +3044,16 @@
             <p:ph type="sldNum" sz="quarter" idx="12"/>
           </p:nvPr>
         </p:nvSpPr>
-        <p:spPr/>
-        <p:txBody>
-          <a:bodyPr/>
-          <a:lstStyle/>
-          <a:p>
+        <p:spPr bwMode="auto"/>
+        <p:txBody>
+          <a:bodyPr/>
+          <a:lstStyle/>
+          <a:p>
+            <a:pPr>
+              <a:defRPr/>
+            </a:pPr>
             <a:fld id="{B6F15528-21DE-4FAA-801E-634DDDAF4B2B}" type="slidenum">
-              <a:rPr lang="en-US" smtClean="0"/>
-              <a:pPr/>
+              <a:rPr lang="en-US"/>
               <a:t>‹#›</a:t>
             </a:fld>
             <a:endParaRPr lang="en-US"/>
@@ -1134,7 +3069,7 @@
 </file>
 
 <file path=ppt/slideLayouts/slideLayout4.xml><?xml version="1.0" encoding="utf-8"?>
-<p:sldLayout xmlns:a="http://schemas.openxmlformats.org/drawingml/2006/main" xmlns:r="http://schemas.openxmlformats.org/officeDocument/2006/relationships" xmlns:p="http://schemas.openxmlformats.org/presentationml/2006/main" type="twoObj" preserve="1">
+<p:sldLayout xmlns:a="http://schemas.openxmlformats.org/drawingml/2006/main" xmlns:r="http://schemas.openxmlformats.org/officeDocument/2006/relationships" xmlns:p="http://schemas.openxmlformats.org/presentationml/2006/main" xmlns:m="http://schemas.openxmlformats.org/officeDocument/2006/math" xmlns:w="http://schemas.openxmlformats.org/wordprocessingml/2006/main" matchingName="" preserve="1" showMasterPhAnim="0" showMasterSp="1" type="twoObj" userDrawn="1">
   <p:cSld name="Two Content">
     <p:spTree>
       <p:nvGrpSpPr>
@@ -1142,7 +3077,7 @@
         <p:cNvGrpSpPr/>
         <p:nvPr/>
       </p:nvGrpSpPr>
-      <p:grpSpPr>
+      <p:grpSpPr bwMode="auto">
         <a:xfrm>
           <a:off x="0" y="0"/>
           <a:ext cx="0" cy="0"/>
@@ -1152,7 +3087,7 @@
       </p:grpSpPr>
       <p:sp>
         <p:nvSpPr>
-          <p:cNvPr id="2" name="Title 1"/>
+          <p:cNvPr id="1951256338" name="Title 1"/>
           <p:cNvSpPr>
             <a:spLocks noGrp="1"/>
           </p:cNvSpPr>
@@ -1160,13 +3095,16 @@
             <p:ph type="title"/>
           </p:nvPr>
         </p:nvSpPr>
-        <p:spPr/>
-        <p:txBody>
-          <a:bodyPr/>
-          <a:lstStyle/>
-          <a:p>
-            <a:r>
-              <a:rPr lang="en-US" smtClean="0"/>
+        <p:spPr bwMode="auto"/>
+        <p:txBody>
+          <a:bodyPr/>
+          <a:lstStyle/>
+          <a:p>
+            <a:pPr>
+              <a:defRPr/>
+            </a:pPr>
+            <a:r>
+              <a:rPr lang="en-US"/>
               <a:t>Click to edit Master title style</a:t>
             </a:r>
             <a:endParaRPr lang="en-US"/>
@@ -1175,7 +3113,7 @@
       </p:sp>
       <p:sp>
         <p:nvSpPr>
-          <p:cNvPr id="3" name="Content Placeholder 2"/>
+          <p:cNvPr id="101157528" name="Content Placeholder 2"/>
           <p:cNvSpPr>
             <a:spLocks noGrp="1"/>
           </p:cNvSpPr>
@@ -1183,7 +3121,7 @@
             <p:ph sz="half" idx="1"/>
           </p:nvPr>
         </p:nvSpPr>
-        <p:spPr>
+        <p:spPr bwMode="auto">
           <a:xfrm>
             <a:off x="457200" y="1600200"/>
             <a:ext cx="4038600" cy="4525963"/>
@@ -1221,37 +3159,51 @@
             </a:lvl9pPr>
           </a:lstStyle>
           <a:p>
-            <a:pPr lvl="0"/>
-            <a:r>
-              <a:rPr lang="en-US" smtClean="0"/>
+            <a:pPr lvl="0">
+              <a:defRPr/>
+            </a:pPr>
+            <a:r>
+              <a:rPr lang="en-US"/>
               <a:t>Click to edit Master text styles</a:t>
             </a:r>
-          </a:p>
-          <a:p>
-            <a:pPr lvl="1"/>
-            <a:r>
-              <a:rPr lang="en-US" smtClean="0"/>
+            <a:endParaRPr/>
+          </a:p>
+          <a:p>
+            <a:pPr lvl="1">
+              <a:defRPr/>
+            </a:pPr>
+            <a:r>
+              <a:rPr lang="en-US"/>
               <a:t>Second level</a:t>
             </a:r>
-          </a:p>
-          <a:p>
-            <a:pPr lvl="2"/>
-            <a:r>
-              <a:rPr lang="en-US" smtClean="0"/>
+            <a:endParaRPr/>
+          </a:p>
+          <a:p>
+            <a:pPr lvl="2">
+              <a:defRPr/>
+            </a:pPr>
+            <a:r>
+              <a:rPr lang="en-US"/>
               <a:t>Third level</a:t>
             </a:r>
-          </a:p>
-          <a:p>
-            <a:pPr lvl="3"/>
-            <a:r>
-              <a:rPr lang="en-US" smtClean="0"/>
+            <a:endParaRPr/>
+          </a:p>
+          <a:p>
+            <a:pPr lvl="3">
+              <a:defRPr/>
+            </a:pPr>
+            <a:r>
+              <a:rPr lang="en-US"/>
               <a:t>Fourth level</a:t>
             </a:r>
-          </a:p>
-          <a:p>
-            <a:pPr lvl="4"/>
-            <a:r>
-              <a:rPr lang="en-US" smtClean="0"/>
+            <a:endParaRPr/>
+          </a:p>
+          <a:p>
+            <a:pPr lvl="4">
+              <a:defRPr/>
+            </a:pPr>
+            <a:r>
+              <a:rPr lang="en-US"/>
               <a:t>Fifth level</a:t>
             </a:r>
             <a:endParaRPr lang="en-US"/>
@@ -1260,7 +3212,7 @@
       </p:sp>
       <p:sp>
         <p:nvSpPr>
-          <p:cNvPr id="4" name="Content Placeholder 3"/>
+          <p:cNvPr id="1369029086" name="Content Placeholder 3"/>
           <p:cNvSpPr>
             <a:spLocks noGrp="1"/>
           </p:cNvSpPr>
@@ -1268,7 +3220,7 @@
             <p:ph sz="half" idx="2"/>
           </p:nvPr>
         </p:nvSpPr>
-        <p:spPr>
+        <p:spPr bwMode="auto">
           <a:xfrm>
             <a:off x="4648200" y="1600200"/>
             <a:ext cx="4038600" cy="4525963"/>
@@ -1306,37 +3258,51 @@
             </a:lvl9pPr>
           </a:lstStyle>
           <a:p>
-            <a:pPr lvl="0"/>
-            <a:r>
-              <a:rPr lang="en-US" smtClean="0"/>
+            <a:pPr lvl="0">
+              <a:defRPr/>
+            </a:pPr>
+            <a:r>
+              <a:rPr lang="en-US"/>
               <a:t>Click to edit Master text styles</a:t>
             </a:r>
-          </a:p>
-          <a:p>
-            <a:pPr lvl="1"/>
-            <a:r>
-              <a:rPr lang="en-US" smtClean="0"/>
+            <a:endParaRPr/>
+          </a:p>
+          <a:p>
+            <a:pPr lvl="1">
+              <a:defRPr/>
+            </a:pPr>
+            <a:r>
+              <a:rPr lang="en-US"/>
               <a:t>Second level</a:t>
             </a:r>
-          </a:p>
-          <a:p>
-            <a:pPr lvl="2"/>
-            <a:r>
-              <a:rPr lang="en-US" smtClean="0"/>
+            <a:endParaRPr/>
+          </a:p>
+          <a:p>
+            <a:pPr lvl="2">
+              <a:defRPr/>
+            </a:pPr>
+            <a:r>
+              <a:rPr lang="en-US"/>
               <a:t>Third level</a:t>
             </a:r>
-          </a:p>
-          <a:p>
-            <a:pPr lvl="3"/>
-            <a:r>
-              <a:rPr lang="en-US" smtClean="0"/>
+            <a:endParaRPr/>
+          </a:p>
+          <a:p>
+            <a:pPr lvl="3">
+              <a:defRPr/>
+            </a:pPr>
+            <a:r>
+              <a:rPr lang="en-US"/>
               <a:t>Fourth level</a:t>
             </a:r>
-          </a:p>
-          <a:p>
-            <a:pPr lvl="4"/>
-            <a:r>
-              <a:rPr lang="en-US" smtClean="0"/>
+            <a:endParaRPr/>
+          </a:p>
+          <a:p>
+            <a:pPr lvl="4">
+              <a:defRPr/>
+            </a:pPr>
+            <a:r>
+              <a:rPr lang="en-US"/>
               <a:t>Fifth level</a:t>
             </a:r>
             <a:endParaRPr lang="en-US"/>
@@ -1345,7 +3311,7 @@
       </p:sp>
       <p:sp>
         <p:nvSpPr>
-          <p:cNvPr id="5" name="Date Placeholder 4"/>
+          <p:cNvPr id="57970219" name="Date Placeholder 4"/>
           <p:cNvSpPr>
             <a:spLocks noGrp="1"/>
           </p:cNvSpPr>
@@ -1353,14 +3319,16 @@
             <p:ph type="dt" sz="half" idx="10"/>
           </p:nvPr>
         </p:nvSpPr>
-        <p:spPr/>
-        <p:txBody>
-          <a:bodyPr/>
-          <a:lstStyle/>
-          <a:p>
+        <p:spPr bwMode="auto"/>
+        <p:txBody>
+          <a:bodyPr/>
+          <a:lstStyle/>
+          <a:p>
+            <a:pPr>
+              <a:defRPr/>
+            </a:pPr>
             <a:fld id="{1D8BD707-D9CF-40AE-B4C6-C98DA3205C09}" type="datetimeFigureOut">
-              <a:rPr lang="en-US" smtClean="0"/>
-              <a:pPr/>
+              <a:rPr lang="en-US"/>
               <a:t>3/8/2026</a:t>
             </a:fld>
             <a:endParaRPr lang="en-US"/>
@@ -1369,7 +3337,7 @@
       </p:sp>
       <p:sp>
         <p:nvSpPr>
-          <p:cNvPr id="6" name="Footer Placeholder 5"/>
+          <p:cNvPr id="760779656" name="Footer Placeholder 5"/>
           <p:cNvSpPr>
             <a:spLocks noGrp="1"/>
           </p:cNvSpPr>
@@ -1377,18 +3345,21 @@
             <p:ph type="ftr" sz="quarter" idx="11"/>
           </p:nvPr>
         </p:nvSpPr>
-        <p:spPr/>
-        <p:txBody>
-          <a:bodyPr/>
-          <a:lstStyle/>
-          <a:p>
+        <p:spPr bwMode="auto"/>
+        <p:txBody>
+          <a:bodyPr/>
+          <a:lstStyle/>
+          <a:p>
+            <a:pPr>
+              <a:defRPr/>
+            </a:pPr>
             <a:endParaRPr lang="en-US"/>
           </a:p>
         </p:txBody>
       </p:sp>
       <p:sp>
         <p:nvSpPr>
-          <p:cNvPr id="7" name="Slide Number Placeholder 6"/>
+          <p:cNvPr id="175421324" name="Slide Number Placeholder 6"/>
           <p:cNvSpPr>
             <a:spLocks noGrp="1"/>
           </p:cNvSpPr>
@@ -1396,14 +3367,16 @@
             <p:ph type="sldNum" sz="quarter" idx="12"/>
           </p:nvPr>
         </p:nvSpPr>
-        <p:spPr/>
-        <p:txBody>
-          <a:bodyPr/>
-          <a:lstStyle/>
-          <a:p>
+        <p:spPr bwMode="auto"/>
+        <p:txBody>
+          <a:bodyPr/>
+          <a:lstStyle/>
+          <a:p>
+            <a:pPr>
+              <a:defRPr/>
+            </a:pPr>
             <a:fld id="{B6F15528-21DE-4FAA-801E-634DDDAF4B2B}" type="slidenum">
-              <a:rPr lang="en-US" smtClean="0"/>
-              <a:pPr/>
+              <a:rPr lang="en-US"/>
               <a:t>‹#›</a:t>
             </a:fld>
             <a:endParaRPr lang="en-US"/>
@@ -1419,7 +3392,7 @@
 </file>
 
 <file path=ppt/slideLayouts/slideLayout5.xml><?xml version="1.0" encoding="utf-8"?>
-<p:sldLayout xmlns:a="http://schemas.openxmlformats.org/drawingml/2006/main" xmlns:r="http://schemas.openxmlformats.org/officeDocument/2006/relationships" xmlns:p="http://schemas.openxmlformats.org/presentationml/2006/main" type="twoTxTwoObj" preserve="1">
+<p:sldLayout xmlns:a="http://schemas.openxmlformats.org/drawingml/2006/main" xmlns:r="http://schemas.openxmlformats.org/officeDocument/2006/relationships" xmlns:p="http://schemas.openxmlformats.org/presentationml/2006/main" xmlns:m="http://schemas.openxmlformats.org/officeDocument/2006/math" xmlns:w="http://schemas.openxmlformats.org/wordprocessingml/2006/main" matchingName="" preserve="1" showMasterPhAnim="0" showMasterSp="1" type="twoTxTwoObj" userDrawn="1">
   <p:cSld name="Comparison">
     <p:spTree>
       <p:nvGrpSpPr>
@@ -1427,7 +3400,7 @@
         <p:cNvGrpSpPr/>
         <p:nvPr/>
       </p:nvGrpSpPr>
-      <p:grpSpPr>
+      <p:grpSpPr bwMode="auto">
         <a:xfrm>
           <a:off x="0" y="0"/>
           <a:ext cx="0" cy="0"/>
@@ -1437,7 +3410,7 @@
       </p:grpSpPr>
       <p:sp>
         <p:nvSpPr>
-          <p:cNvPr id="2" name="Title 1"/>
+          <p:cNvPr id="1566782324" name="Title 1"/>
           <p:cNvSpPr>
             <a:spLocks noGrp="1"/>
           </p:cNvSpPr>
@@ -1445,7 +3418,7 @@
             <p:ph type="title"/>
           </p:nvPr>
         </p:nvSpPr>
-        <p:spPr/>
+        <p:spPr bwMode="auto"/>
         <p:txBody>
           <a:bodyPr/>
           <a:lstStyle>
@@ -1454,8 +3427,11 @@
             </a:lvl1pPr>
           </a:lstStyle>
           <a:p>
-            <a:r>
-              <a:rPr lang="en-US" smtClean="0"/>
+            <a:pPr>
+              <a:defRPr/>
+            </a:pPr>
+            <a:r>
+              <a:rPr lang="en-US"/>
               <a:t>Click to edit Master title style</a:t>
             </a:r>
             <a:endParaRPr lang="en-US"/>
@@ -1464,7 +3440,7 @@
       </p:sp>
       <p:sp>
         <p:nvSpPr>
-          <p:cNvPr id="3" name="Text Placeholder 2"/>
+          <p:cNvPr id="537671379" name="Text Placeholder 2"/>
           <p:cNvSpPr>
             <a:spLocks noGrp="1"/>
           </p:cNvSpPr>
@@ -1472,7 +3448,7 @@
             <p:ph type="body" idx="1"/>
           </p:nvPr>
         </p:nvSpPr>
-        <p:spPr>
+        <p:spPr bwMode="auto">
           <a:xfrm>
             <a:off x="457200" y="1535113"/>
             <a:ext cx="4040188" cy="639762"/>
@@ -1519,17 +3495,20 @@
             </a:lvl9pPr>
           </a:lstStyle>
           <a:p>
-            <a:pPr lvl="0"/>
-            <a:r>
-              <a:rPr lang="en-US" smtClean="0"/>
+            <a:pPr lvl="0">
+              <a:defRPr/>
+            </a:pPr>
+            <a:r>
+              <a:rPr lang="en-US"/>
               <a:t>Click to edit Master text styles</a:t>
             </a:r>
-          </a:p>
-        </p:txBody>
-      </p:sp>
-      <p:sp>
-        <p:nvSpPr>
-          <p:cNvPr id="4" name="Content Placeholder 3"/>
+            <a:endParaRPr/>
+          </a:p>
+        </p:txBody>
+      </p:sp>
+      <p:sp>
+        <p:nvSpPr>
+          <p:cNvPr id="1893520772" name="Content Placeholder 3"/>
           <p:cNvSpPr>
             <a:spLocks noGrp="1"/>
           </p:cNvSpPr>
@@ -1537,7 +3516,7 @@
             <p:ph sz="half" idx="2"/>
           </p:nvPr>
         </p:nvSpPr>
-        <p:spPr>
+        <p:spPr bwMode="auto">
           <a:xfrm>
             <a:off x="457200" y="2174875"/>
             <a:ext cx="4040188" cy="3951288"/>
@@ -1575,37 +3554,51 @@
             </a:lvl9pPr>
           </a:lstStyle>
           <a:p>
-            <a:pPr lvl="0"/>
-            <a:r>
-              <a:rPr lang="en-US" smtClean="0"/>
+            <a:pPr lvl="0">
+              <a:defRPr/>
+            </a:pPr>
+            <a:r>
+              <a:rPr lang="en-US"/>
               <a:t>Click to edit Master text styles</a:t>
             </a:r>
-          </a:p>
-          <a:p>
-            <a:pPr lvl="1"/>
-            <a:r>
-              <a:rPr lang="en-US" smtClean="0"/>
+            <a:endParaRPr/>
+          </a:p>
+          <a:p>
+            <a:pPr lvl="1">
+              <a:defRPr/>
+            </a:pPr>
+            <a:r>
+              <a:rPr lang="en-US"/>
               <a:t>Second level</a:t>
             </a:r>
-          </a:p>
-          <a:p>
-            <a:pPr lvl="2"/>
-            <a:r>
-              <a:rPr lang="en-US" smtClean="0"/>
+            <a:endParaRPr/>
+          </a:p>
+          <a:p>
+            <a:pPr lvl="2">
+              <a:defRPr/>
+            </a:pPr>
+            <a:r>
+              <a:rPr lang="en-US"/>
               <a:t>Third level</a:t>
             </a:r>
-          </a:p>
-          <a:p>
-            <a:pPr lvl="3"/>
-            <a:r>
-              <a:rPr lang="en-US" smtClean="0"/>
+            <a:endParaRPr/>
+          </a:p>
+          <a:p>
+            <a:pPr lvl="3">
+              <a:defRPr/>
+            </a:pPr>
+            <a:r>
+              <a:rPr lang="en-US"/>
               <a:t>Fourth level</a:t>
             </a:r>
-          </a:p>
-          <a:p>
-            <a:pPr lvl="4"/>
-            <a:r>
-              <a:rPr lang="en-US" smtClean="0"/>
+            <a:endParaRPr/>
+          </a:p>
+          <a:p>
+            <a:pPr lvl="4">
+              <a:defRPr/>
+            </a:pPr>
+            <a:r>
+              <a:rPr lang="en-US"/>
               <a:t>Fifth level</a:t>
             </a:r>
             <a:endParaRPr lang="en-US"/>
@@ -1614,7 +3607,7 @@
       </p:sp>
       <p:sp>
         <p:nvSpPr>
-          <p:cNvPr id="5" name="Text Placeholder 4"/>
+          <p:cNvPr id="1784361513" name="Text Placeholder 4"/>
           <p:cNvSpPr>
             <a:spLocks noGrp="1"/>
           </p:cNvSpPr>
@@ -1622,7 +3615,7 @@
             <p:ph type="body" sz="quarter" idx="3"/>
           </p:nvPr>
         </p:nvSpPr>
-        <p:spPr>
+        <p:spPr bwMode="auto">
           <a:xfrm>
             <a:off x="4645025" y="1535113"/>
             <a:ext cx="4041775" cy="639762"/>
@@ -1669,17 +3662,20 @@
             </a:lvl9pPr>
           </a:lstStyle>
           <a:p>
-            <a:pPr lvl="0"/>
-            <a:r>
-              <a:rPr lang="en-US" smtClean="0"/>
+            <a:pPr lvl="0">
+              <a:defRPr/>
+            </a:pPr>
+            <a:r>
+              <a:rPr lang="en-US"/>
               <a:t>Click to edit Master text styles</a:t>
             </a:r>
-          </a:p>
-        </p:txBody>
-      </p:sp>
-      <p:sp>
-        <p:nvSpPr>
-          <p:cNvPr id="6" name="Content Placeholder 5"/>
+            <a:endParaRPr/>
+          </a:p>
+        </p:txBody>
+      </p:sp>
+      <p:sp>
+        <p:nvSpPr>
+          <p:cNvPr id="603280393" name="Content Placeholder 5"/>
           <p:cNvSpPr>
             <a:spLocks noGrp="1"/>
           </p:cNvSpPr>
@@ -1687,7 +3683,7 @@
             <p:ph sz="quarter" idx="4"/>
           </p:nvPr>
         </p:nvSpPr>
-        <p:spPr>
+        <p:spPr bwMode="auto">
           <a:xfrm>
             <a:off x="4645025" y="2174875"/>
             <a:ext cx="4041775" cy="3951288"/>
@@ -1725,37 +3721,51 @@
             </a:lvl9pPr>
           </a:lstStyle>
           <a:p>
-            <a:pPr lvl="0"/>
-            <a:r>
-              <a:rPr lang="en-US" smtClean="0"/>
+            <a:pPr lvl="0">
+              <a:defRPr/>
+            </a:pPr>
+            <a:r>
+              <a:rPr lang="en-US"/>
               <a:t>Click to edit Master text styles</a:t>
             </a:r>
-          </a:p>
-          <a:p>
-            <a:pPr lvl="1"/>
-            <a:r>
-              <a:rPr lang="en-US" smtClean="0"/>
+            <a:endParaRPr/>
+          </a:p>
+          <a:p>
+            <a:pPr lvl="1">
+              <a:defRPr/>
+            </a:pPr>
+            <a:r>
+              <a:rPr lang="en-US"/>
               <a:t>Second level</a:t>
             </a:r>
-          </a:p>
-          <a:p>
-            <a:pPr lvl="2"/>
-            <a:r>
-              <a:rPr lang="en-US" smtClean="0"/>
+            <a:endParaRPr/>
+          </a:p>
+          <a:p>
+            <a:pPr lvl="2">
+              <a:defRPr/>
+            </a:pPr>
+            <a:r>
+              <a:rPr lang="en-US"/>
               <a:t>Third level</a:t>
             </a:r>
-          </a:p>
-          <a:p>
-            <a:pPr lvl="3"/>
-            <a:r>
-              <a:rPr lang="en-US" smtClean="0"/>
+            <a:endParaRPr/>
+          </a:p>
+          <a:p>
+            <a:pPr lvl="3">
+              <a:defRPr/>
+            </a:pPr>
+            <a:r>
+              <a:rPr lang="en-US"/>
               <a:t>Fourth level</a:t>
             </a:r>
-          </a:p>
-          <a:p>
-            <a:pPr lvl="4"/>
-            <a:r>
-              <a:rPr lang="en-US" smtClean="0"/>
+            <a:endParaRPr/>
+          </a:p>
+          <a:p>
+            <a:pPr lvl="4">
+              <a:defRPr/>
+            </a:pPr>
+            <a:r>
+              <a:rPr lang="en-US"/>
               <a:t>Fifth level</a:t>
             </a:r>
             <a:endParaRPr lang="en-US"/>
@@ -1764,7 +3774,7 @@
       </p:sp>
       <p:sp>
         <p:nvSpPr>
-          <p:cNvPr id="7" name="Date Placeholder 6"/>
+          <p:cNvPr id="479392617" name="Date Placeholder 6"/>
           <p:cNvSpPr>
             <a:spLocks noGrp="1"/>
           </p:cNvSpPr>
@@ -1772,14 +3782,16 @@
             <p:ph type="dt" sz="half" idx="10"/>
           </p:nvPr>
         </p:nvSpPr>
-        <p:spPr/>
-        <p:txBody>
-          <a:bodyPr/>
-          <a:lstStyle/>
-          <a:p>
+        <p:spPr bwMode="auto"/>
+        <p:txBody>
+          <a:bodyPr/>
+          <a:lstStyle/>
+          <a:p>
+            <a:pPr>
+              <a:defRPr/>
+            </a:pPr>
             <a:fld id="{1D8BD707-D9CF-40AE-B4C6-C98DA3205C09}" type="datetimeFigureOut">
-              <a:rPr lang="en-US" smtClean="0"/>
-              <a:pPr/>
+              <a:rPr lang="en-US"/>
               <a:t>3/8/2026</a:t>
             </a:fld>
             <a:endParaRPr lang="en-US"/>
@@ -1788,7 +3800,7 @@
       </p:sp>
       <p:sp>
         <p:nvSpPr>
-          <p:cNvPr id="8" name="Footer Placeholder 7"/>
+          <p:cNvPr id="664056363" name="Footer Placeholder 7"/>
           <p:cNvSpPr>
             <a:spLocks noGrp="1"/>
           </p:cNvSpPr>
@@ -1796,18 +3808,21 @@
             <p:ph type="ftr" sz="quarter" idx="11"/>
           </p:nvPr>
         </p:nvSpPr>
-        <p:spPr/>
-        <p:txBody>
-          <a:bodyPr/>
-          <a:lstStyle/>
-          <a:p>
+        <p:spPr bwMode="auto"/>
+        <p:txBody>
+          <a:bodyPr/>
+          <a:lstStyle/>
+          <a:p>
+            <a:pPr>
+              <a:defRPr/>
+            </a:pPr>
             <a:endParaRPr lang="en-US"/>
           </a:p>
         </p:txBody>
       </p:sp>
       <p:sp>
         <p:nvSpPr>
-          <p:cNvPr id="9" name="Slide Number Placeholder 8"/>
+          <p:cNvPr id="835053205" name="Slide Number Placeholder 8"/>
           <p:cNvSpPr>
             <a:spLocks noGrp="1"/>
           </p:cNvSpPr>
@@ -1815,14 +3830,16 @@
             <p:ph type="sldNum" sz="quarter" idx="12"/>
           </p:nvPr>
         </p:nvSpPr>
-        <p:spPr/>
-        <p:txBody>
-          <a:bodyPr/>
-          <a:lstStyle/>
-          <a:p>
+        <p:spPr bwMode="auto"/>
+        <p:txBody>
+          <a:bodyPr/>
+          <a:lstStyle/>
+          <a:p>
+            <a:pPr>
+              <a:defRPr/>
+            </a:pPr>
             <a:fld id="{B6F15528-21DE-4FAA-801E-634DDDAF4B2B}" type="slidenum">
-              <a:rPr lang="en-US" smtClean="0"/>
-              <a:pPr/>
+              <a:rPr lang="en-US"/>
               <a:t>‹#›</a:t>
             </a:fld>
             <a:endParaRPr lang="en-US"/>
@@ -1838,7 +3855,7 @@
 </file>
 
 <file path=ppt/slideLayouts/slideLayout6.xml><?xml version="1.0" encoding="utf-8"?>
-<p:sldLayout xmlns:a="http://schemas.openxmlformats.org/drawingml/2006/main" xmlns:r="http://schemas.openxmlformats.org/officeDocument/2006/relationships" xmlns:p="http://schemas.openxmlformats.org/presentationml/2006/main" type="titleOnly" preserve="1">
+<p:sldLayout xmlns:a="http://schemas.openxmlformats.org/drawingml/2006/main" xmlns:r="http://schemas.openxmlformats.org/officeDocument/2006/relationships" xmlns:p="http://schemas.openxmlformats.org/presentationml/2006/main" xmlns:m="http://schemas.openxmlformats.org/officeDocument/2006/math" xmlns:w="http://schemas.openxmlformats.org/wordprocessingml/2006/main" matchingName="" preserve="1" showMasterPhAnim="0" showMasterSp="1" type="titleOnly" userDrawn="1">
   <p:cSld name="Title Only">
     <p:spTree>
       <p:nvGrpSpPr>
@@ -1846,7 +3863,7 @@
         <p:cNvGrpSpPr/>
         <p:nvPr/>
       </p:nvGrpSpPr>
-      <p:grpSpPr>
+      <p:grpSpPr bwMode="auto">
         <a:xfrm>
           <a:off x="0" y="0"/>
           <a:ext cx="0" cy="0"/>
@@ -1856,7 +3873,7 @@
       </p:grpSpPr>
       <p:sp>
         <p:nvSpPr>
-          <p:cNvPr id="2" name="Title 1"/>
+          <p:cNvPr id="835820810" name="Title 1"/>
           <p:cNvSpPr>
             <a:spLocks noGrp="1"/>
           </p:cNvSpPr>
@@ -1864,13 +3881,16 @@
             <p:ph type="title"/>
           </p:nvPr>
         </p:nvSpPr>
-        <p:spPr/>
-        <p:txBody>
-          <a:bodyPr/>
-          <a:lstStyle/>
-          <a:p>
-            <a:r>
-              <a:rPr lang="en-US" smtClean="0"/>
+        <p:spPr bwMode="auto"/>
+        <p:txBody>
+          <a:bodyPr/>
+          <a:lstStyle/>
+          <a:p>
+            <a:pPr>
+              <a:defRPr/>
+            </a:pPr>
+            <a:r>
+              <a:rPr lang="en-US"/>
               <a:t>Click to edit Master title style</a:t>
             </a:r>
             <a:endParaRPr lang="en-US"/>
@@ -1879,7 +3899,7 @@
       </p:sp>
       <p:sp>
         <p:nvSpPr>
-          <p:cNvPr id="3" name="Date Placeholder 2"/>
+          <p:cNvPr id="1993954834" name="Date Placeholder 2"/>
           <p:cNvSpPr>
             <a:spLocks noGrp="1"/>
           </p:cNvSpPr>
@@ -1887,14 +3907,16 @@
             <p:ph type="dt" sz="half" idx="10"/>
           </p:nvPr>
         </p:nvSpPr>
-        <p:spPr/>
-        <p:txBody>
-          <a:bodyPr/>
-          <a:lstStyle/>
-          <a:p>
+        <p:spPr bwMode="auto"/>
+        <p:txBody>
+          <a:bodyPr/>
+          <a:lstStyle/>
+          <a:p>
+            <a:pPr>
+              <a:defRPr/>
+            </a:pPr>
             <a:fld id="{1D8BD707-D9CF-40AE-B4C6-C98DA3205C09}" type="datetimeFigureOut">
-              <a:rPr lang="en-US" smtClean="0"/>
-              <a:pPr/>
+              <a:rPr lang="en-US"/>
               <a:t>3/8/2026</a:t>
             </a:fld>
             <a:endParaRPr lang="en-US"/>
@@ -1903,7 +3925,7 @@
       </p:sp>
       <p:sp>
         <p:nvSpPr>
-          <p:cNvPr id="4" name="Footer Placeholder 3"/>
+          <p:cNvPr id="1927866944" name="Footer Placeholder 3"/>
           <p:cNvSpPr>
             <a:spLocks noGrp="1"/>
           </p:cNvSpPr>
@@ -1911,18 +3933,21 @@
             <p:ph type="ftr" sz="quarter" idx="11"/>
           </p:nvPr>
         </p:nvSpPr>
-        <p:spPr/>
-        <p:txBody>
-          <a:bodyPr/>
-          <a:lstStyle/>
-          <a:p>
+        <p:spPr bwMode="auto"/>
+        <p:txBody>
+          <a:bodyPr/>
+          <a:lstStyle/>
+          <a:p>
+            <a:pPr>
+              <a:defRPr/>
+            </a:pPr>
             <a:endParaRPr lang="en-US"/>
           </a:p>
         </p:txBody>
       </p:sp>
       <p:sp>
         <p:nvSpPr>
-          <p:cNvPr id="5" name="Slide Number Placeholder 4"/>
+          <p:cNvPr id="1477813815" name="Slide Number Placeholder 4"/>
           <p:cNvSpPr>
             <a:spLocks noGrp="1"/>
           </p:cNvSpPr>
@@ -1930,14 +3955,16 @@
             <p:ph type="sldNum" sz="quarter" idx="12"/>
           </p:nvPr>
         </p:nvSpPr>
-        <p:spPr/>
-        <p:txBody>
-          <a:bodyPr/>
-          <a:lstStyle/>
-          <a:p>
+        <p:spPr bwMode="auto"/>
+        <p:txBody>
+          <a:bodyPr/>
+          <a:lstStyle/>
+          <a:p>
+            <a:pPr>
+              <a:defRPr/>
+            </a:pPr>
             <a:fld id="{B6F15528-21DE-4FAA-801E-634DDDAF4B2B}" type="slidenum">
-              <a:rPr lang="en-US" smtClean="0"/>
-              <a:pPr/>
+              <a:rPr lang="en-US"/>
               <a:t>‹#›</a:t>
             </a:fld>
             <a:endParaRPr lang="en-US"/>
@@ -1953,7 +3980,7 @@
 </file>
 
 <file path=ppt/slideLayouts/slideLayout7.xml><?xml version="1.0" encoding="utf-8"?>
-<p:sldLayout xmlns:a="http://schemas.openxmlformats.org/drawingml/2006/main" xmlns:r="http://schemas.openxmlformats.org/officeDocument/2006/relationships" xmlns:p="http://schemas.openxmlformats.org/presentationml/2006/main" type="blank" preserve="1">
+<p:sldLayout xmlns:a="http://schemas.openxmlformats.org/drawingml/2006/main" xmlns:r="http://schemas.openxmlformats.org/officeDocument/2006/relationships" xmlns:p="http://schemas.openxmlformats.org/presentationml/2006/main" xmlns:m="http://schemas.openxmlformats.org/officeDocument/2006/math" xmlns:w="http://schemas.openxmlformats.org/wordprocessingml/2006/main" matchingName="" preserve="1" showMasterPhAnim="0" showMasterSp="1" type="blank" userDrawn="1">
   <p:cSld name="Blank">
     <p:spTree>
       <p:nvGrpSpPr>
@@ -1961,7 +3988,7 @@
         <p:cNvGrpSpPr/>
         <p:nvPr/>
       </p:nvGrpSpPr>
-      <p:grpSpPr>
+      <p:grpSpPr bwMode="auto">
         <a:xfrm>
           <a:off x="0" y="0"/>
           <a:ext cx="0" cy="0"/>
@@ -1971,7 +3998,7 @@
       </p:grpSpPr>
       <p:sp>
         <p:nvSpPr>
-          <p:cNvPr id="2" name="Date Placeholder 1"/>
+          <p:cNvPr id="1155802178" name="Date Placeholder 1"/>
           <p:cNvSpPr>
             <a:spLocks noGrp="1"/>
           </p:cNvSpPr>
@@ -1979,14 +4006,16 @@
             <p:ph type="dt" sz="half" idx="10"/>
           </p:nvPr>
         </p:nvSpPr>
-        <p:spPr/>
-        <p:txBody>
-          <a:bodyPr/>
-          <a:lstStyle/>
-          <a:p>
+        <p:spPr bwMode="auto"/>
+        <p:txBody>
+          <a:bodyPr/>
+          <a:lstStyle/>
+          <a:p>
+            <a:pPr>
+              <a:defRPr/>
+            </a:pPr>
             <a:fld id="{1D8BD707-D9CF-40AE-B4C6-C98DA3205C09}" type="datetimeFigureOut">
-              <a:rPr lang="en-US" smtClean="0"/>
-              <a:pPr/>
+              <a:rPr lang="en-US"/>
               <a:t>3/8/2026</a:t>
             </a:fld>
             <a:endParaRPr lang="en-US"/>
@@ -1995,7 +4024,7 @@
       </p:sp>
       <p:sp>
         <p:nvSpPr>
-          <p:cNvPr id="3" name="Footer Placeholder 2"/>
+          <p:cNvPr id="2089201715" name="Footer Placeholder 2"/>
           <p:cNvSpPr>
             <a:spLocks noGrp="1"/>
           </p:cNvSpPr>
@@ -2003,18 +4032,21 @@
             <p:ph type="ftr" sz="quarter" idx="11"/>
           </p:nvPr>
         </p:nvSpPr>
-        <p:spPr/>
-        <p:txBody>
-          <a:bodyPr/>
-          <a:lstStyle/>
-          <a:p>
+        <p:spPr bwMode="auto"/>
+        <p:txBody>
+          <a:bodyPr/>
+          <a:lstStyle/>
+          <a:p>
+            <a:pPr>
+              <a:defRPr/>
+            </a:pPr>
             <a:endParaRPr lang="en-US"/>
           </a:p>
         </p:txBody>
       </p:sp>
       <p:sp>
         <p:nvSpPr>
-          <p:cNvPr id="4" name="Slide Number Placeholder 3"/>
+          <p:cNvPr id="1385443326" name="Slide Number Placeholder 3"/>
           <p:cNvSpPr>
             <a:spLocks noGrp="1"/>
           </p:cNvSpPr>
@@ -2022,14 +4054,16 @@
             <p:ph type="sldNum" sz="quarter" idx="12"/>
           </p:nvPr>
         </p:nvSpPr>
-        <p:spPr/>
-        <p:txBody>
-          <a:bodyPr/>
-          <a:lstStyle/>
-          <a:p>
+        <p:spPr bwMode="auto"/>
+        <p:txBody>
+          <a:bodyPr/>
+          <a:lstStyle/>
+          <a:p>
+            <a:pPr>
+              <a:defRPr/>
+            </a:pPr>
             <a:fld id="{B6F15528-21DE-4FAA-801E-634DDDAF4B2B}" type="slidenum">
-              <a:rPr lang="en-US" smtClean="0"/>
-              <a:pPr/>
+              <a:rPr lang="en-US"/>
               <a:t>‹#›</a:t>
             </a:fld>
             <a:endParaRPr lang="en-US"/>
@@ -2045,7 +4079,7 @@
 </file>
 
 <file path=ppt/slideLayouts/slideLayout8.xml><?xml version="1.0" encoding="utf-8"?>
-<p:sldLayout xmlns:a="http://schemas.openxmlformats.org/drawingml/2006/main" xmlns:r="http://schemas.openxmlformats.org/officeDocument/2006/relationships" xmlns:p="http://schemas.openxmlformats.org/presentationml/2006/main" type="objTx" preserve="1">
+<p:sldLayout xmlns:a="http://schemas.openxmlformats.org/drawingml/2006/main" xmlns:r="http://schemas.openxmlformats.org/officeDocument/2006/relationships" xmlns:p="http://schemas.openxmlformats.org/presentationml/2006/main" xmlns:m="http://schemas.openxmlformats.org/officeDocument/2006/math" xmlns:w="http://schemas.openxmlformats.org/wordprocessingml/2006/main" matchingName="" preserve="1" showMasterPhAnim="0" showMasterSp="1" type="objTx" userDrawn="1">
   <p:cSld name="Content with Caption">
     <p:spTree>
       <p:nvGrpSpPr>
@@ -2053,7 +4087,7 @@
         <p:cNvGrpSpPr/>
         <p:nvPr/>
       </p:nvGrpSpPr>
-      <p:grpSpPr>
+      <p:grpSpPr bwMode="auto">
         <a:xfrm>
           <a:off x="0" y="0"/>
           <a:ext cx="0" cy="0"/>
@@ -2063,7 +4097,7 @@
       </p:grpSpPr>
       <p:sp>
         <p:nvSpPr>
-          <p:cNvPr id="2" name="Title 1"/>
+          <p:cNvPr id="1325073525" name="Title 1"/>
           <p:cNvSpPr>
             <a:spLocks noGrp="1"/>
           </p:cNvSpPr>
@@ -2071,7 +4105,7 @@
             <p:ph type="title"/>
           </p:nvPr>
         </p:nvSpPr>
-        <p:spPr>
+        <p:spPr bwMode="auto">
           <a:xfrm>
             <a:off x="457200" y="273050"/>
             <a:ext cx="3008313" cy="1162050"/>
@@ -2085,8 +4119,11 @@
             </a:lvl1pPr>
           </a:lstStyle>
           <a:p>
-            <a:r>
-              <a:rPr lang="en-US" smtClean="0"/>
+            <a:pPr>
+              <a:defRPr/>
+            </a:pPr>
+            <a:r>
+              <a:rPr lang="en-US"/>
               <a:t>Click to edit Master title style</a:t>
             </a:r>
             <a:endParaRPr lang="en-US"/>
@@ -2095,7 +4132,7 @@
       </p:sp>
       <p:sp>
         <p:nvSpPr>
-          <p:cNvPr id="3" name="Content Placeholder 2"/>
+          <p:cNvPr id="79662861" name="Content Placeholder 2"/>
           <p:cNvSpPr>
             <a:spLocks noGrp="1"/>
           </p:cNvSpPr>
@@ -2103,7 +4140,7 @@
             <p:ph idx="1"/>
           </p:nvPr>
         </p:nvSpPr>
-        <p:spPr>
+        <p:spPr bwMode="auto">
           <a:xfrm>
             <a:off x="3575050" y="273050"/>
             <a:ext cx="5111750" cy="5853113"/>
@@ -2141,37 +4178,51 @@
             </a:lvl9pPr>
           </a:lstStyle>
           <a:p>
-            <a:pPr lvl="0"/>
-            <a:r>
-              <a:rPr lang="en-US" smtClean="0"/>
+            <a:pPr lvl="0">
+              <a:defRPr/>
+            </a:pPr>
+            <a:r>
+              <a:rPr lang="en-US"/>
               <a:t>Click to edit Master text styles</a:t>
             </a:r>
-          </a:p>
-          <a:p>
-            <a:pPr lvl="1"/>
-            <a:r>
-              <a:rPr lang="en-US" smtClean="0"/>
+            <a:endParaRPr/>
+          </a:p>
+          <a:p>
+            <a:pPr lvl="1">
+              <a:defRPr/>
+            </a:pPr>
+            <a:r>
+              <a:rPr lang="en-US"/>
               <a:t>Second level</a:t>
             </a:r>
-          </a:p>
-          <a:p>
-            <a:pPr lvl="2"/>
-            <a:r>
-              <a:rPr lang="en-US" smtClean="0"/>
+            <a:endParaRPr/>
+          </a:p>
+          <a:p>
+            <a:pPr lvl="2">
+              <a:defRPr/>
+            </a:pPr>
+            <a:r>
+              <a:rPr lang="en-US"/>
               <a:t>Third level</a:t>
             </a:r>
-          </a:p>
-          <a:p>
-            <a:pPr lvl="3"/>
-            <a:r>
-              <a:rPr lang="en-US" smtClean="0"/>
+            <a:endParaRPr/>
+          </a:p>
+          <a:p>
+            <a:pPr lvl="3">
+              <a:defRPr/>
+            </a:pPr>
+            <a:r>
+              <a:rPr lang="en-US"/>
               <a:t>Fourth level</a:t>
             </a:r>
-          </a:p>
-          <a:p>
-            <a:pPr lvl="4"/>
-            <a:r>
-              <a:rPr lang="en-US" smtClean="0"/>
+            <a:endParaRPr/>
+          </a:p>
+          <a:p>
+            <a:pPr lvl="4">
+              <a:defRPr/>
+            </a:pPr>
+            <a:r>
+              <a:rPr lang="en-US"/>
               <a:t>Fifth level</a:t>
             </a:r>
             <a:endParaRPr lang="en-US"/>
@@ -2180,7 +4231,7 @@
       </p:sp>
       <p:sp>
         <p:nvSpPr>
-          <p:cNvPr id="4" name="Text Placeholder 3"/>
+          <p:cNvPr id="1227122335" name="Text Placeholder 3"/>
           <p:cNvSpPr>
             <a:spLocks noGrp="1"/>
           </p:cNvSpPr>
@@ -2188,7 +4239,7 @@
             <p:ph type="body" sz="half" idx="2"/>
           </p:nvPr>
         </p:nvSpPr>
-        <p:spPr>
+        <p:spPr bwMode="auto">
           <a:xfrm>
             <a:off x="457200" y="1435100"/>
             <a:ext cx="3008313" cy="4691063"/>
@@ -2235,17 +4286,20 @@
             </a:lvl9pPr>
           </a:lstStyle>
           <a:p>
-            <a:pPr lvl="0"/>
-            <a:r>
-              <a:rPr lang="en-US" smtClean="0"/>
+            <a:pPr lvl="0">
+              <a:defRPr/>
+            </a:pPr>
+            <a:r>
+              <a:rPr lang="en-US"/>
               <a:t>Click to edit Master text styles</a:t>
             </a:r>
-          </a:p>
-        </p:txBody>
-      </p:sp>
-      <p:sp>
-        <p:nvSpPr>
-          <p:cNvPr id="5" name="Date Placeholder 4"/>
+            <a:endParaRPr/>
+          </a:p>
+        </p:txBody>
+      </p:sp>
+      <p:sp>
+        <p:nvSpPr>
+          <p:cNvPr id="1407265041" name="Date Placeholder 4"/>
           <p:cNvSpPr>
             <a:spLocks noGrp="1"/>
           </p:cNvSpPr>
@@ -2253,14 +4307,16 @@
             <p:ph type="dt" sz="half" idx="10"/>
           </p:nvPr>
         </p:nvSpPr>
-        <p:spPr/>
-        <p:txBody>
-          <a:bodyPr/>
-          <a:lstStyle/>
-          <a:p>
+        <p:spPr bwMode="auto"/>
+        <p:txBody>
+          <a:bodyPr/>
+          <a:lstStyle/>
+          <a:p>
+            <a:pPr>
+              <a:defRPr/>
+            </a:pPr>
             <a:fld id="{1D8BD707-D9CF-40AE-B4C6-C98DA3205C09}" type="datetimeFigureOut">
-              <a:rPr lang="en-US" smtClean="0"/>
-              <a:pPr/>
+              <a:rPr lang="en-US"/>
               <a:t>3/8/2026</a:t>
             </a:fld>
             <a:endParaRPr lang="en-US"/>
@@ -2269,7 +4325,7 @@
       </p:sp>
       <p:sp>
         <p:nvSpPr>
-          <p:cNvPr id="6" name="Footer Placeholder 5"/>
+          <p:cNvPr id="2026528972" name="Footer Placeholder 5"/>
           <p:cNvSpPr>
             <a:spLocks noGrp="1"/>
           </p:cNvSpPr>
@@ -2277,18 +4333,21 @@
             <p:ph type="ftr" sz="quarter" idx="11"/>
           </p:nvPr>
         </p:nvSpPr>
-        <p:spPr/>
-        <p:txBody>
-          <a:bodyPr/>
-          <a:lstStyle/>
-          <a:p>
+        <p:spPr bwMode="auto"/>
+        <p:txBody>
+          <a:bodyPr/>
+          <a:lstStyle/>
+          <a:p>
+            <a:pPr>
+              <a:defRPr/>
+            </a:pPr>
             <a:endParaRPr lang="en-US"/>
           </a:p>
         </p:txBody>
       </p:sp>
       <p:sp>
         <p:nvSpPr>
-          <p:cNvPr id="7" name="Slide Number Placeholder 6"/>
+          <p:cNvPr id="1171943759" name="Slide Number Placeholder 6"/>
           <p:cNvSpPr>
             <a:spLocks noGrp="1"/>
           </p:cNvSpPr>
@@ -2296,14 +4355,16 @@
             <p:ph type="sldNum" sz="quarter" idx="12"/>
           </p:nvPr>
         </p:nvSpPr>
-        <p:spPr/>
-        <p:txBody>
-          <a:bodyPr/>
-          <a:lstStyle/>
-          <a:p>
+        <p:spPr bwMode="auto"/>
+        <p:txBody>
+          <a:bodyPr/>
+          <a:lstStyle/>
+          <a:p>
+            <a:pPr>
+              <a:defRPr/>
+            </a:pPr>
             <a:fld id="{B6F15528-21DE-4FAA-801E-634DDDAF4B2B}" type="slidenum">
-              <a:rPr lang="en-US" smtClean="0"/>
-              <a:pPr/>
+              <a:rPr lang="en-US"/>
               <a:t>‹#›</a:t>
             </a:fld>
             <a:endParaRPr lang="en-US"/>
@@ -2319,7 +4380,7 @@
 </file>
 
 <file path=ppt/slideLayouts/slideLayout9.xml><?xml version="1.0" encoding="utf-8"?>
-<p:sldLayout xmlns:a="http://schemas.openxmlformats.org/drawingml/2006/main" xmlns:r="http://schemas.openxmlformats.org/officeDocument/2006/relationships" xmlns:p="http://schemas.openxmlformats.org/presentationml/2006/main" type="picTx" preserve="1">
+<p:sldLayout xmlns:a="http://schemas.openxmlformats.org/drawingml/2006/main" xmlns:r="http://schemas.openxmlformats.org/officeDocument/2006/relationships" xmlns:p="http://schemas.openxmlformats.org/presentationml/2006/main" xmlns:m="http://schemas.openxmlformats.org/officeDocument/2006/math" xmlns:w="http://schemas.openxmlformats.org/wordprocessingml/2006/main" matchingName="" preserve="1" showMasterPhAnim="0" showMasterSp="1" type="picTx" userDrawn="1">
   <p:cSld name="Picture with Caption">
     <p:spTree>
       <p:nvGrpSpPr>
@@ -2327,7 +4388,7 @@
         <p:cNvGrpSpPr/>
         <p:nvPr/>
       </p:nvGrpSpPr>
-      <p:grpSpPr>
+      <p:grpSpPr bwMode="auto">
         <a:xfrm>
           <a:off x="0" y="0"/>
           <a:ext cx="0" cy="0"/>
@@ -2337,7 +4398,7 @@
       </p:grpSpPr>
       <p:sp>
         <p:nvSpPr>
-          <p:cNvPr id="2" name="Title 1"/>
+          <p:cNvPr id="2130067489" name="Title 1"/>
           <p:cNvSpPr>
             <a:spLocks noGrp="1"/>
           </p:cNvSpPr>
@@ -2345,7 +4406,7 @@
             <p:ph type="title"/>
           </p:nvPr>
         </p:nvSpPr>
-        <p:spPr>
+        <p:spPr bwMode="auto">
           <a:xfrm>
             <a:off x="1792288" y="4800600"/>
             <a:ext cx="5486400" cy="566738"/>
@@ -2359,8 +4420,11 @@
             </a:lvl1pPr>
           </a:lstStyle>
           <a:p>
-            <a:r>
-              <a:rPr lang="en-US" smtClean="0"/>
+            <a:pPr>
+              <a:defRPr/>
+            </a:pPr>
+            <a:r>
+              <a:rPr lang="en-US"/>
               <a:t>Click to edit Master title style</a:t>
             </a:r>
             <a:endParaRPr lang="en-US"/>
@@ -2369,7 +4433,7 @@
       </p:sp>
       <p:sp>
         <p:nvSpPr>
-          <p:cNvPr id="3" name="Picture Placeholder 2"/>
+          <p:cNvPr id="1497221731" name="Picture Placeholder 2"/>
           <p:cNvSpPr>
             <a:spLocks noGrp="1"/>
           </p:cNvSpPr>
@@ -2377,7 +4441,7 @@
             <p:ph type="pic" idx="1"/>
           </p:nvPr>
         </p:nvSpPr>
-        <p:spPr>
+        <p:spPr bwMode="auto">
           <a:xfrm>
             <a:off x="1792288" y="612775"/>
             <a:ext cx="5486400" cy="4114800"/>
@@ -2424,13 +4488,16 @@
             </a:lvl9pPr>
           </a:lstStyle>
           <a:p>
+            <a:pPr>
+              <a:defRPr/>
+            </a:pPr>
             <a:endParaRPr lang="en-US"/>
           </a:p>
         </p:txBody>
       </p:sp>
       <p:sp>
         <p:nvSpPr>
-          <p:cNvPr id="4" name="Text Placeholder 3"/>
+          <p:cNvPr id="607194115" name="Text Placeholder 3"/>
           <p:cNvSpPr>
             <a:spLocks noGrp="1"/>
           </p:cNvSpPr>
@@ -2438,7 +4505,7 @@
             <p:ph type="body" sz="half" idx="2"/>
           </p:nvPr>
         </p:nvSpPr>
-        <p:spPr>
+        <p:spPr bwMode="auto">
           <a:xfrm>
             <a:off x="1792288" y="5367338"/>
             <a:ext cx="5486400" cy="804862"/>
@@ -2485,17 +4552,20 @@
             </a:lvl9pPr>
           </a:lstStyle>
           <a:p>
-            <a:pPr lvl="0"/>
-            <a:r>
-              <a:rPr lang="en-US" smtClean="0"/>
+            <a:pPr lvl="0">
+              <a:defRPr/>
+            </a:pPr>
+            <a:r>
+              <a:rPr lang="en-US"/>
               <a:t>Click to edit Master text styles</a:t>
             </a:r>
-          </a:p>
-        </p:txBody>
-      </p:sp>
-      <p:sp>
-        <p:nvSpPr>
-          <p:cNvPr id="5" name="Date Placeholder 4"/>
+            <a:endParaRPr/>
+          </a:p>
+        </p:txBody>
+      </p:sp>
+      <p:sp>
+        <p:nvSpPr>
+          <p:cNvPr id="1196954311" name="Date Placeholder 4"/>
           <p:cNvSpPr>
             <a:spLocks noGrp="1"/>
           </p:cNvSpPr>
@@ -2503,14 +4573,16 @@
             <p:ph type="dt" sz="half" idx="10"/>
           </p:nvPr>
         </p:nvSpPr>
-        <p:spPr/>
-        <p:txBody>
-          <a:bodyPr/>
-          <a:lstStyle/>
-          <a:p>
+        <p:spPr bwMode="auto"/>
+        <p:txBody>
+          <a:bodyPr/>
+          <a:lstStyle/>
+          <a:p>
+            <a:pPr>
+              <a:defRPr/>
+            </a:pPr>
             <a:fld id="{1D8BD707-D9CF-40AE-B4C6-C98DA3205C09}" type="datetimeFigureOut">
-              <a:rPr lang="en-US" smtClean="0"/>
-              <a:pPr/>
+              <a:rPr lang="en-US"/>
               <a:t>3/8/2026</a:t>
             </a:fld>
             <a:endParaRPr lang="en-US"/>
@@ -2519,7 +4591,7 @@
       </p:sp>
       <p:sp>
         <p:nvSpPr>
-          <p:cNvPr id="6" name="Footer Placeholder 5"/>
+          <p:cNvPr id="1189913638" name="Footer Placeholder 5"/>
           <p:cNvSpPr>
             <a:spLocks noGrp="1"/>
           </p:cNvSpPr>
@@ -2527,18 +4599,21 @@
             <p:ph type="ftr" sz="quarter" idx="11"/>
           </p:nvPr>
         </p:nvSpPr>
-        <p:spPr/>
-        <p:txBody>
-          <a:bodyPr/>
-          <a:lstStyle/>
-          <a:p>
+        <p:spPr bwMode="auto"/>
+        <p:txBody>
+          <a:bodyPr/>
+          <a:lstStyle/>
+          <a:p>
+            <a:pPr>
+              <a:defRPr/>
+            </a:pPr>
             <a:endParaRPr lang="en-US"/>
           </a:p>
         </p:txBody>
       </p:sp>
       <p:sp>
         <p:nvSpPr>
-          <p:cNvPr id="7" name="Slide Number Placeholder 6"/>
+          <p:cNvPr id="1559070583" name="Slide Number Placeholder 6"/>
           <p:cNvSpPr>
             <a:spLocks noGrp="1"/>
           </p:cNvSpPr>
@@ -2546,14 +4621,16 @@
             <p:ph type="sldNum" sz="quarter" idx="12"/>
           </p:nvPr>
         </p:nvSpPr>
-        <p:spPr/>
-        <p:txBody>
-          <a:bodyPr/>
-          <a:lstStyle/>
-          <a:p>
+        <p:spPr bwMode="auto"/>
+        <p:txBody>
+          <a:bodyPr/>
+          <a:lstStyle/>
+          <a:p>
+            <a:pPr>
+              <a:defRPr/>
+            </a:pPr>
             <a:fld id="{B6F15528-21DE-4FAA-801E-634DDDAF4B2B}" type="slidenum">
-              <a:rPr lang="en-US" smtClean="0"/>
-              <a:pPr/>
+              <a:rPr lang="en-US"/>
               <a:t>‹#›</a:t>
             </a:fld>
             <a:endParaRPr lang="en-US"/>
@@ -2569,8 +4646,8 @@
 </file>
 
 <file path=ppt/slideMasters/slideMaster1.xml><?xml version="1.0" encoding="utf-8"?>
-<p:sldMaster xmlns:a="http://schemas.openxmlformats.org/drawingml/2006/main" xmlns:r="http://schemas.openxmlformats.org/officeDocument/2006/relationships" xmlns:p="http://schemas.openxmlformats.org/presentationml/2006/main">
-  <p:cSld>
+<p:sldMaster xmlns:a="http://schemas.openxmlformats.org/drawingml/2006/main" xmlns:r="http://schemas.openxmlformats.org/officeDocument/2006/relationships" xmlns:p="http://schemas.openxmlformats.org/presentationml/2006/main" xmlns:m="http://schemas.openxmlformats.org/officeDocument/2006/math" xmlns:w="http://schemas.openxmlformats.org/wordprocessingml/2006/main" preserve="0">
+  <p:cSld name="">
     <p:bg>
       <p:bgRef idx="1001">
         <a:schemeClr val="bg1"/>
@@ -2582,7 +4659,7 @@
         <p:cNvGrpSpPr/>
         <p:nvPr/>
       </p:nvGrpSpPr>
-      <p:grpSpPr>
+      <p:grpSpPr bwMode="auto">
         <a:xfrm>
           <a:off x="0" y="0"/>
           <a:ext cx="0" cy="0"/>
@@ -2592,7 +4669,7 @@
       </p:grpSpPr>
       <p:sp>
         <p:nvSpPr>
-          <p:cNvPr id="2" name="Title Placeholder 1"/>
+          <p:cNvPr id="1839451128" name="Title Placeholder 1"/>
           <p:cNvSpPr>
             <a:spLocks noGrp="1"/>
           </p:cNvSpPr>
@@ -2600,7 +4677,7 @@
             <p:ph type="title"/>
           </p:nvPr>
         </p:nvSpPr>
-        <p:spPr>
+        <p:spPr bwMode="auto">
           <a:xfrm>
             <a:off x="457200" y="274638"/>
             <a:ext cx="8229600" cy="1143000"/>
@@ -2615,8 +4692,11 @@
           </a:bodyPr>
           <a:lstStyle/>
           <a:p>
-            <a:r>
-              <a:rPr lang="en-US" smtClean="0"/>
+            <a:pPr>
+              <a:defRPr/>
+            </a:pPr>
+            <a:r>
+              <a:rPr lang="en-US"/>
               <a:t>Click to edit Master title style</a:t>
             </a:r>
             <a:endParaRPr lang="en-US"/>
@@ -2625,7 +4705,7 @@
       </p:sp>
       <p:sp>
         <p:nvSpPr>
-          <p:cNvPr id="3" name="Text Placeholder 2"/>
+          <p:cNvPr id="1258745045" name="Text Placeholder 2"/>
           <p:cNvSpPr>
             <a:spLocks noGrp="1"/>
           </p:cNvSpPr>
@@ -2633,7 +4713,7 @@
             <p:ph type="body" idx="1"/>
           </p:nvPr>
         </p:nvSpPr>
-        <p:spPr>
+        <p:spPr bwMode="auto">
           <a:xfrm>
             <a:off x="457200" y="1600200"/>
             <a:ext cx="8229600" cy="4525963"/>
@@ -2648,37 +4728,51 @@
           </a:bodyPr>
           <a:lstStyle/>
           <a:p>
-            <a:pPr lvl="0"/>
-            <a:r>
-              <a:rPr lang="en-US" smtClean="0"/>
+            <a:pPr lvl="0">
+              <a:defRPr/>
+            </a:pPr>
+            <a:r>
+              <a:rPr lang="en-US"/>
               <a:t>Click to edit Master text styles</a:t>
             </a:r>
-          </a:p>
-          <a:p>
-            <a:pPr lvl="1"/>
-            <a:r>
-              <a:rPr lang="en-US" smtClean="0"/>
+            <a:endParaRPr/>
+          </a:p>
+          <a:p>
+            <a:pPr lvl="1">
+              <a:defRPr/>
+            </a:pPr>
+            <a:r>
+              <a:rPr lang="en-US"/>
               <a:t>Second level</a:t>
             </a:r>
-          </a:p>
-          <a:p>
-            <a:pPr lvl="2"/>
-            <a:r>
-              <a:rPr lang="en-US" smtClean="0"/>
+            <a:endParaRPr/>
+          </a:p>
+          <a:p>
+            <a:pPr lvl="2">
+              <a:defRPr/>
+            </a:pPr>
+            <a:r>
+              <a:rPr lang="en-US"/>
               <a:t>Third level</a:t>
             </a:r>
-          </a:p>
-          <a:p>
-            <a:pPr lvl="3"/>
-            <a:r>
-              <a:rPr lang="en-US" smtClean="0"/>
+            <a:endParaRPr/>
+          </a:p>
+          <a:p>
+            <a:pPr lvl="3">
+              <a:defRPr/>
+            </a:pPr>
+            <a:r>
+              <a:rPr lang="en-US"/>
               <a:t>Fourth level</a:t>
             </a:r>
-          </a:p>
-          <a:p>
-            <a:pPr lvl="4"/>
-            <a:r>
-              <a:rPr lang="en-US" smtClean="0"/>
+            <a:endParaRPr/>
+          </a:p>
+          <a:p>
+            <a:pPr lvl="4">
+              <a:defRPr/>
+            </a:pPr>
+            <a:r>
+              <a:rPr lang="en-US"/>
               <a:t>Fifth level</a:t>
             </a:r>
             <a:endParaRPr lang="en-US"/>
@@ -2687,7 +4781,7 @@
       </p:sp>
       <p:sp>
         <p:nvSpPr>
-          <p:cNvPr id="4" name="Date Placeholder 3"/>
+          <p:cNvPr id="1057759937" name="Date Placeholder 3"/>
           <p:cNvSpPr>
             <a:spLocks noGrp="1"/>
           </p:cNvSpPr>
@@ -2695,7 +4789,7 @@
             <p:ph type="dt" sz="half" idx="2"/>
           </p:nvPr>
         </p:nvSpPr>
-        <p:spPr>
+        <p:spPr bwMode="auto">
           <a:xfrm>
             <a:off x="457200" y="6356350"/>
             <a:ext cx="2133600" cy="365125"/>
@@ -2718,9 +4812,11 @@
             </a:lvl1pPr>
           </a:lstStyle>
           <a:p>
+            <a:pPr>
+              <a:defRPr/>
+            </a:pPr>
             <a:fld id="{1D8BD707-D9CF-40AE-B4C6-C98DA3205C09}" type="datetimeFigureOut">
-              <a:rPr lang="en-US" smtClean="0"/>
-              <a:pPr/>
+              <a:rPr lang="en-US"/>
               <a:t>3/8/2026</a:t>
             </a:fld>
             <a:endParaRPr lang="en-US"/>
@@ -2729,7 +4825,7 @@
       </p:sp>
       <p:sp>
         <p:nvSpPr>
-          <p:cNvPr id="5" name="Footer Placeholder 4"/>
+          <p:cNvPr id="1922213680" name="Footer Placeholder 4"/>
           <p:cNvSpPr>
             <a:spLocks noGrp="1"/>
           </p:cNvSpPr>
@@ -2737,7 +4833,7 @@
             <p:ph type="ftr" sz="quarter" idx="3"/>
           </p:nvPr>
         </p:nvSpPr>
-        <p:spPr>
+        <p:spPr bwMode="auto">
           <a:xfrm>
             <a:off x="3124200" y="6356350"/>
             <a:ext cx="2895600" cy="365125"/>
@@ -2760,13 +4856,16 @@
             </a:lvl1pPr>
           </a:lstStyle>
           <a:p>
+            <a:pPr>
+              <a:defRPr/>
+            </a:pPr>
             <a:endParaRPr lang="en-US"/>
           </a:p>
         </p:txBody>
       </p:sp>
       <p:sp>
         <p:nvSpPr>
-          <p:cNvPr id="6" name="Slide Number Placeholder 5"/>
+          <p:cNvPr id="1791813922" name="Slide Number Placeholder 5"/>
           <p:cNvSpPr>
             <a:spLocks noGrp="1"/>
           </p:cNvSpPr>
@@ -2774,7 +4873,7 @@
             <p:ph type="sldNum" sz="quarter" idx="4"/>
           </p:nvPr>
         </p:nvSpPr>
-        <p:spPr>
+        <p:spPr bwMode="auto">
           <a:xfrm>
             <a:off x="6553200" y="6356350"/>
             <a:ext cx="2133600" cy="365125"/>
@@ -2797,9 +4896,11 @@
             </a:lvl1pPr>
           </a:lstStyle>
           <a:p>
+            <a:pPr>
+              <a:defRPr/>
+            </a:pPr>
             <a:fld id="{B6F15528-21DE-4FAA-801E-634DDDAF4B2B}" type="slidenum">
-              <a:rPr lang="en-US" smtClean="0"/>
-              <a:pPr/>
+              <a:rPr lang="en-US"/>
               <a:t>‹#›</a:t>
             </a:fld>
             <a:endParaRPr lang="en-US"/>
@@ -2824,12 +4925,12 @@
   </p:sldLayoutIdLst>
   <p:txStyles>
     <p:titleStyle>
-      <a:lvl1pPr algn="ctr" defTabSz="914400" rtl="0" eaLnBrk="1" latinLnBrk="0" hangingPunct="1">
+      <a:lvl1pPr algn="ctr" defTabSz="914400" rtl="0">
         <a:spcBef>
-          <a:spcPct val="0"/>
+          <a:spcPts val="0"/>
         </a:spcBef>
         <a:buNone/>
-        <a:defRPr sz="4400" kern="1200">
+        <a:defRPr sz="4400">
           <a:solidFill>
             <a:schemeClr val="tx1"/>
           </a:solidFill>
@@ -2840,13 +4941,13 @@
       </a:lvl1pPr>
     </p:titleStyle>
     <p:bodyStyle>
-      <a:lvl1pPr marL="342900" indent="-342900" algn="l" defTabSz="914400" rtl="0" eaLnBrk="1" latinLnBrk="0" hangingPunct="1">
+      <a:lvl1pPr marL="342900" indent="-342900" algn="l" defTabSz="914400" rtl="0">
         <a:spcBef>
-          <a:spcPct val="20000"/>
+          <a:spcPts val="0"/>
         </a:spcBef>
-        <a:buFont typeface="Arial" pitchFamily="34" charset="0"/>
+        <a:buFont typeface="Arial"/>
         <a:buChar char="•"/>
-        <a:defRPr sz="3200" kern="1200">
+        <a:defRPr sz="3200">
           <a:solidFill>
             <a:schemeClr val="tx1"/>
           </a:solidFill>
@@ -2855,13 +4956,13 @@
           <a:cs typeface="+mn-cs"/>
         </a:defRPr>
       </a:lvl1pPr>
-      <a:lvl2pPr marL="742950" indent="-285750" algn="l" defTabSz="914400" rtl="0" eaLnBrk="1" latinLnBrk="0" hangingPunct="1">
+      <a:lvl2pPr marL="742950" indent="-285750" algn="l" defTabSz="914400" rtl="0">
         <a:spcBef>
-          <a:spcPct val="20000"/>
+          <a:spcPts val="0"/>
         </a:spcBef>
-        <a:buFont typeface="Arial" pitchFamily="34" charset="0"/>
+        <a:buFont typeface="Arial"/>
         <a:buChar char="–"/>
-        <a:defRPr sz="2800" kern="1200">
+        <a:defRPr sz="2800">
           <a:solidFill>
             <a:schemeClr val="tx1"/>
           </a:solidFill>
@@ -2870,13 +4971,13 @@
           <a:cs typeface="+mn-cs"/>
         </a:defRPr>
       </a:lvl2pPr>
-      <a:lvl3pPr marL="1143000" indent="-228600" algn="l" defTabSz="914400" rtl="0" eaLnBrk="1" latinLnBrk="0" hangingPunct="1">
+      <a:lvl3pPr marL="1143000" indent="-228600" algn="l" defTabSz="914400" rtl="0">
         <a:spcBef>
-          <a:spcPct val="20000"/>
+          <a:spcPts val="0"/>
         </a:spcBef>
-        <a:buFont typeface="Arial" pitchFamily="34" charset="0"/>
+        <a:buFont typeface="Arial"/>
         <a:buChar char="•"/>
-        <a:defRPr sz="2400" kern="1200">
+        <a:defRPr sz="2400">
           <a:solidFill>
             <a:schemeClr val="tx1"/>
           </a:solidFill>
@@ -2885,13 +4986,13 @@
           <a:cs typeface="+mn-cs"/>
         </a:defRPr>
       </a:lvl3pPr>
-      <a:lvl4pPr marL="1600200" indent="-228600" algn="l" defTabSz="914400" rtl="0" eaLnBrk="1" latinLnBrk="0" hangingPunct="1">
+      <a:lvl4pPr marL="1600200" indent="-228600" algn="l" defTabSz="914400" rtl="0">
         <a:spcBef>
-          <a:spcPct val="20000"/>
+          <a:spcPts val="0"/>
         </a:spcBef>
-        <a:buFont typeface="Arial" pitchFamily="34" charset="0"/>
+        <a:buFont typeface="Arial"/>
         <a:buChar char="–"/>
-        <a:defRPr sz="2000" kern="1200">
+        <a:defRPr sz="2000">
           <a:solidFill>
             <a:schemeClr val="tx1"/>
           </a:solidFill>
@@ -2900,13 +5001,13 @@
           <a:cs typeface="+mn-cs"/>
         </a:defRPr>
       </a:lvl4pPr>
-      <a:lvl5pPr marL="2057400" indent="-228600" algn="l" defTabSz="914400" rtl="0" eaLnBrk="1" latinLnBrk="0" hangingPunct="1">
+      <a:lvl5pPr marL="2057400" indent="-228600" algn="l" defTabSz="914400" rtl="0">
         <a:spcBef>
-          <a:spcPct val="20000"/>
+          <a:spcPts val="0"/>
         </a:spcBef>
-        <a:buFont typeface="Arial" pitchFamily="34" charset="0"/>
+        <a:buFont typeface="Arial"/>
         <a:buChar char="»"/>
-        <a:defRPr sz="2000" kern="1200">
+        <a:defRPr sz="2000">
           <a:solidFill>
             <a:schemeClr val="tx1"/>
           </a:solidFill>
@@ -2915,13 +5016,13 @@
           <a:cs typeface="+mn-cs"/>
         </a:defRPr>
       </a:lvl5pPr>
-      <a:lvl6pPr marL="2514600" indent="-228600" algn="l" defTabSz="914400" rtl="0" eaLnBrk="1" latinLnBrk="0" hangingPunct="1">
+      <a:lvl6pPr marL="2514600" indent="-228600" algn="l" defTabSz="914400" rtl="0">
         <a:spcBef>
-          <a:spcPct val="20000"/>
+          <a:spcPts val="0"/>
         </a:spcBef>
-        <a:buFont typeface="Arial" pitchFamily="34" charset="0"/>
+        <a:buFont typeface="Arial"/>
         <a:buChar char="•"/>
-        <a:defRPr sz="2000" kern="1200">
+        <a:defRPr sz="2000">
           <a:solidFill>
             <a:schemeClr val="tx1"/>
           </a:solidFill>
@@ -2930,13 +5031,13 @@
           <a:cs typeface="+mn-cs"/>
         </a:defRPr>
       </a:lvl6pPr>
-      <a:lvl7pPr marL="2971800" indent="-228600" algn="l" defTabSz="914400" rtl="0" eaLnBrk="1" latinLnBrk="0" hangingPunct="1">
+      <a:lvl7pPr marL="2971800" indent="-228600" algn="l" defTabSz="914400" rtl="0">
         <a:spcBef>
-          <a:spcPct val="20000"/>
+          <a:spcPts val="0"/>
         </a:spcBef>
-        <a:buFont typeface="Arial" pitchFamily="34" charset="0"/>
+        <a:buFont typeface="Arial"/>
         <a:buChar char="•"/>
-        <a:defRPr sz="2000" kern="1200">
+        <a:defRPr sz="2000">
           <a:solidFill>
             <a:schemeClr val="tx1"/>
           </a:solidFill>
@@ -2945,13 +5046,13 @@
           <a:cs typeface="+mn-cs"/>
         </a:defRPr>
       </a:lvl7pPr>
-      <a:lvl8pPr marL="3429000" indent="-228600" algn="l" defTabSz="914400" rtl="0" eaLnBrk="1" latinLnBrk="0" hangingPunct="1">
+      <a:lvl8pPr marL="3429000" indent="-228600" algn="l" defTabSz="914400" rtl="0">
         <a:spcBef>
-          <a:spcPct val="20000"/>
+          <a:spcPts val="0"/>
         </a:spcBef>
-        <a:buFont typeface="Arial" pitchFamily="34" charset="0"/>
+        <a:buFont typeface="Arial"/>
         <a:buChar char="•"/>
-        <a:defRPr sz="2000" kern="1200">
+        <a:defRPr sz="2000">
           <a:solidFill>
             <a:schemeClr val="tx1"/>
           </a:solidFill>
@@ -2960,13 +5061,13 @@
           <a:cs typeface="+mn-cs"/>
         </a:defRPr>
       </a:lvl8pPr>
-      <a:lvl9pPr marL="3886200" indent="-228600" algn="l" defTabSz="914400" rtl="0" eaLnBrk="1" latinLnBrk="0" hangingPunct="1">
+      <a:lvl9pPr marL="3886200" indent="-228600" algn="l" defTabSz="914400" rtl="0">
         <a:spcBef>
-          <a:spcPct val="20000"/>
+          <a:spcPts val="0"/>
         </a:spcBef>
-        <a:buFont typeface="Arial" pitchFamily="34" charset="0"/>
+        <a:buFont typeface="Arial"/>
         <a:buChar char="•"/>
-        <a:defRPr sz="2000" kern="1200">
+        <a:defRPr sz="2000">
           <a:solidFill>
             <a:schemeClr val="tx1"/>
           </a:solidFill>
@@ -2980,8 +5081,8 @@
       <a:defPPr>
         <a:defRPr lang="en-US"/>
       </a:defPPr>
-      <a:lvl1pPr marL="0" algn="l" defTabSz="914400" rtl="0" eaLnBrk="1" latinLnBrk="0" hangingPunct="1">
-        <a:defRPr sz="1800" kern="1200">
+      <a:lvl1pPr marL="0" algn="l" defTabSz="914400" rtl="0">
+        <a:defRPr sz="1800">
           <a:solidFill>
             <a:schemeClr val="tx1"/>
           </a:solidFill>
@@ -2990,8 +5091,8 @@
           <a:cs typeface="+mn-cs"/>
         </a:defRPr>
       </a:lvl1pPr>
-      <a:lvl2pPr marL="457200" algn="l" defTabSz="914400" rtl="0" eaLnBrk="1" latinLnBrk="0" hangingPunct="1">
-        <a:defRPr sz="1800" kern="1200">
+      <a:lvl2pPr marL="457200" algn="l" defTabSz="914400" rtl="0">
+        <a:defRPr sz="1800">
           <a:solidFill>
             <a:schemeClr val="tx1"/>
           </a:solidFill>
@@ -3000,8 +5101,8 @@
           <a:cs typeface="+mn-cs"/>
         </a:defRPr>
       </a:lvl2pPr>
-      <a:lvl3pPr marL="914400" algn="l" defTabSz="914400" rtl="0" eaLnBrk="1" latinLnBrk="0" hangingPunct="1">
-        <a:defRPr sz="1800" kern="1200">
+      <a:lvl3pPr marL="914400" algn="l" defTabSz="914400" rtl="0">
+        <a:defRPr sz="1800">
           <a:solidFill>
             <a:schemeClr val="tx1"/>
           </a:solidFill>
@@ -3010,8 +5111,8 @@
           <a:cs typeface="+mn-cs"/>
         </a:defRPr>
       </a:lvl3pPr>
-      <a:lvl4pPr marL="1371600" algn="l" defTabSz="914400" rtl="0" eaLnBrk="1" latinLnBrk="0" hangingPunct="1">
-        <a:defRPr sz="1800" kern="1200">
+      <a:lvl4pPr marL="1371600" algn="l" defTabSz="914400" rtl="0">
+        <a:defRPr sz="1800">
           <a:solidFill>
             <a:schemeClr val="tx1"/>
           </a:solidFill>
@@ -3020,8 +5121,8 @@
           <a:cs typeface="+mn-cs"/>
         </a:defRPr>
       </a:lvl4pPr>
-      <a:lvl5pPr marL="1828800" algn="l" defTabSz="914400" rtl="0" eaLnBrk="1" latinLnBrk="0" hangingPunct="1">
-        <a:defRPr sz="1800" kern="1200">
+      <a:lvl5pPr marL="1828800" algn="l" defTabSz="914400" rtl="0">
+        <a:defRPr sz="1800">
           <a:solidFill>
             <a:schemeClr val="tx1"/>
           </a:solidFill>
@@ -3030,8 +5131,8 @@
           <a:cs typeface="+mn-cs"/>
         </a:defRPr>
       </a:lvl5pPr>
-      <a:lvl6pPr marL="2286000" algn="l" defTabSz="914400" rtl="0" eaLnBrk="1" latinLnBrk="0" hangingPunct="1">
-        <a:defRPr sz="1800" kern="1200">
+      <a:lvl6pPr marL="2286000" algn="l" defTabSz="914400" rtl="0">
+        <a:defRPr sz="1800">
           <a:solidFill>
             <a:schemeClr val="tx1"/>
           </a:solidFill>
@@ -3040,8 +5141,8 @@
           <a:cs typeface="+mn-cs"/>
         </a:defRPr>
       </a:lvl6pPr>
-      <a:lvl7pPr marL="2743200" algn="l" defTabSz="914400" rtl="0" eaLnBrk="1" latinLnBrk="0" hangingPunct="1">
-        <a:defRPr sz="1800" kern="1200">
+      <a:lvl7pPr marL="2743200" algn="l" defTabSz="914400" rtl="0">
+        <a:defRPr sz="1800">
           <a:solidFill>
             <a:schemeClr val="tx1"/>
           </a:solidFill>
@@ -3050,8 +5151,8 @@
           <a:cs typeface="+mn-cs"/>
         </a:defRPr>
       </a:lvl7pPr>
-      <a:lvl8pPr marL="3200400" algn="l" defTabSz="914400" rtl="0" eaLnBrk="1" latinLnBrk="0" hangingPunct="1">
-        <a:defRPr sz="1800" kern="1200">
+      <a:lvl8pPr marL="3200400" algn="l" defTabSz="914400" rtl="0">
+        <a:defRPr sz="1800">
           <a:solidFill>
             <a:schemeClr val="tx1"/>
           </a:solidFill>
@@ -3060,8 +5161,8 @@
           <a:cs typeface="+mn-cs"/>
         </a:defRPr>
       </a:lvl8pPr>
-      <a:lvl9pPr marL="3657600" algn="l" defTabSz="914400" rtl="0" eaLnBrk="1" latinLnBrk="0" hangingPunct="1">
-        <a:defRPr sz="1800" kern="1200">
+      <a:lvl9pPr marL="3657600" algn="l" defTabSz="914400" rtl="0">
+        <a:defRPr sz="1800">
           <a:solidFill>
             <a:schemeClr val="tx1"/>
           </a:solidFill>
@@ -3076,15 +5177,15 @@
 </file>
 
 <file path=ppt/slides/slide1.xml><?xml version="1.0" encoding="utf-8"?>
-<p:sld xmlns:a="http://schemas.openxmlformats.org/drawingml/2006/main" xmlns:r="http://schemas.openxmlformats.org/officeDocument/2006/relationships" xmlns:p="http://schemas.openxmlformats.org/presentationml/2006/main">
-  <p:cSld>
+<p:sld xmlns:a="http://schemas.openxmlformats.org/drawingml/2006/main" xmlns:r="http://schemas.openxmlformats.org/officeDocument/2006/relationships" xmlns:p="http://schemas.openxmlformats.org/presentationml/2006/main" xmlns:m="http://schemas.openxmlformats.org/officeDocument/2006/math" xmlns:w="http://schemas.openxmlformats.org/wordprocessingml/2006/main" xmlns:mc="http://schemas.openxmlformats.org/markup-compatibility/2006" showMasterPhAnim="0" showMasterSp="1" show="1">
+  <p:cSld name="">
     <p:spTree>
       <p:nvGrpSpPr>
         <p:cNvPr id="1" name=""/>
         <p:cNvGrpSpPr/>
         <p:nvPr/>
       </p:nvGrpSpPr>
-      <p:grpSpPr>
+      <p:grpSpPr bwMode="auto">
         <a:xfrm>
           <a:off x="0" y="0"/>
           <a:ext cx="0" cy="0"/>
@@ -3094,7 +5195,7 @@
       </p:grpSpPr>
       <p:sp>
         <p:nvSpPr>
-          <p:cNvPr id="2" name="Title 1"/>
+          <p:cNvPr id="2029118821" name="Title 1"/>
           <p:cNvSpPr>
             <a:spLocks noGrp="1"/>
           </p:cNvSpPr>
@@ -3102,22 +5203,25 @@
             <p:ph type="ctrTitle"/>
           </p:nvPr>
         </p:nvSpPr>
-        <p:spPr/>
-        <p:txBody>
-          <a:bodyPr/>
-          <a:lstStyle/>
-          <a:p>
-            <a:r>
-              <a:rPr lang="en-US" dirty="0" smtClean="0"/>
+        <p:spPr bwMode="auto"/>
+        <p:txBody>
+          <a:bodyPr/>
+          <a:lstStyle/>
+          <a:p>
+            <a:pPr>
+              <a:defRPr/>
+            </a:pPr>
+            <a:r>
+              <a:rPr lang="en-US"/>
               <a:t>Display Basics</a:t>
             </a:r>
-            <a:endParaRPr lang="en-US" dirty="0"/>
-          </a:p>
-        </p:txBody>
-      </p:sp>
-      <p:sp>
-        <p:nvSpPr>
-          <p:cNvPr id="3" name="Subtitle 2"/>
+            <a:endParaRPr lang="en-US"/>
+          </a:p>
+        </p:txBody>
+      </p:sp>
+      <p:sp>
+        <p:nvSpPr>
+          <p:cNvPr id="2025576305" name="Subtitle 2"/>
           <p:cNvSpPr>
             <a:spLocks noGrp="1"/>
           </p:cNvSpPr>
@@ -3125,38 +5229,44 @@
             <p:ph type="subTitle" idx="1"/>
           </p:nvPr>
         </p:nvSpPr>
-        <p:spPr/>
-        <p:txBody>
-          <a:bodyPr/>
-          <a:lstStyle/>
-          <a:p>
+        <p:spPr bwMode="auto"/>
+        <p:txBody>
+          <a:bodyPr/>
+          <a:lstStyle/>
+          <a:p>
+            <a:pPr>
+              <a:defRPr/>
+            </a:pPr>
             <a:endParaRPr lang="en-US"/>
           </a:p>
         </p:txBody>
       </p:sp>
     </p:spTree>
-    <p:extLst>
-      <p:ext uri="{BB962C8B-B14F-4D97-AF65-F5344CB8AC3E}">
-        <p14:creationId xmlns:p14="http://schemas.microsoft.com/office/powerpoint/2010/main" val="860757323"/>
-      </p:ext>
-    </p:extLst>
   </p:cSld>
   <p:clrMapOvr>
     <a:masterClrMapping/>
   </p:clrMapOvr>
+  <mc:AlternateContent xmlns:mc="http://schemas.openxmlformats.org/markup-compatibility/2006">
+    <mc:Choice xmlns:p159="http://schemas.microsoft.com/office/powerpoint/2015/09/main" xmlns:p14="http://schemas.microsoft.com/office/powerpoint/2010/main" Requires="p159">
+      <p:transition p14:dur="500" advClick="1"/>
+    </mc:Choice>
+    <mc:Fallback>
+      <p:transition advClick="1"/>
+    </mc:Fallback>
+  </mc:AlternateContent>
 </p:sld>
 </file>
 
 <file path=ppt/slides/slide10.xml><?xml version="1.0" encoding="utf-8"?>
-<p:sld xmlns:a="http://schemas.openxmlformats.org/drawingml/2006/main" xmlns:r="http://schemas.openxmlformats.org/officeDocument/2006/relationships" xmlns:p="http://schemas.openxmlformats.org/presentationml/2006/main">
-  <p:cSld>
+<p:sld xmlns:a="http://schemas.openxmlformats.org/drawingml/2006/main" xmlns:r="http://schemas.openxmlformats.org/officeDocument/2006/relationships" xmlns:p="http://schemas.openxmlformats.org/presentationml/2006/main" xmlns:m="http://schemas.openxmlformats.org/officeDocument/2006/math" xmlns:w="http://schemas.openxmlformats.org/wordprocessingml/2006/main" xmlns:mc="http://schemas.openxmlformats.org/markup-compatibility/2006" showMasterPhAnim="0" showMasterSp="1" show="1">
+  <p:cSld name="">
     <p:spTree>
       <p:nvGrpSpPr>
         <p:cNvPr id="1" name=""/>
         <p:cNvGrpSpPr/>
         <p:nvPr/>
       </p:nvGrpSpPr>
-      <p:grpSpPr>
+      <p:grpSpPr bwMode="auto">
         <a:xfrm>
           <a:off x="0" y="0"/>
           <a:ext cx="0" cy="0"/>
@@ -3166,7 +5276,7 @@
       </p:grpSpPr>
       <p:sp>
         <p:nvSpPr>
-          <p:cNvPr id="2" name="Title 1"/>
+          <p:cNvPr id="651952642" name="Title 1"/>
           <p:cNvSpPr>
             <a:spLocks noGrp="1"/>
           </p:cNvSpPr>
@@ -3174,27 +5284,30 @@
             <p:ph type="title"/>
           </p:nvPr>
         </p:nvSpPr>
-        <p:spPr/>
+        <p:spPr bwMode="auto"/>
         <p:txBody>
           <a:bodyPr>
             <a:normAutofit fontScale="90000"/>
           </a:bodyPr>
           <a:lstStyle/>
           <a:p>
-            <a:r>
-              <a:rPr lang="en-US" dirty="0"/>
+            <a:pPr>
+              <a:defRPr/>
+            </a:pPr>
+            <a:r>
+              <a:rPr lang="en-US"/>
               <a:t>Working Principle of LCD </a:t>
             </a:r>
             <a:br>
-              <a:rPr lang="en-US" dirty="0"/>
+              <a:rPr lang="en-US"/>
             </a:br>
-            <a:endParaRPr lang="en-US" dirty="0"/>
-          </a:p>
-        </p:txBody>
-      </p:sp>
-      <p:sp>
-        <p:nvSpPr>
-          <p:cNvPr id="3" name="Content Placeholder 2"/>
+            <a:endParaRPr lang="en-US"/>
+          </a:p>
+        </p:txBody>
+      </p:sp>
+      <p:sp>
+        <p:nvSpPr>
+          <p:cNvPr id="44604858" name="Content Placeholder 2"/>
           <p:cNvSpPr>
             <a:spLocks noGrp="1"/>
           </p:cNvSpPr>
@@ -3202,7 +5315,7 @@
             <p:ph idx="1"/>
           </p:nvPr>
         </p:nvSpPr>
-        <p:spPr>
+        <p:spPr bwMode="auto">
           <a:xfrm>
             <a:off x="457200" y="1112837"/>
             <a:ext cx="8229600" cy="5211763"/>
@@ -3214,134 +5327,163 @@
           </a:bodyPr>
           <a:lstStyle/>
           <a:p>
-            <a:pPr algn="just"/>
-            <a:r>
-              <a:rPr lang="en-US" dirty="0" smtClean="0"/>
+            <a:pPr algn="just">
+              <a:defRPr/>
+            </a:pPr>
+            <a:r>
+              <a:rPr lang="en-US"/>
               <a:t>Before </a:t>
             </a:r>
             <a:r>
-              <a:rPr lang="en-US" dirty="0"/>
+              <a:rPr lang="en-US"/>
               <a:t>applying Electric field, the molecules arrange themselves in a helical structure, or twist. </a:t>
             </a:r>
-          </a:p>
-          <a:p>
-            <a:pPr algn="just"/>
-            <a:r>
-              <a:rPr lang="en-US" dirty="0" smtClean="0"/>
+            <a:endParaRPr/>
+          </a:p>
+          <a:p>
+            <a:pPr algn="just">
+              <a:defRPr/>
+            </a:pPr>
+            <a:r>
+              <a:rPr lang="en-US"/>
               <a:t>When </a:t>
             </a:r>
             <a:r>
-              <a:rPr lang="en-US" dirty="0"/>
+              <a:rPr lang="en-US"/>
               <a:t>a voltage is applied across the electrodes, a torque acts to align the liquid crystal molecules parallel to the electric field, distorting the helical structure . </a:t>
             </a:r>
-          </a:p>
-          <a:p>
-            <a:pPr algn="just"/>
-            <a:r>
-              <a:rPr lang="en-US" dirty="0" smtClean="0"/>
+            <a:endParaRPr/>
+          </a:p>
+          <a:p>
+            <a:pPr algn="just">
+              <a:defRPr/>
+            </a:pPr>
+            <a:r>
+              <a:rPr lang="en-US"/>
               <a:t>This </a:t>
             </a:r>
             <a:r>
-              <a:rPr lang="en-US" dirty="0"/>
+              <a:rPr lang="en-US"/>
               <a:t>reduces the rotation of the polarization of the incident light. </a:t>
             </a:r>
-          </a:p>
-          <a:p>
-            <a:pPr algn="just"/>
-            <a:r>
-              <a:rPr lang="en-US" b="1" dirty="0" smtClean="0"/>
+            <a:endParaRPr/>
+          </a:p>
+          <a:p>
+            <a:pPr algn="just">
+              <a:defRPr/>
+            </a:pPr>
+            <a:r>
+              <a:rPr lang="en-US" b="1"/>
               <a:t>Classification </a:t>
             </a:r>
             <a:r>
-              <a:rPr lang="en-US" b="1" dirty="0"/>
+              <a:rPr lang="en-US" b="1"/>
               <a:t>of LCD: </a:t>
             </a:r>
-            <a:endParaRPr lang="en-US" dirty="0"/>
-          </a:p>
-          <a:p>
-            <a:pPr lvl="1" algn="just"/>
-            <a:r>
-              <a:rPr lang="en-US" dirty="0" err="1" smtClean="0"/>
+            <a:endParaRPr lang="en-US"/>
+          </a:p>
+          <a:p>
+            <a:pPr lvl="1" algn="just">
+              <a:defRPr/>
+            </a:pPr>
+            <a:r>
+              <a:rPr lang="en-US"/>
               <a:t>Transmissive</a:t>
             </a:r>
             <a:r>
-              <a:rPr lang="en-US" dirty="0" smtClean="0"/>
+              <a:rPr lang="en-US"/>
               <a:t> </a:t>
             </a:r>
             <a:r>
-              <a:rPr lang="en-US" dirty="0"/>
+              <a:rPr lang="en-US"/>
               <a:t>displays: </a:t>
             </a:r>
-          </a:p>
-          <a:p>
-            <a:pPr lvl="2" algn="just"/>
-            <a:r>
-              <a:rPr lang="en-US" dirty="0" smtClean="0"/>
+            <a:endParaRPr/>
+          </a:p>
+          <a:p>
+            <a:pPr lvl="2" algn="just">
+              <a:defRPr/>
+            </a:pPr>
+            <a:r>
+              <a:rPr lang="en-US"/>
               <a:t>Transmission </a:t>
             </a:r>
             <a:r>
-              <a:rPr lang="en-US" dirty="0"/>
+              <a:rPr lang="en-US"/>
               <a:t>LCD displays do not have the reflector and must be provided with rear illumination. They operate in a very similar fashion to the reflective displays. </a:t>
             </a:r>
-          </a:p>
-          <a:p>
-            <a:pPr lvl="2" algn="just"/>
-            <a:r>
-              <a:rPr lang="en-US" dirty="0" smtClean="0"/>
+            <a:endParaRPr/>
+          </a:p>
+          <a:p>
+            <a:pPr lvl="2" algn="just">
+              <a:defRPr/>
+            </a:pPr>
+            <a:r>
+              <a:rPr lang="en-US"/>
               <a:t>It </a:t>
             </a:r>
             <a:r>
-              <a:rPr lang="en-US" dirty="0"/>
+              <a:rPr lang="en-US"/>
               <a:t>is illuminated from the back by a backlight and viewed from the opposite side (front). Ex: Computer display. </a:t>
             </a:r>
-          </a:p>
-          <a:p>
-            <a:pPr lvl="1" algn="just"/>
-            <a:r>
-              <a:rPr lang="en-US" dirty="0" smtClean="0"/>
+            <a:endParaRPr/>
+          </a:p>
+          <a:p>
+            <a:pPr lvl="1" algn="just">
+              <a:defRPr/>
+            </a:pPr>
+            <a:r>
+              <a:rPr lang="en-US"/>
               <a:t>Reflective </a:t>
             </a:r>
             <a:r>
-              <a:rPr lang="en-US" dirty="0"/>
+              <a:rPr lang="en-US"/>
               <a:t>displays: </a:t>
             </a:r>
-          </a:p>
-          <a:p>
-            <a:pPr lvl="2" algn="just"/>
-            <a:r>
-              <a:rPr lang="en-US" dirty="0" smtClean="0"/>
+            <a:endParaRPr/>
+          </a:p>
+          <a:p>
+            <a:pPr lvl="2" algn="just">
+              <a:defRPr/>
+            </a:pPr>
+            <a:r>
+              <a:rPr lang="en-US"/>
               <a:t>It </a:t>
             </a:r>
             <a:r>
-              <a:rPr lang="en-US" dirty="0"/>
+              <a:rPr lang="en-US"/>
               <a:t>is illuminated by external light reflected by diffusing reflector behind the display. Ex: Calculator. </a:t>
             </a:r>
+            <a:endParaRPr/>
           </a:p>
         </p:txBody>
       </p:sp>
     </p:spTree>
-    <p:extLst>
-      <p:ext uri="{BB962C8B-B14F-4D97-AF65-F5344CB8AC3E}">
-        <p14:creationId xmlns:p14="http://schemas.microsoft.com/office/powerpoint/2010/main" val="3027404990"/>
-      </p:ext>
-    </p:extLst>
   </p:cSld>
   <p:clrMapOvr>
     <a:masterClrMapping/>
   </p:clrMapOvr>
+  <mc:AlternateContent xmlns:mc="http://schemas.openxmlformats.org/markup-compatibility/2006">
+    <mc:Choice xmlns:p159="http://schemas.microsoft.com/office/powerpoint/2015/09/main" xmlns:p14="http://schemas.microsoft.com/office/powerpoint/2010/main" Requires="p159">
+      <p:transition p14:dur="500" advClick="1"/>
+    </mc:Choice>
+    <mc:Fallback>
+      <p:transition advClick="1"/>
+    </mc:Fallback>
+  </mc:AlternateContent>
 </p:sld>
 </file>
 
 <file path=ppt/slides/slide11.xml><?xml version="1.0" encoding="utf-8"?>
-<p:sld xmlns:a="http://schemas.openxmlformats.org/drawingml/2006/main" xmlns:r="http://schemas.openxmlformats.org/officeDocument/2006/relationships" xmlns:p="http://schemas.openxmlformats.org/presentationml/2006/main">
-  <p:cSld>
+<p:sld xmlns:a="http://schemas.openxmlformats.org/drawingml/2006/main" xmlns:r="http://schemas.openxmlformats.org/officeDocument/2006/relationships" xmlns:p="http://schemas.openxmlformats.org/presentationml/2006/main" xmlns:m="http://schemas.openxmlformats.org/officeDocument/2006/math" xmlns:w="http://schemas.openxmlformats.org/wordprocessingml/2006/main" xmlns:mc="http://schemas.openxmlformats.org/markup-compatibility/2006" showMasterPhAnim="0" showMasterSp="1" show="1">
+  <p:cSld name="">
     <p:spTree>
       <p:nvGrpSpPr>
         <p:cNvPr id="1" name=""/>
         <p:cNvGrpSpPr/>
         <p:nvPr/>
       </p:nvGrpSpPr>
-      <p:grpSpPr>
+      <p:grpSpPr bwMode="auto">
         <a:xfrm>
           <a:off x="0" y="0"/>
           <a:ext cx="0" cy="0"/>
@@ -3351,7 +5493,7 @@
       </p:grpSpPr>
       <p:sp>
         <p:nvSpPr>
-          <p:cNvPr id="2" name="Title 1"/>
+          <p:cNvPr id="1577720928" name="Title 1"/>
           <p:cNvSpPr>
             <a:spLocks noGrp="1"/>
           </p:cNvSpPr>
@@ -3359,23 +5501,27 @@
             <p:ph type="title"/>
           </p:nvPr>
         </p:nvSpPr>
-        <p:spPr/>
+        <p:spPr bwMode="auto"/>
         <p:txBody>
           <a:bodyPr>
             <a:normAutofit fontScale="90000"/>
           </a:bodyPr>
           <a:lstStyle/>
           <a:p>
-            <a:r>
-              <a:rPr lang="en-US" dirty="0"/>
+            <a:pPr>
+              <a:defRPr/>
+            </a:pPr>
+            <a:r>
+              <a:rPr lang="en-US"/>
               <a:t>Applications, Advantages &amp; Limitations of LCD </a:t>
             </a:r>
-          </a:p>
-        </p:txBody>
-      </p:sp>
-      <p:sp>
-        <p:nvSpPr>
-          <p:cNvPr id="3" name="Content Placeholder 2"/>
+            <a:endParaRPr/>
+          </a:p>
+        </p:txBody>
+      </p:sp>
+      <p:sp>
+        <p:nvSpPr>
+          <p:cNvPr id="1071632459" name="Content Placeholder 2"/>
           <p:cNvSpPr>
             <a:spLocks noGrp="1"/>
           </p:cNvSpPr>
@@ -3383,148 +5529,190 @@
             <p:ph idx="1"/>
           </p:nvPr>
         </p:nvSpPr>
-        <p:spPr/>
+        <p:spPr bwMode="auto"/>
         <p:txBody>
           <a:bodyPr>
             <a:normAutofit fontScale="40000" lnSpcReduction="20000"/>
           </a:bodyPr>
           <a:lstStyle/>
           <a:p>
-            <a:r>
-              <a:rPr lang="en-US" sz="6000" b="1" dirty="0" smtClean="0"/>
+            <a:pPr>
+              <a:defRPr/>
+            </a:pPr>
+            <a:r>
+              <a:rPr lang="en-US" sz="6000" b="1"/>
               <a:t>Applications</a:t>
             </a:r>
             <a:r>
-              <a:rPr lang="en-US" sz="6000" b="1" dirty="0"/>
+              <a:rPr lang="en-US" sz="6000" b="1"/>
               <a:t>: </a:t>
             </a:r>
-            <a:endParaRPr lang="en-US" sz="6000" dirty="0"/>
-          </a:p>
-          <a:p>
-            <a:pPr lvl="1"/>
-            <a:r>
-              <a:rPr lang="en-US" sz="4000" dirty="0" smtClean="0"/>
+            <a:endParaRPr lang="en-US" sz="6000"/>
+          </a:p>
+          <a:p>
+            <a:pPr lvl="1">
+              <a:defRPr/>
+            </a:pPr>
+            <a:r>
+              <a:rPr lang="en-US" sz="4000"/>
               <a:t>LCDs </a:t>
             </a:r>
             <a:r>
-              <a:rPr lang="en-US" sz="4000" dirty="0"/>
+              <a:rPr lang="en-US" sz="4000"/>
               <a:t>with a small number of segments, are used in digital watches and pocket calculators, Small monochrome displays in personal organizers, or older laptop screens </a:t>
             </a:r>
-          </a:p>
-          <a:p>
-            <a:pPr lvl="1"/>
-            <a:r>
-              <a:rPr lang="en-US" sz="4000" dirty="0" smtClean="0"/>
+            <a:endParaRPr/>
+          </a:p>
+          <a:p>
+            <a:pPr lvl="1">
+              <a:defRPr/>
+            </a:pPr>
+            <a:r>
+              <a:rPr lang="en-US" sz="4000"/>
               <a:t>High-resolution </a:t>
             </a:r>
             <a:r>
-              <a:rPr lang="en-US" sz="4000" dirty="0"/>
+              <a:rPr lang="en-US" sz="4000"/>
               <a:t>color displays such as modern LCD computer monitors and televisions; </a:t>
             </a:r>
-          </a:p>
-          <a:p>
-            <a:endParaRPr lang="en-US" sz="6000" dirty="0"/>
-          </a:p>
-          <a:p>
-            <a:r>
-              <a:rPr lang="en-US" sz="6000" b="1" dirty="0"/>
+            <a:endParaRPr/>
+          </a:p>
+          <a:p>
+            <a:pPr>
+              <a:defRPr/>
+            </a:pPr>
+            <a:endParaRPr lang="en-US" sz="6000"/>
+          </a:p>
+          <a:p>
+            <a:pPr>
+              <a:defRPr/>
+            </a:pPr>
+            <a:r>
+              <a:rPr lang="en-US" sz="6000" b="1"/>
               <a:t>Advantages: </a:t>
             </a:r>
-            <a:endParaRPr lang="en-US" sz="6000" dirty="0"/>
-          </a:p>
-          <a:p>
-            <a:pPr lvl="1"/>
-            <a:r>
-              <a:rPr lang="en-US" sz="4000" dirty="0" smtClean="0"/>
+            <a:endParaRPr lang="en-US" sz="6000"/>
+          </a:p>
+          <a:p>
+            <a:pPr lvl="1">
+              <a:defRPr/>
+            </a:pPr>
+            <a:r>
+              <a:rPr lang="en-US" sz="4000"/>
               <a:t>An </a:t>
             </a:r>
             <a:r>
-              <a:rPr lang="en-US" sz="4000" dirty="0"/>
+              <a:rPr lang="en-US" sz="4000"/>
               <a:t>LCD cell consumes only microwatts of power over a thousand times less than LED displays. </a:t>
             </a:r>
-          </a:p>
-          <a:p>
-            <a:pPr lvl="1"/>
-            <a:r>
-              <a:rPr lang="en-US" sz="4000" dirty="0" smtClean="0"/>
+            <a:endParaRPr/>
+          </a:p>
+          <a:p>
+            <a:pPr lvl="1">
+              <a:defRPr/>
+            </a:pPr>
+            <a:r>
+              <a:rPr lang="en-US" sz="4000"/>
               <a:t>LCDs </a:t>
             </a:r>
             <a:r>
-              <a:rPr lang="en-US" sz="4000" dirty="0"/>
+              <a:rPr lang="en-US" sz="4000"/>
               <a:t>can operate on voltages as low as 2 to 3 V and are easily driven by MOS IC drivers. </a:t>
             </a:r>
-          </a:p>
-          <a:p>
-            <a:endParaRPr lang="en-US" sz="6000" dirty="0"/>
-          </a:p>
-          <a:p>
-            <a:r>
-              <a:rPr lang="en-US" sz="6000" b="1" dirty="0"/>
+            <a:endParaRPr/>
+          </a:p>
+          <a:p>
+            <a:pPr>
+              <a:defRPr/>
+            </a:pPr>
+            <a:endParaRPr lang="en-US" sz="6000"/>
+          </a:p>
+          <a:p>
+            <a:pPr>
+              <a:defRPr/>
+            </a:pPr>
+            <a:r>
+              <a:rPr lang="en-US" sz="6000" b="1"/>
               <a:t>Limitations: </a:t>
             </a:r>
-            <a:endParaRPr lang="en-US" sz="6000" dirty="0"/>
-          </a:p>
-          <a:p>
-            <a:pPr lvl="1"/>
-            <a:r>
-              <a:rPr lang="en-US" sz="4000" dirty="0" smtClean="0"/>
+            <a:endParaRPr lang="en-US" sz="6000"/>
+          </a:p>
+          <a:p>
+            <a:pPr lvl="1">
+              <a:defRPr/>
+            </a:pPr>
+            <a:r>
+              <a:rPr lang="en-US" sz="4000"/>
               <a:t>They </a:t>
             </a:r>
             <a:r>
-              <a:rPr lang="en-US" sz="4000" dirty="0"/>
+              <a:rPr lang="en-US" sz="4000"/>
               <a:t>cannot be seen in the dark, </a:t>
             </a:r>
-          </a:p>
-          <a:p>
-            <a:pPr lvl="1"/>
-            <a:r>
-              <a:rPr lang="en-US" sz="4000" dirty="0" smtClean="0"/>
+            <a:endParaRPr/>
+          </a:p>
+          <a:p>
+            <a:pPr lvl="1">
+              <a:defRPr/>
+            </a:pPr>
+            <a:r>
+              <a:rPr lang="en-US" sz="4000"/>
               <a:t>They </a:t>
             </a:r>
             <a:r>
-              <a:rPr lang="en-US" sz="4000" dirty="0"/>
+              <a:rPr lang="en-US" sz="4000"/>
               <a:t>have a limited viewing angle; </a:t>
             </a:r>
-          </a:p>
-          <a:p>
-            <a:pPr lvl="1"/>
-            <a:r>
-              <a:rPr lang="en-US" sz="4000" dirty="0" smtClean="0"/>
+            <a:endParaRPr/>
+          </a:p>
+          <a:p>
+            <a:pPr lvl="1">
+              <a:defRPr/>
+            </a:pPr>
+            <a:r>
+              <a:rPr lang="en-US" sz="4000"/>
               <a:t>They </a:t>
             </a:r>
             <a:r>
-              <a:rPr lang="en-US" sz="4000" dirty="0"/>
+              <a:rPr lang="en-US" sz="4000"/>
               <a:t>can be operated in limited temperature range. </a:t>
             </a:r>
-          </a:p>
-          <a:p>
-            <a:endParaRPr lang="en-US" b="1" dirty="0"/>
+            <a:endParaRPr/>
+          </a:p>
+          <a:p>
+            <a:pPr>
+              <a:defRPr/>
+            </a:pPr>
+            <a:endParaRPr lang="en-US" b="1"/>
           </a:p>
         </p:txBody>
       </p:sp>
     </p:spTree>
-    <p:extLst>
-      <p:ext uri="{BB962C8B-B14F-4D97-AF65-F5344CB8AC3E}">
-        <p14:creationId xmlns:p14="http://schemas.microsoft.com/office/powerpoint/2010/main" val="2581718987"/>
-      </p:ext>
-    </p:extLst>
   </p:cSld>
   <p:clrMapOvr>
     <a:masterClrMapping/>
   </p:clrMapOvr>
+  <mc:AlternateContent xmlns:mc="http://schemas.openxmlformats.org/markup-compatibility/2006">
+    <mc:Choice xmlns:p159="http://schemas.microsoft.com/office/powerpoint/2015/09/main" xmlns:p14="http://schemas.microsoft.com/office/powerpoint/2010/main" Requires="p159">
+      <p:transition p14:dur="500" advClick="1"/>
+    </mc:Choice>
+    <mc:Fallback>
+      <p:transition advClick="1"/>
+    </mc:Fallback>
+  </mc:AlternateContent>
 </p:sld>
 </file>
 
 <file path=ppt/slides/slide12.xml><?xml version="1.0" encoding="utf-8"?>
-<p:sld xmlns:a="http://schemas.openxmlformats.org/drawingml/2006/main" xmlns:r="http://schemas.openxmlformats.org/officeDocument/2006/relationships" xmlns:p="http://schemas.openxmlformats.org/presentationml/2006/main">
-  <p:cSld>
+<p:sld xmlns:a="http://schemas.openxmlformats.org/drawingml/2006/main" xmlns:r="http://schemas.openxmlformats.org/officeDocument/2006/relationships" xmlns:p="http://schemas.openxmlformats.org/presentationml/2006/main" xmlns:m="http://schemas.openxmlformats.org/officeDocument/2006/math" xmlns:w="http://schemas.openxmlformats.org/wordprocessingml/2006/main" xmlns:mc="http://schemas.openxmlformats.org/markup-compatibility/2006" showMasterPhAnim="0" showMasterSp="1" show="1">
+  <p:cSld name="">
     <p:spTree>
       <p:nvGrpSpPr>
         <p:cNvPr id="1" name=""/>
         <p:cNvGrpSpPr/>
         <p:nvPr/>
       </p:nvGrpSpPr>
-      <p:grpSpPr>
+      <p:grpSpPr bwMode="auto">
         <a:xfrm>
           <a:off x="0" y="0"/>
           <a:ext cx="0" cy="0"/>
@@ -3534,7 +5722,7 @@
       </p:grpSpPr>
       <p:sp>
         <p:nvSpPr>
-          <p:cNvPr id="2" name="Title 1"/>
+          <p:cNvPr id="1178667729" name="Title 1"/>
           <p:cNvSpPr>
             <a:spLocks noGrp="1"/>
           </p:cNvSpPr>
@@ -3542,23 +5730,27 @@
             <p:ph type="title"/>
           </p:nvPr>
         </p:nvSpPr>
-        <p:spPr/>
+        <p:spPr bwMode="auto"/>
         <p:txBody>
           <a:bodyPr>
             <a:normAutofit/>
           </a:bodyPr>
           <a:lstStyle/>
           <a:p>
-            <a:r>
-              <a:rPr lang="en-US" sz="3200" dirty="0"/>
+            <a:pPr>
+              <a:defRPr/>
+            </a:pPr>
+            <a:r>
+              <a:rPr lang="en-US" sz="3200"/>
               <a:t>Thin Film Transistor (TFT) Technology </a:t>
             </a:r>
-          </a:p>
-        </p:txBody>
-      </p:sp>
-      <p:sp>
-        <p:nvSpPr>
-          <p:cNvPr id="3" name="Content Placeholder 2"/>
+            <a:endParaRPr/>
+          </a:p>
+        </p:txBody>
+      </p:sp>
+      <p:sp>
+        <p:nvSpPr>
+          <p:cNvPr id="1112962630" name="Content Placeholder 2"/>
           <p:cNvSpPr>
             <a:spLocks noGrp="1"/>
           </p:cNvSpPr>
@@ -3566,154 +5758,171 @@
             <p:ph idx="1"/>
           </p:nvPr>
         </p:nvSpPr>
-        <p:spPr/>
+        <p:spPr bwMode="auto"/>
         <p:txBody>
           <a:bodyPr>
             <a:normAutofit fontScale="55000" lnSpcReduction="20000"/>
           </a:bodyPr>
           <a:lstStyle/>
           <a:p>
-            <a:pPr algn="just"/>
-            <a:r>
-              <a:rPr lang="en-US" dirty="0" smtClean="0"/>
+            <a:pPr algn="just">
+              <a:defRPr/>
+            </a:pPr>
+            <a:r>
+              <a:rPr lang="en-US"/>
               <a:t>Normal </a:t>
             </a:r>
             <a:r>
-              <a:rPr lang="en-US" dirty="0"/>
+              <a:rPr lang="en-US"/>
               <a:t>LCDs like those found in calculators have direct driven image elements – a voltage can be applied across one segment without interfering with other segments of the display. </a:t>
             </a:r>
-          </a:p>
-          <a:p>
-            <a:pPr algn="just"/>
-            <a:r>
-              <a:rPr lang="en-US" dirty="0" smtClean="0"/>
+            <a:endParaRPr/>
+          </a:p>
+          <a:p>
+            <a:pPr algn="just">
+              <a:defRPr/>
+            </a:pPr>
+            <a:r>
+              <a:rPr lang="en-US"/>
               <a:t>This </a:t>
             </a:r>
             <a:r>
-              <a:rPr lang="en-US" dirty="0"/>
+              <a:rPr lang="en-US"/>
               <a:t>is impractical for a large display with a large number of picture elements (pixels), since it would require millions of connections - top and bottom connections for each one of the three colors (red, green and blue) of every pixel. </a:t>
             </a:r>
-          </a:p>
-          <a:p>
-            <a:pPr algn="just"/>
-            <a:r>
-              <a:rPr lang="en-US" dirty="0" smtClean="0"/>
+            <a:endParaRPr/>
+          </a:p>
+          <a:p>
+            <a:pPr algn="just">
+              <a:defRPr/>
+            </a:pPr>
+            <a:r>
+              <a:rPr lang="en-US"/>
               <a:t>To </a:t>
             </a:r>
             <a:r>
-              <a:rPr lang="en-US" dirty="0"/>
+              <a:rPr lang="en-US"/>
               <a:t>avoid this issue, the pixels are addressed in rows and columns which reduce the connection count from millions to thousands. </a:t>
             </a:r>
-          </a:p>
-          <a:p>
-            <a:pPr algn="just"/>
-            <a:r>
-              <a:rPr lang="en-US" dirty="0" smtClean="0"/>
+            <a:endParaRPr/>
+          </a:p>
+          <a:p>
+            <a:pPr algn="just">
+              <a:defRPr/>
+            </a:pPr>
+            <a:r>
+              <a:rPr lang="en-US"/>
               <a:t>The </a:t>
             </a:r>
             <a:r>
-              <a:rPr lang="en-US" dirty="0"/>
+              <a:rPr lang="en-US"/>
               <a:t>solution to the problem is to supply each pixel with its own transistor switch which allows each pixel to be individually controlled. </a:t>
             </a:r>
-          </a:p>
-          <a:p>
-            <a:pPr algn="just"/>
-            <a:r>
-              <a:rPr lang="en-US" dirty="0" smtClean="0"/>
+            <a:endParaRPr/>
+          </a:p>
+          <a:p>
+            <a:pPr algn="just">
+              <a:defRPr/>
+            </a:pPr>
+            <a:r>
+              <a:rPr lang="en-US"/>
               <a:t>A </a:t>
             </a:r>
             <a:r>
-              <a:rPr lang="en-US" b="1" dirty="0"/>
+              <a:rPr lang="en-US" b="1"/>
               <a:t>thin film transistor </a:t>
             </a:r>
             <a:r>
-              <a:rPr lang="en-US" dirty="0"/>
+              <a:rPr lang="en-US"/>
               <a:t>(</a:t>
             </a:r>
             <a:r>
-              <a:rPr lang="en-US" b="1" dirty="0"/>
+              <a:rPr lang="en-US" b="1"/>
               <a:t>TFT</a:t>
             </a:r>
             <a:r>
-              <a:rPr lang="en-US" dirty="0"/>
+              <a:rPr lang="en-US"/>
               <a:t>) is a special kind of field effect transistor made by depositing thin films for the metallic contacts, semiconductor active layer, and dielectric layer. </a:t>
             </a:r>
-          </a:p>
-          <a:p>
-            <a:pPr algn="just"/>
-            <a:r>
-              <a:rPr lang="en-US" b="1" dirty="0" smtClean="0"/>
+            <a:endParaRPr/>
+          </a:p>
+          <a:p>
+            <a:pPr algn="just">
+              <a:defRPr/>
+            </a:pPr>
+            <a:r>
+              <a:rPr lang="en-US" b="1"/>
               <a:t>TFT-LCD </a:t>
             </a:r>
             <a:r>
-              <a:rPr lang="en-US" dirty="0"/>
+              <a:rPr lang="en-US"/>
               <a:t>(</a:t>
             </a:r>
             <a:r>
-              <a:rPr lang="en-US" b="1" dirty="0"/>
+              <a:rPr lang="en-US" b="1"/>
               <a:t>Thin Film Transistor Liquid Crystal Display</a:t>
             </a:r>
             <a:r>
-              <a:rPr lang="en-US" dirty="0"/>
+              <a:rPr lang="en-US"/>
               <a:t>) is a variant of liquid crystal display (LCD) which uses thin film transistor (TFT) technology to improve image quality. </a:t>
             </a:r>
-          </a:p>
-          <a:p>
-            <a:pPr algn="just"/>
-            <a:r>
-              <a:rPr lang="en-US" dirty="0" smtClean="0"/>
+            <a:endParaRPr/>
+          </a:p>
+          <a:p>
+            <a:pPr algn="just">
+              <a:defRPr/>
+            </a:pPr>
+            <a:r>
+              <a:rPr lang="en-US"/>
               <a:t>TFT </a:t>
             </a:r>
             <a:r>
-              <a:rPr lang="en-US" dirty="0"/>
+              <a:rPr lang="en-US"/>
               <a:t>LCD is one type of </a:t>
             </a:r>
             <a:r>
-              <a:rPr lang="en-US" i="1" dirty="0"/>
+              <a:rPr lang="en-US" i="1"/>
               <a:t>active matrix </a:t>
             </a:r>
             <a:r>
-              <a:rPr lang="en-US" dirty="0"/>
+              <a:rPr lang="en-US"/>
               <a:t>LCD. It is usually synonymous with LCD. </a:t>
             </a:r>
-          </a:p>
-          <a:p>
-            <a:pPr algn="just"/>
-            <a:r>
-              <a:rPr lang="en-US" dirty="0" smtClean="0"/>
+            <a:endParaRPr/>
+          </a:p>
+          <a:p>
+            <a:pPr algn="just">
+              <a:defRPr/>
+            </a:pPr>
+            <a:r>
+              <a:rPr lang="en-US"/>
               <a:t>It </a:t>
             </a:r>
             <a:r>
-              <a:rPr lang="en-US" dirty="0"/>
+              <a:rPr lang="en-US"/>
               <a:t>is used in both flat panel displays and projectors. </a:t>
             </a:r>
-          </a:p>
-          <a:p>
-            <a:pPr algn="just"/>
-            <a:endParaRPr lang="en-US" dirty="0"/>
+            <a:endParaRPr/>
+          </a:p>
+          <a:p>
+            <a:pPr algn="just">
+              <a:defRPr/>
+            </a:pPr>
+            <a:endParaRPr lang="en-US"/>
           </a:p>
         </p:txBody>
       </p:sp>
       <p:pic>
         <p:nvPicPr>
-          <p:cNvPr id="21506" name="Picture 2"/>
+          <p:cNvPr id="427947690" name="Picture 2"/>
           <p:cNvPicPr>
             <a:picLocks noChangeAspect="1" noChangeArrowheads="1"/>
           </p:cNvPicPr>
           <p:nvPr/>
         </p:nvPicPr>
-        <p:blipFill>
-          <a:blip r:embed="rId2">
-            <a:extLst>
-              <a:ext uri="{28A0092B-C50C-407E-A947-70E740481C1C}">
-                <a14:useLocalDpi xmlns:a14="http://schemas.microsoft.com/office/drawing/2010/main" val="0"/>
-              </a:ext>
-            </a:extLst>
-          </a:blip>
-          <a:srcRect/>
-          <a:stretch>
-            <a:fillRect/>
-          </a:stretch>
+        <p:blipFill rotWithShape="1">
+          <a:blip r:embed="rId3"/>
+          <a:stretch/>
         </p:blipFill>
         <p:spPr bwMode="auto">
           <a:xfrm>
@@ -3728,59 +5937,34 @@
             <a:noFill/>
           </a:ln>
           <a:effectLst/>
-          <a:extLst>
-            <a:ext uri="{909E8E84-426E-40DD-AFC4-6F175D3DCCD1}">
-              <a14:hiddenFill xmlns:a14="http://schemas.microsoft.com/office/drawing/2010/main">
-                <a:solidFill>
-                  <a:schemeClr val="accent1"/>
-                </a:solidFill>
-              </a14:hiddenFill>
-            </a:ext>
-            <a:ext uri="{91240B29-F687-4F45-9708-019B960494DF}">
-              <a14:hiddenLine xmlns:a14="http://schemas.microsoft.com/office/drawing/2010/main" w="9525">
-                <a:solidFill>
-                  <a:schemeClr val="tx1"/>
-                </a:solidFill>
-                <a:miter lim="800000"/>
-                <a:headEnd/>
-                <a:tailEnd/>
-              </a14:hiddenLine>
-            </a:ext>
-            <a:ext uri="{AF507438-7753-43E0-B8FC-AC1667EBCBE1}">
-              <a14:hiddenEffects xmlns:a14="http://schemas.microsoft.com/office/drawing/2010/main">
-                <a:effectLst>
-                  <a:outerShdw dist="35921" dir="2700000" algn="ctr" rotWithShape="0">
-                    <a:schemeClr val="bg2"/>
-                  </a:outerShdw>
-                </a:effectLst>
-              </a14:hiddenEffects>
-            </a:ext>
-          </a:extLst>
         </p:spPr>
       </p:pic>
     </p:spTree>
-    <p:extLst>
-      <p:ext uri="{BB962C8B-B14F-4D97-AF65-F5344CB8AC3E}">
-        <p14:creationId xmlns:p14="http://schemas.microsoft.com/office/powerpoint/2010/main" val="2176751849"/>
-      </p:ext>
-    </p:extLst>
   </p:cSld>
   <p:clrMapOvr>
     <a:masterClrMapping/>
   </p:clrMapOvr>
+  <mc:AlternateContent xmlns:mc="http://schemas.openxmlformats.org/markup-compatibility/2006">
+    <mc:Choice xmlns:p159="http://schemas.microsoft.com/office/powerpoint/2015/09/main" xmlns:p14="http://schemas.microsoft.com/office/powerpoint/2010/main" Requires="p159">
+      <p:transition p14:dur="500" advClick="1"/>
+    </mc:Choice>
+    <mc:Fallback>
+      <p:transition advClick="1"/>
+    </mc:Fallback>
+  </mc:AlternateContent>
 </p:sld>
 </file>
 
 <file path=ppt/slides/slide13.xml><?xml version="1.0" encoding="utf-8"?>
-<p:sld xmlns:a="http://schemas.openxmlformats.org/drawingml/2006/main" xmlns:r="http://schemas.openxmlformats.org/officeDocument/2006/relationships" xmlns:p="http://schemas.openxmlformats.org/presentationml/2006/main">
-  <p:cSld>
+<p:sld xmlns:a="http://schemas.openxmlformats.org/drawingml/2006/main" xmlns:r="http://schemas.openxmlformats.org/officeDocument/2006/relationships" xmlns:p="http://schemas.openxmlformats.org/presentationml/2006/main" xmlns:m="http://schemas.openxmlformats.org/officeDocument/2006/math" xmlns:w="http://schemas.openxmlformats.org/wordprocessingml/2006/main" xmlns:mc="http://schemas.openxmlformats.org/markup-compatibility/2006" showMasterPhAnim="0" showMasterSp="1" show="1">
+  <p:cSld name="">
     <p:spTree>
       <p:nvGrpSpPr>
         <p:cNvPr id="1" name=""/>
         <p:cNvGrpSpPr/>
         <p:nvPr/>
       </p:nvGrpSpPr>
-      <p:grpSpPr>
+      <p:grpSpPr bwMode="auto">
         <a:xfrm>
           <a:off x="0" y="0"/>
           <a:ext cx="0" cy="0"/>
@@ -3790,7 +5974,7 @@
       </p:grpSpPr>
       <p:sp>
         <p:nvSpPr>
-          <p:cNvPr id="2" name="Title 1"/>
+          <p:cNvPr id="862844081" name="Title 1"/>
           <p:cNvSpPr>
             <a:spLocks noGrp="1"/>
           </p:cNvSpPr>
@@ -3798,21 +5982,25 @@
             <p:ph type="title"/>
           </p:nvPr>
         </p:nvSpPr>
-        <p:spPr/>
-        <p:txBody>
-          <a:bodyPr/>
-          <a:lstStyle/>
-          <a:p>
-            <a:r>
-              <a:rPr lang="en-US" dirty="0"/>
+        <p:spPr bwMode="auto"/>
+        <p:txBody>
+          <a:bodyPr/>
+          <a:lstStyle/>
+          <a:p>
+            <a:pPr>
+              <a:defRPr/>
+            </a:pPr>
+            <a:r>
+              <a:rPr lang="en-US"/>
               <a:t>TFT-LCD </a:t>
             </a:r>
-          </a:p>
-        </p:txBody>
-      </p:sp>
-      <p:sp>
-        <p:nvSpPr>
-          <p:cNvPr id="3" name="Content Placeholder 2"/>
+            <a:endParaRPr/>
+          </a:p>
+        </p:txBody>
+      </p:sp>
+      <p:sp>
+        <p:nvSpPr>
+          <p:cNvPr id="805647250" name="Content Placeholder 2"/>
           <p:cNvSpPr>
             <a:spLocks noGrp="1"/>
           </p:cNvSpPr>
@@ -3820,35 +6008,29 @@
             <p:ph idx="1"/>
           </p:nvPr>
         </p:nvSpPr>
-        <p:spPr/>
-        <p:txBody>
-          <a:bodyPr/>
-          <a:lstStyle/>
-          <a:p>
-            <a:endParaRPr lang="en-US" dirty="0"/>
+        <p:spPr bwMode="auto"/>
+        <p:txBody>
+          <a:bodyPr/>
+          <a:lstStyle/>
+          <a:p>
+            <a:pPr>
+              <a:defRPr/>
+            </a:pPr>
+            <a:endParaRPr lang="en-US"/>
           </a:p>
         </p:txBody>
       </p:sp>
       <p:pic>
         <p:nvPicPr>
-          <p:cNvPr id="22530" name="Picture 2"/>
+          <p:cNvPr id="541336374" name="Picture 2"/>
           <p:cNvPicPr>
             <a:picLocks noChangeAspect="1" noChangeArrowheads="1"/>
           </p:cNvPicPr>
           <p:nvPr/>
         </p:nvPicPr>
-        <p:blipFill>
-          <a:blip r:embed="rId2">
-            <a:extLst>
-              <a:ext uri="{28A0092B-C50C-407E-A947-70E740481C1C}">
-                <a14:useLocalDpi xmlns:a14="http://schemas.microsoft.com/office/drawing/2010/main" val="0"/>
-              </a:ext>
-            </a:extLst>
-          </a:blip>
-          <a:srcRect/>
-          <a:stretch>
-            <a:fillRect/>
-          </a:stretch>
+        <p:blipFill rotWithShape="1">
+          <a:blip r:embed="rId3"/>
+          <a:stretch/>
         </p:blipFill>
         <p:spPr bwMode="auto">
           <a:xfrm>
@@ -3863,59 +6045,34 @@
             <a:noFill/>
           </a:ln>
           <a:effectLst/>
-          <a:extLst>
-            <a:ext uri="{909E8E84-426E-40DD-AFC4-6F175D3DCCD1}">
-              <a14:hiddenFill xmlns:a14="http://schemas.microsoft.com/office/drawing/2010/main">
-                <a:solidFill>
-                  <a:schemeClr val="accent1"/>
-                </a:solidFill>
-              </a14:hiddenFill>
-            </a:ext>
-            <a:ext uri="{91240B29-F687-4F45-9708-019B960494DF}">
-              <a14:hiddenLine xmlns:a14="http://schemas.microsoft.com/office/drawing/2010/main" w="9525">
-                <a:solidFill>
-                  <a:schemeClr val="tx1"/>
-                </a:solidFill>
-                <a:miter lim="800000"/>
-                <a:headEnd/>
-                <a:tailEnd/>
-              </a14:hiddenLine>
-            </a:ext>
-            <a:ext uri="{AF507438-7753-43E0-B8FC-AC1667EBCBE1}">
-              <a14:hiddenEffects xmlns:a14="http://schemas.microsoft.com/office/drawing/2010/main">
-                <a:effectLst>
-                  <a:outerShdw dist="35921" dir="2700000" algn="ctr" rotWithShape="0">
-                    <a:schemeClr val="bg2"/>
-                  </a:outerShdw>
-                </a:effectLst>
-              </a14:hiddenEffects>
-            </a:ext>
-          </a:extLst>
         </p:spPr>
       </p:pic>
     </p:spTree>
-    <p:extLst>
-      <p:ext uri="{BB962C8B-B14F-4D97-AF65-F5344CB8AC3E}">
-        <p14:creationId xmlns:p14="http://schemas.microsoft.com/office/powerpoint/2010/main" val="1574896799"/>
-      </p:ext>
-    </p:extLst>
   </p:cSld>
   <p:clrMapOvr>
     <a:masterClrMapping/>
   </p:clrMapOvr>
+  <mc:AlternateContent xmlns:mc="http://schemas.openxmlformats.org/markup-compatibility/2006">
+    <mc:Choice xmlns:p159="http://schemas.microsoft.com/office/powerpoint/2015/09/main" xmlns:p14="http://schemas.microsoft.com/office/powerpoint/2010/main" Requires="p159">
+      <p:transition p14:dur="500" advClick="1"/>
+    </mc:Choice>
+    <mc:Fallback>
+      <p:transition advClick="1"/>
+    </mc:Fallback>
+  </mc:AlternateContent>
 </p:sld>
 </file>
 
 <file path=ppt/slides/slide14.xml><?xml version="1.0" encoding="utf-8"?>
-<p:sld xmlns:a="http://schemas.openxmlformats.org/drawingml/2006/main" xmlns:r="http://schemas.openxmlformats.org/officeDocument/2006/relationships" xmlns:p="http://schemas.openxmlformats.org/presentationml/2006/main">
-  <p:cSld>
+<p:sld xmlns:a="http://schemas.openxmlformats.org/drawingml/2006/main" xmlns:r="http://schemas.openxmlformats.org/officeDocument/2006/relationships" xmlns:p="http://schemas.openxmlformats.org/presentationml/2006/main" xmlns:m="http://schemas.openxmlformats.org/officeDocument/2006/math" xmlns:w="http://schemas.openxmlformats.org/wordprocessingml/2006/main" xmlns:mc="http://schemas.openxmlformats.org/markup-compatibility/2006" showMasterPhAnim="0" showMasterSp="1" show="1">
+  <p:cSld name="">
     <p:spTree>
       <p:nvGrpSpPr>
         <p:cNvPr id="1" name=""/>
         <p:cNvGrpSpPr/>
         <p:nvPr/>
       </p:nvGrpSpPr>
-      <p:grpSpPr>
+      <p:grpSpPr bwMode="auto">
         <a:xfrm>
           <a:off x="0" y="0"/>
           <a:ext cx="0" cy="0"/>
@@ -3925,7 +6082,7 @@
       </p:grpSpPr>
       <p:sp>
         <p:nvSpPr>
-          <p:cNvPr id="2" name="Title 1"/>
+          <p:cNvPr id="1165499681" name="Title 1"/>
           <p:cNvSpPr>
             <a:spLocks noGrp="1"/>
           </p:cNvSpPr>
@@ -3933,7 +6090,7 @@
             <p:ph type="title"/>
           </p:nvPr>
         </p:nvSpPr>
-        <p:spPr>
+        <p:spPr bwMode="auto">
           <a:xfrm>
             <a:off x="457200" y="274638"/>
             <a:ext cx="8229600" cy="715962"/>
@@ -3945,16 +6102,20 @@
           </a:bodyPr>
           <a:lstStyle/>
           <a:p>
-            <a:r>
-              <a:rPr lang="en-US" dirty="0"/>
+            <a:pPr>
+              <a:defRPr/>
+            </a:pPr>
+            <a:r>
+              <a:rPr lang="en-US"/>
               <a:t>Construction of TFT Displays </a:t>
             </a:r>
-          </a:p>
-        </p:txBody>
-      </p:sp>
-      <p:sp>
-        <p:nvSpPr>
-          <p:cNvPr id="3" name="Content Placeholder 2"/>
+            <a:endParaRPr/>
+          </a:p>
+        </p:txBody>
+      </p:sp>
+      <p:sp>
+        <p:nvSpPr>
+          <p:cNvPr id="1586590409" name="Content Placeholder 2"/>
           <p:cNvSpPr>
             <a:spLocks noGrp="1"/>
           </p:cNvSpPr>
@@ -3962,10 +6123,10 @@
             <p:ph idx="1"/>
           </p:nvPr>
         </p:nvSpPr>
-        <p:spPr>
+        <p:spPr bwMode="auto">
           <a:xfrm>
             <a:off x="457200" y="1219200"/>
-            <a:ext cx="8229600" cy="4906963"/>
+            <a:ext cx="8229600" cy="4906962"/>
           </a:xfrm>
         </p:spPr>
         <p:txBody>
@@ -3974,145 +6135,177 @@
           </a:bodyPr>
           <a:lstStyle/>
           <a:p>
-            <a:pPr algn="just"/>
-            <a:r>
-              <a:rPr lang="en-US" dirty="0" smtClean="0"/>
+            <a:pPr algn="just">
+              <a:defRPr/>
+            </a:pPr>
+            <a:r>
+              <a:rPr lang="en-US"/>
               <a:t>Material</a:t>
             </a:r>
             <a:r>
-              <a:rPr lang="en-US" dirty="0"/>
+              <a:rPr lang="en-US"/>
               <a:t>: </a:t>
             </a:r>
-          </a:p>
-          <a:p>
-            <a:pPr lvl="1" algn="just"/>
-            <a:r>
-              <a:rPr lang="en-US" dirty="0" smtClean="0"/>
+            <a:endParaRPr/>
+          </a:p>
+          <a:p>
+            <a:pPr lvl="1" algn="just">
+              <a:defRPr/>
+            </a:pPr>
+            <a:r>
+              <a:rPr lang="en-US"/>
               <a:t>TFTs </a:t>
             </a:r>
             <a:r>
-              <a:rPr lang="en-US" dirty="0"/>
+              <a:rPr lang="en-US"/>
               <a:t>are Metal-Insulator-Semiconductor Field Effect Transistors, which are used more often as bottom-gate. </a:t>
             </a:r>
-          </a:p>
-          <a:p>
-            <a:pPr lvl="1" algn="just"/>
-            <a:r>
-              <a:rPr lang="en-US" dirty="0" smtClean="0"/>
+            <a:endParaRPr/>
+          </a:p>
+          <a:p>
+            <a:pPr lvl="1" algn="just">
+              <a:defRPr/>
+            </a:pPr>
+            <a:r>
+              <a:rPr lang="en-US"/>
               <a:t>Indium </a:t>
             </a:r>
             <a:r>
-              <a:rPr lang="en-US" dirty="0"/>
+              <a:rPr lang="en-US"/>
               <a:t>tin oxide (ITO) is usually employed for the electrodes. </a:t>
             </a:r>
-          </a:p>
-          <a:p>
-            <a:pPr lvl="1" algn="just"/>
-            <a:r>
-              <a:rPr lang="en-US" dirty="0" smtClean="0"/>
+            <a:endParaRPr/>
+          </a:p>
+          <a:p>
+            <a:pPr lvl="1" algn="just">
+              <a:defRPr/>
+            </a:pPr>
+            <a:r>
+              <a:rPr lang="en-US"/>
               <a:t>Most </a:t>
             </a:r>
             <a:r>
-              <a:rPr lang="en-US" dirty="0"/>
+              <a:rPr lang="en-US"/>
               <a:t>TFTs are not transparent themselves, since many of them are based on hydrogenated amorphous silicon (</a:t>
             </a:r>
             <a:r>
-              <a:rPr lang="en-US" dirty="0" err="1"/>
+              <a:rPr lang="en-US"/>
               <a:t>A-Si:H</a:t>
             </a:r>
             <a:r>
-              <a:rPr lang="en-US" dirty="0"/>
+              <a:rPr lang="en-US"/>
               <a:t>) (A-Si, used as Gate-dielectric) have Low mask count; Small number of mask alignments and requires less processing steps). </a:t>
             </a:r>
-          </a:p>
-          <a:p>
-            <a:pPr lvl="1" algn="just"/>
-            <a:r>
-              <a:rPr lang="en-US" dirty="0" smtClean="0"/>
+            <a:endParaRPr/>
+          </a:p>
+          <a:p>
+            <a:pPr lvl="1" algn="just">
+              <a:defRPr/>
+            </a:pPr>
+            <a:r>
+              <a:rPr lang="en-US"/>
               <a:t>The </a:t>
             </a:r>
             <a:r>
-              <a:rPr lang="en-US" dirty="0" err="1"/>
+              <a:rPr lang="en-US"/>
               <a:t>bandgap</a:t>
             </a:r>
             <a:r>
-              <a:rPr lang="en-US" dirty="0"/>
+              <a:rPr lang="en-US"/>
               <a:t> od S-Si is assumed to be less than that of crystalline silicon (1.12eV). </a:t>
             </a:r>
-          </a:p>
-          <a:p>
-            <a:pPr algn="just"/>
-            <a:r>
-              <a:rPr lang="en-US" dirty="0" smtClean="0"/>
+            <a:endParaRPr/>
+          </a:p>
+          <a:p>
+            <a:pPr algn="just">
+              <a:defRPr/>
+            </a:pPr>
+            <a:r>
+              <a:rPr lang="en-US"/>
               <a:t>Construction</a:t>
             </a:r>
             <a:r>
-              <a:rPr lang="en-US" dirty="0"/>
+              <a:rPr lang="en-US"/>
               <a:t>: </a:t>
             </a:r>
-          </a:p>
-          <a:p>
-            <a:pPr lvl="1" algn="just"/>
-            <a:r>
-              <a:rPr lang="en-US" dirty="0" smtClean="0"/>
+            <a:endParaRPr/>
+          </a:p>
+          <a:p>
+            <a:pPr lvl="1" algn="just">
+              <a:defRPr/>
+            </a:pPr>
+            <a:r>
+              <a:rPr lang="en-US"/>
               <a:t>A </a:t>
             </a:r>
             <a:r>
-              <a:rPr lang="en-US" dirty="0"/>
+              <a:rPr lang="en-US"/>
               <a:t>transistor switch which allows each pixel be individually controlled. </a:t>
             </a:r>
-          </a:p>
-          <a:p>
-            <a:pPr lvl="1" algn="just"/>
-            <a:r>
-              <a:rPr lang="en-US" dirty="0" smtClean="0"/>
+            <a:endParaRPr/>
+          </a:p>
+          <a:p>
+            <a:pPr lvl="1" algn="just">
+              <a:defRPr/>
+            </a:pPr>
+            <a:r>
+              <a:rPr lang="en-US"/>
               <a:t>Each </a:t>
             </a:r>
             <a:r>
-              <a:rPr lang="en-US" dirty="0"/>
+              <a:rPr lang="en-US"/>
               <a:t>pixel is a small capacitor with a transparent ITO [indium tin oxide ]layer at the front, a transparent layer at the back, and a layer of insulating liquid crystal between (refer to figure in previous slide). </a:t>
             </a:r>
-          </a:p>
-          <a:p>
-            <a:pPr lvl="1" algn="just"/>
-            <a:r>
-              <a:rPr lang="en-US" dirty="0" smtClean="0"/>
+            <a:endParaRPr/>
+          </a:p>
+          <a:p>
+            <a:pPr lvl="1" algn="just">
+              <a:defRPr/>
+            </a:pPr>
+            <a:r>
+              <a:rPr lang="en-US"/>
               <a:t>All </a:t>
             </a:r>
             <a:r>
-              <a:rPr lang="en-US" dirty="0"/>
+              <a:rPr lang="en-US"/>
               <a:t>the pixels in one row are driven with a positive voltage and all the pixels in one column are driven with a negative voltage. </a:t>
             </a:r>
-          </a:p>
-          <a:p>
-            <a:pPr algn="just"/>
-            <a:endParaRPr lang="en-US" dirty="0"/>
+            <a:endParaRPr/>
+          </a:p>
+          <a:p>
+            <a:pPr algn="just">
+              <a:defRPr/>
+            </a:pPr>
+            <a:endParaRPr lang="en-US"/>
           </a:p>
         </p:txBody>
       </p:sp>
     </p:spTree>
-    <p:extLst>
-      <p:ext uri="{BB962C8B-B14F-4D97-AF65-F5344CB8AC3E}">
-        <p14:creationId xmlns:p14="http://schemas.microsoft.com/office/powerpoint/2010/main" val="3369841740"/>
-      </p:ext>
-    </p:extLst>
   </p:cSld>
   <p:clrMapOvr>
     <a:masterClrMapping/>
   </p:clrMapOvr>
+  <mc:AlternateContent xmlns:mc="http://schemas.openxmlformats.org/markup-compatibility/2006">
+    <mc:Choice xmlns:p159="http://schemas.microsoft.com/office/powerpoint/2015/09/main" xmlns:p14="http://schemas.microsoft.com/office/powerpoint/2010/main" Requires="p159">
+      <p:transition p14:dur="500" advClick="1"/>
+    </mc:Choice>
+    <mc:Fallback>
+      <p:transition advClick="1"/>
+    </mc:Fallback>
+  </mc:AlternateContent>
 </p:sld>
 </file>
 
 <file path=ppt/slides/slide15.xml><?xml version="1.0" encoding="utf-8"?>
-<p:sld xmlns:a="http://schemas.openxmlformats.org/drawingml/2006/main" xmlns:r="http://schemas.openxmlformats.org/officeDocument/2006/relationships" xmlns:p="http://schemas.openxmlformats.org/presentationml/2006/main">
-  <p:cSld>
+<p:sld xmlns:a="http://schemas.openxmlformats.org/drawingml/2006/main" xmlns:r="http://schemas.openxmlformats.org/officeDocument/2006/relationships" xmlns:p="http://schemas.openxmlformats.org/presentationml/2006/main" xmlns:m="http://schemas.openxmlformats.org/officeDocument/2006/math" xmlns:w="http://schemas.openxmlformats.org/wordprocessingml/2006/main" xmlns:mc="http://schemas.openxmlformats.org/markup-compatibility/2006" showMasterPhAnim="0" showMasterSp="1" show="1">
+  <p:cSld name="">
     <p:spTree>
       <p:nvGrpSpPr>
         <p:cNvPr id="1" name=""/>
         <p:cNvGrpSpPr/>
         <p:nvPr/>
       </p:nvGrpSpPr>
-      <p:grpSpPr>
+      <p:grpSpPr bwMode="auto">
         <a:xfrm>
           <a:off x="0" y="0"/>
           <a:ext cx="0" cy="0"/>
@@ -4122,7 +6315,7 @@
       </p:grpSpPr>
       <p:sp>
         <p:nvSpPr>
-          <p:cNvPr id="2" name="Title 1"/>
+          <p:cNvPr id="481295158" name="Title 1"/>
           <p:cNvSpPr>
             <a:spLocks noGrp="1"/>
           </p:cNvSpPr>
@@ -4130,23 +6323,27 @@
             <p:ph type="title"/>
           </p:nvPr>
         </p:nvSpPr>
-        <p:spPr/>
+        <p:spPr bwMode="auto"/>
         <p:txBody>
           <a:bodyPr>
             <a:normAutofit fontScale="90000"/>
           </a:bodyPr>
           <a:lstStyle/>
           <a:p>
-            <a:r>
-              <a:rPr lang="en-US" dirty="0"/>
+            <a:pPr>
+              <a:defRPr/>
+            </a:pPr>
+            <a:r>
+              <a:rPr lang="en-US"/>
               <a:t>Advantages and Disadvantages of TFT </a:t>
             </a:r>
-          </a:p>
-        </p:txBody>
-      </p:sp>
-      <p:sp>
-        <p:nvSpPr>
-          <p:cNvPr id="3" name="Content Placeholder 2"/>
+            <a:endParaRPr/>
+          </a:p>
+        </p:txBody>
+      </p:sp>
+      <p:sp>
+        <p:nvSpPr>
+          <p:cNvPr id="1159679393" name="Content Placeholder 2"/>
           <p:cNvSpPr>
             <a:spLocks noGrp="1"/>
           </p:cNvSpPr>
@@ -4154,123 +6351,152 @@
             <p:ph idx="1"/>
           </p:nvPr>
         </p:nvSpPr>
-        <p:spPr/>
+        <p:spPr bwMode="auto"/>
         <p:txBody>
           <a:bodyPr>
             <a:normAutofit fontScale="85000" lnSpcReduction="10000"/>
           </a:bodyPr>
           <a:lstStyle/>
           <a:p>
-            <a:r>
-              <a:rPr lang="en-US" dirty="0" smtClean="0"/>
+            <a:pPr>
+              <a:defRPr/>
+            </a:pPr>
+            <a:r>
+              <a:rPr lang="en-US"/>
               <a:t>Advantages</a:t>
             </a:r>
             <a:r>
-              <a:rPr lang="en-US" dirty="0"/>
+              <a:rPr lang="en-US"/>
               <a:t>: </a:t>
             </a:r>
-          </a:p>
-          <a:p>
-            <a:pPr lvl="1"/>
-            <a:r>
-              <a:rPr lang="en-US" dirty="0" smtClean="0"/>
+            <a:endParaRPr/>
+          </a:p>
+          <a:p>
+            <a:pPr lvl="1">
+              <a:defRPr/>
+            </a:pPr>
+            <a:r>
+              <a:rPr lang="en-US"/>
               <a:t>Fast </a:t>
             </a:r>
             <a:r>
-              <a:rPr lang="en-US" dirty="0"/>
+              <a:rPr lang="en-US"/>
               <a:t>response time has been a great feature of TN (twisted </a:t>
             </a:r>
             <a:r>
-              <a:rPr lang="en-US" dirty="0" err="1"/>
+              <a:rPr lang="en-US"/>
               <a:t>nematics</a:t>
             </a:r>
             <a:r>
-              <a:rPr lang="en-US" dirty="0"/>
+              <a:rPr lang="en-US"/>
               <a:t>) displays. </a:t>
             </a:r>
-          </a:p>
-          <a:p>
-            <a:pPr lvl="1"/>
-            <a:r>
-              <a:rPr lang="en-US" dirty="0" smtClean="0"/>
+            <a:endParaRPr/>
+          </a:p>
+          <a:p>
+            <a:pPr lvl="1">
+              <a:defRPr/>
+            </a:pPr>
+            <a:r>
+              <a:rPr lang="en-US"/>
               <a:t>Lower </a:t>
             </a:r>
             <a:r>
-              <a:rPr lang="en-US" dirty="0"/>
+              <a:rPr lang="en-US"/>
               <a:t>cost of production </a:t>
             </a:r>
-          </a:p>
-          <a:p>
-            <a:pPr lvl="1"/>
-            <a:r>
-              <a:rPr lang="en-US" dirty="0" smtClean="0"/>
+            <a:endParaRPr/>
+          </a:p>
+          <a:p>
+            <a:pPr lvl="1">
+              <a:defRPr/>
+            </a:pPr>
+            <a:r>
+              <a:rPr lang="en-US"/>
               <a:t>Less </a:t>
             </a:r>
             <a:r>
-              <a:rPr lang="en-US" dirty="0"/>
+              <a:rPr lang="en-US"/>
               <a:t>noise or glitter seen on the panel surface </a:t>
             </a:r>
-          </a:p>
-          <a:p>
-            <a:endParaRPr lang="en-US" dirty="0"/>
-          </a:p>
-          <a:p>
-            <a:r>
-              <a:rPr lang="en-US" dirty="0" smtClean="0"/>
+            <a:endParaRPr/>
+          </a:p>
+          <a:p>
+            <a:pPr>
+              <a:defRPr/>
+            </a:pPr>
+            <a:endParaRPr lang="en-US"/>
+          </a:p>
+          <a:p>
+            <a:pPr>
+              <a:defRPr/>
+            </a:pPr>
+            <a:r>
+              <a:rPr lang="en-US"/>
               <a:t>Disadvantages</a:t>
             </a:r>
             <a:r>
-              <a:rPr lang="en-US" dirty="0"/>
+              <a:rPr lang="en-US"/>
               <a:t>: </a:t>
             </a:r>
-          </a:p>
-          <a:p>
-            <a:pPr lvl="1"/>
-            <a:r>
-              <a:rPr lang="en-US" dirty="0" smtClean="0"/>
+            <a:endParaRPr/>
+          </a:p>
+          <a:p>
+            <a:pPr lvl="1">
+              <a:defRPr/>
+            </a:pPr>
+            <a:r>
+              <a:rPr lang="en-US"/>
               <a:t>The </a:t>
             </a:r>
             <a:r>
-              <a:rPr lang="en-US" dirty="0"/>
+              <a:rPr lang="en-US"/>
               <a:t>TFT display suffers from limited viewing angles, especially in the vertical direction. </a:t>
             </a:r>
-          </a:p>
-          <a:p>
-            <a:pPr lvl="1"/>
-            <a:r>
-              <a:rPr lang="en-US" dirty="0" smtClean="0"/>
+            <a:endParaRPr/>
+          </a:p>
+          <a:p>
+            <a:pPr lvl="1">
+              <a:defRPr/>
+            </a:pPr>
+            <a:r>
+              <a:rPr lang="en-US"/>
               <a:t>They </a:t>
             </a:r>
             <a:r>
-              <a:rPr lang="en-US" dirty="0"/>
+              <a:rPr lang="en-US"/>
               <a:t>are unable to display the full 16.7 million colors (24-bit true color) available from modern graphics cards. </a:t>
             </a:r>
+            <a:endParaRPr/>
           </a:p>
         </p:txBody>
       </p:sp>
     </p:spTree>
-    <p:extLst>
-      <p:ext uri="{BB962C8B-B14F-4D97-AF65-F5344CB8AC3E}">
-        <p14:creationId xmlns:p14="http://schemas.microsoft.com/office/powerpoint/2010/main" val="3988103516"/>
-      </p:ext>
-    </p:extLst>
   </p:cSld>
   <p:clrMapOvr>
     <a:masterClrMapping/>
   </p:clrMapOvr>
+  <mc:AlternateContent xmlns:mc="http://schemas.openxmlformats.org/markup-compatibility/2006">
+    <mc:Choice xmlns:p159="http://schemas.microsoft.com/office/powerpoint/2015/09/main" xmlns:p14="http://schemas.microsoft.com/office/powerpoint/2010/main" Requires="p159">
+      <p:transition p14:dur="500" advClick="1"/>
+    </mc:Choice>
+    <mc:Fallback>
+      <p:transition advClick="1"/>
+    </mc:Fallback>
+  </mc:AlternateContent>
 </p:sld>
 </file>
 
 <file path=ppt/slides/slide16.xml><?xml version="1.0" encoding="utf-8"?>
-<p:sld xmlns:a="http://schemas.openxmlformats.org/drawingml/2006/main" xmlns:r="http://schemas.openxmlformats.org/officeDocument/2006/relationships" xmlns:p="http://schemas.openxmlformats.org/presentationml/2006/main">
-  <p:cSld>
+<p:sld xmlns:a="http://schemas.openxmlformats.org/drawingml/2006/main" xmlns:r="http://schemas.openxmlformats.org/officeDocument/2006/relationships" xmlns:p="http://schemas.openxmlformats.org/presentationml/2006/main" xmlns:m="http://schemas.openxmlformats.org/officeDocument/2006/math" xmlns:w="http://schemas.openxmlformats.org/wordprocessingml/2006/main" xmlns:mc="http://schemas.openxmlformats.org/markup-compatibility/2006" showMasterPhAnim="0" showMasterSp="1" show="1">
+  <p:cSld name="">
     <p:spTree>
       <p:nvGrpSpPr>
         <p:cNvPr id="1" name=""/>
         <p:cNvGrpSpPr/>
         <p:nvPr/>
       </p:nvGrpSpPr>
-      <p:grpSpPr>
+      <p:grpSpPr bwMode="auto">
         <a:xfrm>
           <a:off x="0" y="0"/>
           <a:ext cx="0" cy="0"/>
@@ -4280,7 +6506,7 @@
       </p:grpSpPr>
       <p:sp>
         <p:nvSpPr>
-          <p:cNvPr id="2" name="Title 1"/>
+          <p:cNvPr id="431574282" name="Title 1"/>
           <p:cNvSpPr>
             <a:spLocks noGrp="1"/>
           </p:cNvSpPr>
@@ -4288,23 +6514,27 @@
             <p:ph type="title"/>
           </p:nvPr>
         </p:nvSpPr>
-        <p:spPr/>
+        <p:spPr bwMode="auto"/>
         <p:txBody>
           <a:bodyPr>
             <a:normAutofit/>
           </a:bodyPr>
           <a:lstStyle/>
           <a:p>
-            <a:r>
-              <a:rPr lang="en-US" dirty="0"/>
+            <a:pPr>
+              <a:defRPr/>
+            </a:pPr>
+            <a:r>
+              <a:rPr lang="en-US"/>
               <a:t>Plasma Display </a:t>
             </a:r>
-          </a:p>
-        </p:txBody>
-      </p:sp>
-      <p:sp>
-        <p:nvSpPr>
-          <p:cNvPr id="3" name="Content Placeholder 2"/>
+            <a:endParaRPr/>
+          </a:p>
+        </p:txBody>
+      </p:sp>
+      <p:sp>
+        <p:nvSpPr>
+          <p:cNvPr id="2137162860" name="Content Placeholder 2"/>
           <p:cNvSpPr>
             <a:spLocks noGrp="1"/>
           </p:cNvSpPr>
@@ -4312,97 +6542,114 @@
             <p:ph idx="1"/>
           </p:nvPr>
         </p:nvSpPr>
-        <p:spPr/>
+        <p:spPr bwMode="auto"/>
         <p:txBody>
           <a:bodyPr>
             <a:normAutofit fontScale="92500" lnSpcReduction="20000"/>
           </a:bodyPr>
           <a:lstStyle/>
           <a:p>
-            <a:pPr algn="just"/>
-            <a:r>
-              <a:rPr lang="en-US" dirty="0" smtClean="0"/>
+            <a:pPr algn="just">
+              <a:defRPr/>
+            </a:pPr>
+            <a:r>
+              <a:rPr lang="en-US"/>
               <a:t>A </a:t>
             </a:r>
             <a:r>
-              <a:rPr lang="en-US" b="1" dirty="0"/>
+              <a:rPr lang="en-US" b="1"/>
               <a:t>plasma display panel (PDP) </a:t>
             </a:r>
             <a:r>
-              <a:rPr lang="en-US" dirty="0"/>
+              <a:rPr lang="en-US"/>
               <a:t>is a type of flat panel display, suitable and now commonly used for large TV displays (typically above 37-inch or 940 mm. </a:t>
             </a:r>
-          </a:p>
-          <a:p>
-            <a:pPr algn="just"/>
-            <a:r>
-              <a:rPr lang="en-US" b="1" dirty="0" smtClean="0"/>
+            <a:endParaRPr/>
+          </a:p>
+          <a:p>
+            <a:pPr algn="just">
+              <a:defRPr/>
+            </a:pPr>
+            <a:r>
+              <a:rPr lang="en-US" b="1"/>
               <a:t>Construction</a:t>
             </a:r>
             <a:r>
-              <a:rPr lang="en-US" b="1" dirty="0"/>
+              <a:rPr lang="en-US" b="1"/>
               <a:t>: </a:t>
             </a:r>
-            <a:endParaRPr lang="en-US" dirty="0"/>
-          </a:p>
-          <a:p>
-            <a:pPr lvl="1" algn="just"/>
-            <a:r>
-              <a:rPr lang="en-US" dirty="0" smtClean="0"/>
+            <a:endParaRPr lang="en-US"/>
+          </a:p>
+          <a:p>
+            <a:pPr lvl="1" algn="just">
+              <a:defRPr/>
+            </a:pPr>
+            <a:r>
+              <a:rPr lang="en-US"/>
               <a:t>The </a:t>
             </a:r>
             <a:r>
-              <a:rPr lang="en-US" dirty="0"/>
+              <a:rPr lang="en-US"/>
               <a:t>xenon and neon gas in a plasma television is contained in hundreds of thousands of tiny cells positioned between two plates of glass. </a:t>
             </a:r>
-          </a:p>
-          <a:p>
-            <a:pPr lvl="1" algn="just"/>
-            <a:r>
-              <a:rPr lang="en-US" dirty="0" smtClean="0"/>
+            <a:endParaRPr/>
+          </a:p>
+          <a:p>
+            <a:pPr lvl="1" algn="just">
+              <a:defRPr/>
+            </a:pPr>
+            <a:r>
+              <a:rPr lang="en-US"/>
               <a:t>Long </a:t>
             </a:r>
             <a:r>
-              <a:rPr lang="en-US" dirty="0"/>
+              <a:rPr lang="en-US"/>
               <a:t>electrodes are also sandwiched between the glass plates, in front of and behind the cells. </a:t>
             </a:r>
-          </a:p>
-          <a:p>
-            <a:pPr lvl="1" algn="just"/>
-            <a:r>
-              <a:rPr lang="en-US" dirty="0" smtClean="0"/>
+            <a:endParaRPr/>
+          </a:p>
+          <a:p>
+            <a:pPr lvl="1" algn="just">
+              <a:defRPr/>
+            </a:pPr>
+            <a:r>
+              <a:rPr lang="en-US"/>
               <a:t>Cell </a:t>
             </a:r>
             <a:r>
-              <a:rPr lang="en-US" dirty="0"/>
+              <a:rPr lang="en-US"/>
               <a:t>are covered with a magnesium oxide protective layer. </a:t>
             </a:r>
+            <a:endParaRPr/>
           </a:p>
         </p:txBody>
       </p:sp>
     </p:spTree>
-    <p:extLst>
-      <p:ext uri="{BB962C8B-B14F-4D97-AF65-F5344CB8AC3E}">
-        <p14:creationId xmlns:p14="http://schemas.microsoft.com/office/powerpoint/2010/main" val="3700019968"/>
-      </p:ext>
-    </p:extLst>
   </p:cSld>
   <p:clrMapOvr>
     <a:masterClrMapping/>
   </p:clrMapOvr>
+  <mc:AlternateContent xmlns:mc="http://schemas.openxmlformats.org/markup-compatibility/2006">
+    <mc:Choice xmlns:p159="http://schemas.microsoft.com/office/powerpoint/2015/09/main" xmlns:p14="http://schemas.microsoft.com/office/powerpoint/2010/main" Requires="p159">
+      <p:transition p14:dur="500" advClick="1"/>
+    </mc:Choice>
+    <mc:Fallback>
+      <p:transition advClick="1"/>
+    </mc:Fallback>
+  </mc:AlternateContent>
 </p:sld>
 </file>
 
 <file path=ppt/slides/slide17.xml><?xml version="1.0" encoding="utf-8"?>
-<p:sld xmlns:a="http://schemas.openxmlformats.org/drawingml/2006/main" xmlns:r="http://schemas.openxmlformats.org/officeDocument/2006/relationships" xmlns:p="http://schemas.openxmlformats.org/presentationml/2006/main">
-  <p:cSld>
+<p:sld xmlns:a="http://schemas.openxmlformats.org/drawingml/2006/main" xmlns:r="http://schemas.openxmlformats.org/officeDocument/2006/relationships" xmlns:p="http://schemas.openxmlformats.org/presentationml/2006/main" xmlns:m="http://schemas.openxmlformats.org/officeDocument/2006/math" xmlns:w="http://schemas.openxmlformats.org/wordprocessingml/2006/main" xmlns:mc="http://schemas.openxmlformats.org/markup-compatibility/2006" showMasterPhAnim="0" showMasterSp="1" show="1">
+  <p:cSld name="">
     <p:spTree>
       <p:nvGrpSpPr>
         <p:cNvPr id="1" name=""/>
         <p:cNvGrpSpPr/>
         <p:nvPr/>
       </p:nvGrpSpPr>
-      <p:grpSpPr>
+      <p:grpSpPr bwMode="auto">
         <a:xfrm>
           <a:off x="0" y="0"/>
           <a:ext cx="0" cy="0"/>
@@ -4412,7 +6659,7 @@
       </p:grpSpPr>
       <p:sp>
         <p:nvSpPr>
-          <p:cNvPr id="2" name="Title 1"/>
+          <p:cNvPr id="969443034" name="Title 1"/>
           <p:cNvSpPr>
             <a:spLocks noGrp="1"/>
           </p:cNvSpPr>
@@ -4420,7 +6667,7 @@
             <p:ph type="title"/>
           </p:nvPr>
         </p:nvSpPr>
-        <p:spPr>
+        <p:spPr bwMode="auto">
           <a:xfrm>
             <a:off x="457200" y="274638"/>
             <a:ext cx="8229600" cy="944562"/>
@@ -4432,16 +6679,20 @@
           </a:bodyPr>
           <a:lstStyle/>
           <a:p>
-            <a:r>
-              <a:rPr lang="en-US" dirty="0"/>
+            <a:pPr>
+              <a:defRPr/>
+            </a:pPr>
+            <a:r>
+              <a:rPr lang="en-US"/>
               <a:t>Working of PDP </a:t>
             </a:r>
-          </a:p>
-        </p:txBody>
-      </p:sp>
-      <p:sp>
-        <p:nvSpPr>
-          <p:cNvPr id="3" name="Content Placeholder 2"/>
+            <a:endParaRPr/>
+          </a:p>
+        </p:txBody>
+      </p:sp>
+      <p:sp>
+        <p:nvSpPr>
+          <p:cNvPr id="2092274772" name="Content Placeholder 2"/>
           <p:cNvSpPr>
             <a:spLocks noGrp="1"/>
           </p:cNvSpPr>
@@ -4449,7 +6700,7 @@
             <p:ph idx="1"/>
           </p:nvPr>
         </p:nvSpPr>
-        <p:spPr>
+        <p:spPr bwMode="auto">
           <a:xfrm>
             <a:off x="457200" y="1295400"/>
             <a:ext cx="8229600" cy="4830763"/>
@@ -4461,118 +6712,145 @@
           </a:bodyPr>
           <a:lstStyle/>
           <a:p>
-            <a:pPr algn="just"/>
-            <a:r>
-              <a:rPr lang="en-US" dirty="0" smtClean="0"/>
+            <a:pPr algn="just">
+              <a:defRPr/>
+            </a:pPr>
+            <a:r>
+              <a:rPr lang="en-US"/>
               <a:t>Control </a:t>
             </a:r>
             <a:r>
-              <a:rPr lang="en-US" dirty="0"/>
+              <a:rPr lang="en-US"/>
               <a:t>circuitry charges the electrodes that cross paths at cell, </a:t>
             </a:r>
-          </a:p>
-          <a:p>
-            <a:pPr algn="just"/>
-            <a:r>
-              <a:rPr lang="en-US" dirty="0" smtClean="0"/>
+            <a:endParaRPr/>
+          </a:p>
+          <a:p>
+            <a:pPr algn="just">
+              <a:defRPr/>
+            </a:pPr>
+            <a:r>
+              <a:rPr lang="en-US"/>
               <a:t>This </a:t>
             </a:r>
             <a:r>
-              <a:rPr lang="en-US" dirty="0"/>
+              <a:rPr lang="en-US"/>
               <a:t>creates a voltage difference between front and back and causing the gas to ionize and form a plasma. </a:t>
             </a:r>
-          </a:p>
-          <a:p>
-            <a:pPr algn="just"/>
-            <a:r>
-              <a:rPr lang="en-US" dirty="0" smtClean="0"/>
+            <a:endParaRPr/>
+          </a:p>
+          <a:p>
+            <a:pPr algn="just">
+              <a:defRPr/>
+            </a:pPr>
+            <a:r>
+              <a:rPr lang="en-US"/>
               <a:t>As </a:t>
             </a:r>
             <a:r>
-              <a:rPr lang="en-US" dirty="0"/>
+              <a:rPr lang="en-US"/>
               <a:t>the gas ions rush to the electrodes and collide, photons are emitted. </a:t>
             </a:r>
-          </a:p>
-          <a:p>
-            <a:pPr algn="just"/>
-            <a:r>
-              <a:rPr lang="en-US" dirty="0" smtClean="0"/>
+            <a:endParaRPr/>
+          </a:p>
+          <a:p>
+            <a:pPr algn="just">
+              <a:defRPr/>
+            </a:pPr>
+            <a:r>
+              <a:rPr lang="en-US"/>
               <a:t>In </a:t>
             </a:r>
             <a:r>
-              <a:rPr lang="en-US" dirty="0"/>
+              <a:rPr lang="en-US"/>
               <a:t>color panels, the back of each cell is coated with a phosphor. The ultraviolet photons emitted by the plasma excite these phosphors to give off colored light. </a:t>
             </a:r>
-          </a:p>
-          <a:p>
-            <a:pPr algn="just"/>
-            <a:r>
-              <a:rPr lang="en-US" dirty="0" smtClean="0"/>
+            <a:endParaRPr/>
+          </a:p>
+          <a:p>
+            <a:pPr algn="just">
+              <a:defRPr/>
+            </a:pPr>
+            <a:r>
+              <a:rPr lang="en-US"/>
               <a:t>The </a:t>
             </a:r>
             <a:r>
-              <a:rPr lang="en-US" dirty="0"/>
+              <a:rPr lang="en-US"/>
               <a:t>display panel is only about 6 cm (2½ inches) thick, and total thickness less than 10 cm. </a:t>
             </a:r>
-          </a:p>
-          <a:p>
-            <a:pPr algn="just"/>
-            <a:r>
-              <a:rPr lang="en-US" dirty="0" smtClean="0"/>
+            <a:endParaRPr/>
+          </a:p>
+          <a:p>
+            <a:pPr algn="just">
+              <a:defRPr/>
+            </a:pPr>
+            <a:r>
+              <a:rPr lang="en-US"/>
               <a:t>They </a:t>
             </a:r>
             <a:r>
-              <a:rPr lang="en-US" dirty="0"/>
+              <a:rPr lang="en-US"/>
               <a:t>can be produce fairly large sizes, up to 262 cm (103 inches) diagonally. </a:t>
             </a:r>
-          </a:p>
-          <a:p>
-            <a:pPr algn="just"/>
-            <a:r>
-              <a:rPr lang="en-US" dirty="0" smtClean="0"/>
+            <a:endParaRPr/>
+          </a:p>
+          <a:p>
+            <a:pPr algn="just">
+              <a:defRPr/>
+            </a:pPr>
+            <a:r>
+              <a:rPr lang="en-US"/>
               <a:t>Bright </a:t>
             </a:r>
             <a:r>
-              <a:rPr lang="en-US" dirty="0"/>
+              <a:rPr lang="en-US"/>
               <a:t>scenes (say a football game) will draw significantly more power than darker scenes. </a:t>
             </a:r>
-          </a:p>
-          <a:p>
-            <a:pPr algn="just"/>
-            <a:r>
-              <a:rPr lang="en-US" dirty="0" smtClean="0"/>
+            <a:endParaRPr/>
+          </a:p>
+          <a:p>
+            <a:pPr algn="just">
+              <a:defRPr/>
+            </a:pPr>
+            <a:r>
+              <a:rPr lang="en-US"/>
               <a:t>Limited </a:t>
             </a:r>
             <a:r>
-              <a:rPr lang="en-US" dirty="0"/>
+              <a:rPr lang="en-US"/>
               <a:t>life time: Their lifetime is estimated at 60,000 hours </a:t>
             </a:r>
+            <a:endParaRPr/>
           </a:p>
         </p:txBody>
       </p:sp>
     </p:spTree>
-    <p:extLst>
-      <p:ext uri="{BB962C8B-B14F-4D97-AF65-F5344CB8AC3E}">
-        <p14:creationId xmlns:p14="http://schemas.microsoft.com/office/powerpoint/2010/main" val="1641047723"/>
-      </p:ext>
-    </p:extLst>
   </p:cSld>
   <p:clrMapOvr>
     <a:masterClrMapping/>
   </p:clrMapOvr>
+  <mc:AlternateContent xmlns:mc="http://schemas.openxmlformats.org/markup-compatibility/2006">
+    <mc:Choice xmlns:p159="http://schemas.microsoft.com/office/powerpoint/2015/09/main" xmlns:p14="http://schemas.microsoft.com/office/powerpoint/2010/main" Requires="p159">
+      <p:transition p14:dur="500" advClick="1"/>
+    </mc:Choice>
+    <mc:Fallback>
+      <p:transition advClick="1"/>
+    </mc:Fallback>
+  </mc:AlternateContent>
 </p:sld>
 </file>
 
 <file path=ppt/slides/slide18.xml><?xml version="1.0" encoding="utf-8"?>
-<p:sld xmlns:a="http://schemas.openxmlformats.org/drawingml/2006/main" xmlns:r="http://schemas.openxmlformats.org/officeDocument/2006/relationships" xmlns:p="http://schemas.openxmlformats.org/presentationml/2006/main">
-  <p:cSld>
+<p:sld xmlns:a="http://schemas.openxmlformats.org/drawingml/2006/main" xmlns:r="http://schemas.openxmlformats.org/officeDocument/2006/relationships" xmlns:p="http://schemas.openxmlformats.org/presentationml/2006/main" xmlns:m="http://schemas.openxmlformats.org/officeDocument/2006/math" xmlns:w="http://schemas.openxmlformats.org/wordprocessingml/2006/main" xmlns:mc="http://schemas.openxmlformats.org/markup-compatibility/2006" showMasterPhAnim="0" showMasterSp="1" show="1">
+  <p:cSld name="">
     <p:spTree>
       <p:nvGrpSpPr>
         <p:cNvPr id="1" name=""/>
         <p:cNvGrpSpPr/>
         <p:nvPr/>
       </p:nvGrpSpPr>
-      <p:grpSpPr>
+      <p:grpSpPr bwMode="auto">
         <a:xfrm>
           <a:off x="0" y="0"/>
           <a:ext cx="0" cy="0"/>
@@ -4582,7 +6860,7 @@
       </p:grpSpPr>
       <p:sp>
         <p:nvSpPr>
-          <p:cNvPr id="2" name="Title 1"/>
+          <p:cNvPr id="1830056324" name="Title 1"/>
           <p:cNvSpPr>
             <a:spLocks noGrp="1"/>
           </p:cNvSpPr>
@@ -4590,23 +6868,27 @@
             <p:ph type="title"/>
           </p:nvPr>
         </p:nvSpPr>
-        <p:spPr/>
+        <p:spPr bwMode="auto"/>
         <p:txBody>
           <a:bodyPr>
             <a:normAutofit/>
           </a:bodyPr>
           <a:lstStyle/>
           <a:p>
-            <a:r>
-              <a:rPr lang="en-US" dirty="0"/>
+            <a:pPr>
+              <a:defRPr/>
+            </a:pPr>
+            <a:r>
+              <a:rPr lang="en-US"/>
               <a:t>Advantages and Disadvantages </a:t>
             </a:r>
-          </a:p>
-        </p:txBody>
-      </p:sp>
-      <p:sp>
-        <p:nvSpPr>
-          <p:cNvPr id="3" name="Content Placeholder 2"/>
+            <a:endParaRPr/>
+          </a:p>
+        </p:txBody>
+      </p:sp>
+      <p:sp>
+        <p:nvSpPr>
+          <p:cNvPr id="756812055" name="Content Placeholder 2"/>
           <p:cNvSpPr>
             <a:spLocks noGrp="1"/>
           </p:cNvSpPr>
@@ -4614,133 +6896,160 @@
             <p:ph idx="1"/>
           </p:nvPr>
         </p:nvSpPr>
-        <p:spPr/>
+        <p:spPr bwMode="auto"/>
         <p:txBody>
           <a:bodyPr>
             <a:normAutofit fontScale="85000" lnSpcReduction="20000"/>
           </a:bodyPr>
           <a:lstStyle/>
           <a:p>
-            <a:pPr algn="just"/>
-            <a:r>
-              <a:rPr lang="en-US" dirty="0" smtClean="0"/>
+            <a:pPr algn="just">
+              <a:defRPr/>
+            </a:pPr>
+            <a:r>
+              <a:rPr lang="en-US"/>
               <a:t>Advantages</a:t>
             </a:r>
             <a:r>
-              <a:rPr lang="en-US" dirty="0"/>
+              <a:rPr lang="en-US"/>
               <a:t>: </a:t>
             </a:r>
-          </a:p>
-          <a:p>
-            <a:pPr lvl="1" algn="just"/>
-            <a:r>
-              <a:rPr lang="en-US" dirty="0" smtClean="0"/>
+            <a:endParaRPr/>
+          </a:p>
+          <a:p>
+            <a:pPr lvl="1" algn="just">
+              <a:defRPr/>
+            </a:pPr>
+            <a:r>
+              <a:rPr lang="en-US"/>
               <a:t>Supports </a:t>
             </a:r>
             <a:r>
-              <a:rPr lang="en-US" dirty="0"/>
+              <a:rPr lang="en-US"/>
               <a:t>large displays ,up to 103 inches diagonally. </a:t>
             </a:r>
-          </a:p>
-          <a:p>
-            <a:pPr lvl="1" algn="just"/>
-            <a:r>
-              <a:rPr lang="en-US" dirty="0" smtClean="0"/>
+            <a:endParaRPr/>
+          </a:p>
+          <a:p>
+            <a:pPr lvl="1" algn="just">
+              <a:defRPr/>
+            </a:pPr>
+            <a:r>
+              <a:rPr lang="en-US"/>
               <a:t>Overall </a:t>
             </a:r>
             <a:r>
-              <a:rPr lang="en-US" dirty="0"/>
+              <a:rPr lang="en-US"/>
               <a:t>thickness of monitor is less than 10 cm. and can be installed on a wall. </a:t>
             </a:r>
-          </a:p>
-          <a:p>
-            <a:pPr lvl="1" algn="just"/>
-            <a:r>
-              <a:rPr lang="en-US" dirty="0" smtClean="0"/>
+            <a:endParaRPr/>
+          </a:p>
+          <a:p>
+            <a:pPr lvl="1" algn="just">
+              <a:defRPr/>
+            </a:pPr>
+            <a:r>
+              <a:rPr lang="en-US"/>
               <a:t>Faster </a:t>
             </a:r>
             <a:r>
-              <a:rPr lang="en-US" dirty="0"/>
+              <a:rPr lang="en-US"/>
               <a:t>response time, Greater color spectrum, Wider viewing angle </a:t>
             </a:r>
-          </a:p>
-          <a:p>
-            <a:pPr algn="just"/>
-            <a:r>
-              <a:rPr lang="en-US" dirty="0" smtClean="0"/>
+            <a:endParaRPr/>
+          </a:p>
+          <a:p>
+            <a:pPr algn="just">
+              <a:defRPr/>
+            </a:pPr>
+            <a:r>
+              <a:rPr lang="en-US"/>
               <a:t>Disadvantages</a:t>
             </a:r>
             <a:r>
-              <a:rPr lang="en-US" dirty="0"/>
+              <a:rPr lang="en-US"/>
               <a:t>: </a:t>
             </a:r>
-          </a:p>
-          <a:p>
-            <a:pPr lvl="1" algn="just"/>
-            <a:r>
-              <a:rPr lang="en-US" dirty="0" smtClean="0"/>
+            <a:endParaRPr/>
+          </a:p>
+          <a:p>
+            <a:pPr lvl="1" algn="just">
+              <a:defRPr/>
+            </a:pPr>
+            <a:r>
+              <a:rPr lang="en-US"/>
               <a:t>They </a:t>
             </a:r>
             <a:r>
-              <a:rPr lang="en-US" dirty="0"/>
+              <a:rPr lang="en-US"/>
               <a:t>are costly as compared to CRT</a:t>
             </a:r>
             <a:r>
-              <a:rPr lang="en-US" dirty="0" smtClean="0"/>
+              <a:rPr lang="en-US"/>
               <a:t>, LCD </a:t>
             </a:r>
             <a:r>
-              <a:rPr lang="en-US" dirty="0"/>
+              <a:rPr lang="en-US"/>
               <a:t>displays. </a:t>
             </a:r>
-          </a:p>
-          <a:p>
-            <a:pPr lvl="1" algn="just"/>
-            <a:r>
-              <a:rPr lang="en-US" dirty="0" smtClean="0"/>
+            <a:endParaRPr/>
+          </a:p>
+          <a:p>
+            <a:pPr lvl="1" algn="just">
+              <a:defRPr/>
+            </a:pPr>
+            <a:r>
+              <a:rPr lang="en-US"/>
               <a:t>Burn-in </a:t>
             </a:r>
             <a:r>
-              <a:rPr lang="en-US" dirty="0"/>
+              <a:rPr lang="en-US"/>
               <a:t>problem: </a:t>
             </a:r>
-          </a:p>
-          <a:p>
-            <a:pPr lvl="1" algn="just"/>
-            <a:r>
-              <a:rPr lang="en-US" dirty="0" smtClean="0"/>
+            <a:endParaRPr/>
+          </a:p>
+          <a:p>
+            <a:pPr lvl="1" algn="just">
+              <a:defRPr/>
+            </a:pPr>
+            <a:r>
+              <a:rPr lang="en-US"/>
               <a:t>Static </a:t>
             </a:r>
             <a:r>
-              <a:rPr lang="en-US" dirty="0"/>
+              <a:rPr lang="en-US"/>
               <a:t>images can leave a permanent mark on screen. That is why they are not used in computer monitors and video game displays. </a:t>
             </a:r>
+            <a:endParaRPr/>
           </a:p>
         </p:txBody>
       </p:sp>
     </p:spTree>
-    <p:extLst>
-      <p:ext uri="{BB962C8B-B14F-4D97-AF65-F5344CB8AC3E}">
-        <p14:creationId xmlns:p14="http://schemas.microsoft.com/office/powerpoint/2010/main" val="491147194"/>
-      </p:ext>
-    </p:extLst>
   </p:cSld>
   <p:clrMapOvr>
     <a:masterClrMapping/>
   </p:clrMapOvr>
+  <mc:AlternateContent xmlns:mc="http://schemas.openxmlformats.org/markup-compatibility/2006">
+    <mc:Choice xmlns:p159="http://schemas.microsoft.com/office/powerpoint/2015/09/main" xmlns:p14="http://schemas.microsoft.com/office/powerpoint/2010/main" Requires="p159">
+      <p:transition p14:dur="500" advClick="1"/>
+    </mc:Choice>
+    <mc:Fallback>
+      <p:transition advClick="1"/>
+    </mc:Fallback>
+  </mc:AlternateContent>
 </p:sld>
 </file>
 
 <file path=ppt/slides/slide2.xml><?xml version="1.0" encoding="utf-8"?>
-<p:sld xmlns:a="http://schemas.openxmlformats.org/drawingml/2006/main" xmlns:r="http://schemas.openxmlformats.org/officeDocument/2006/relationships" xmlns:p="http://schemas.openxmlformats.org/presentationml/2006/main">
-  <p:cSld>
+<p:sld xmlns:a="http://schemas.openxmlformats.org/drawingml/2006/main" xmlns:r="http://schemas.openxmlformats.org/officeDocument/2006/relationships" xmlns:p="http://schemas.openxmlformats.org/presentationml/2006/main" xmlns:m="http://schemas.openxmlformats.org/officeDocument/2006/math" xmlns:w="http://schemas.openxmlformats.org/wordprocessingml/2006/main" xmlns:mc="http://schemas.openxmlformats.org/markup-compatibility/2006" showMasterPhAnim="0" showMasterSp="1" show="1">
+  <p:cSld name="">
     <p:spTree>
       <p:nvGrpSpPr>
         <p:cNvPr id="1" name=""/>
         <p:cNvGrpSpPr/>
         <p:nvPr/>
       </p:nvGrpSpPr>
-      <p:grpSpPr>
+      <p:grpSpPr bwMode="auto">
         <a:xfrm>
           <a:off x="0" y="0"/>
           <a:ext cx="0" cy="0"/>
@@ -4750,7 +7059,7 @@
       </p:grpSpPr>
       <p:sp>
         <p:nvSpPr>
-          <p:cNvPr id="2" name="Title 1"/>
+          <p:cNvPr id="1571939883" name="Title 1"/>
           <p:cNvSpPr>
             <a:spLocks noGrp="1"/>
           </p:cNvSpPr>
@@ -4758,23 +7067,27 @@
             <p:ph type="title"/>
           </p:nvPr>
         </p:nvSpPr>
-        <p:spPr/>
+        <p:spPr bwMode="auto"/>
         <p:txBody>
           <a:bodyPr>
             <a:normAutofit/>
           </a:bodyPr>
           <a:lstStyle/>
           <a:p>
-            <a:r>
-              <a:rPr lang="en-US" dirty="0"/>
+            <a:pPr>
+              <a:defRPr/>
+            </a:pPr>
+            <a:r>
+              <a:rPr lang="en-US"/>
               <a:t>Flat Panel Displays </a:t>
             </a:r>
-          </a:p>
-        </p:txBody>
-      </p:sp>
-      <p:sp>
-        <p:nvSpPr>
-          <p:cNvPr id="3" name="Content Placeholder 2"/>
+            <a:endParaRPr/>
+          </a:p>
+        </p:txBody>
+      </p:sp>
+      <p:sp>
+        <p:nvSpPr>
+          <p:cNvPr id="1907684020" name="Content Placeholder 2"/>
           <p:cNvSpPr>
             <a:spLocks noGrp="1"/>
           </p:cNvSpPr>
@@ -4782,127 +7095,150 @@
             <p:ph idx="1"/>
           </p:nvPr>
         </p:nvSpPr>
-        <p:spPr/>
+        <p:spPr bwMode="auto"/>
         <p:txBody>
           <a:bodyPr>
             <a:normAutofit fontScale="77500" lnSpcReduction="20000"/>
           </a:bodyPr>
           <a:lstStyle/>
           <a:p>
-            <a:pPr algn="just"/>
-            <a:r>
-              <a:rPr lang="en-US" dirty="0" smtClean="0"/>
+            <a:pPr algn="just">
+              <a:defRPr/>
+            </a:pPr>
+            <a:r>
+              <a:rPr lang="en-US"/>
               <a:t>Flat-Panel </a:t>
             </a:r>
             <a:r>
-              <a:rPr lang="en-US" dirty="0"/>
+              <a:rPr lang="en-US"/>
               <a:t>Display refers to a class of display devices that have reduced volume, weight and power requirements compared to CRT. </a:t>
             </a:r>
-          </a:p>
-          <a:p>
-            <a:pPr algn="just"/>
-            <a:r>
-              <a:rPr lang="en-US" dirty="0" smtClean="0"/>
+            <a:endParaRPr/>
+          </a:p>
+          <a:p>
+            <a:pPr algn="just">
+              <a:defRPr/>
+            </a:pPr>
+            <a:r>
+              <a:rPr lang="en-US"/>
               <a:t>There </a:t>
             </a:r>
             <a:r>
-              <a:rPr lang="en-US" dirty="0"/>
+              <a:rPr lang="en-US"/>
               <a:t>are two categories of flat panel displays: </a:t>
             </a:r>
-          </a:p>
-          <a:p>
-            <a:pPr lvl="1" algn="just"/>
-            <a:r>
-              <a:rPr lang="en-US" dirty="0" smtClean="0"/>
+            <a:endParaRPr/>
+          </a:p>
+          <a:p>
+            <a:pPr lvl="1" algn="just">
+              <a:defRPr/>
+            </a:pPr>
+            <a:r>
+              <a:rPr lang="en-US"/>
               <a:t>Emissive </a:t>
             </a:r>
             <a:r>
-              <a:rPr lang="en-US" dirty="0"/>
+              <a:rPr lang="en-US"/>
               <a:t>Displays </a:t>
             </a:r>
-          </a:p>
-          <a:p>
-            <a:pPr lvl="1" algn="just"/>
-            <a:r>
-              <a:rPr lang="en-US" dirty="0" smtClean="0"/>
+            <a:endParaRPr/>
+          </a:p>
+          <a:p>
+            <a:pPr lvl="1" algn="just">
+              <a:defRPr/>
+            </a:pPr>
+            <a:r>
+              <a:rPr lang="en-US"/>
               <a:t>Non-Emissive </a:t>
             </a:r>
             <a:r>
-              <a:rPr lang="en-US" dirty="0"/>
+              <a:rPr lang="en-US"/>
               <a:t>Displays </a:t>
             </a:r>
-          </a:p>
-          <a:p>
-            <a:pPr algn="just"/>
-            <a:r>
-              <a:rPr lang="en-US" b="1" dirty="0" smtClean="0"/>
+            <a:endParaRPr/>
+          </a:p>
+          <a:p>
+            <a:pPr algn="just">
+              <a:defRPr/>
+            </a:pPr>
+            <a:r>
+              <a:rPr lang="en-US" b="1"/>
               <a:t>Emissive </a:t>
             </a:r>
             <a:r>
-              <a:rPr lang="en-US" b="1" dirty="0"/>
+              <a:rPr lang="en-US" b="1"/>
               <a:t>Displays </a:t>
             </a:r>
             <a:r>
-              <a:rPr lang="en-US" dirty="0"/>
+              <a:rPr lang="en-US"/>
               <a:t>(or emitters) are devices that convert electrical energy into light. Plasma Panel (PDP) and light emitting diodes (LED) are examples of </a:t>
             </a:r>
             <a:r>
-              <a:rPr lang="en-US" b="1" dirty="0"/>
+              <a:rPr lang="en-US" b="1"/>
               <a:t>emissive displays</a:t>
             </a:r>
             <a:r>
-              <a:rPr lang="en-US" dirty="0"/>
+              <a:rPr lang="en-US"/>
               <a:t>. </a:t>
             </a:r>
-          </a:p>
-          <a:p>
-            <a:pPr algn="just"/>
-            <a:r>
-              <a:rPr lang="en-US" b="1" dirty="0" smtClean="0"/>
+            <a:endParaRPr/>
+          </a:p>
+          <a:p>
+            <a:pPr algn="just">
+              <a:defRPr/>
+            </a:pPr>
+            <a:r>
+              <a:rPr lang="en-US" b="1"/>
               <a:t>Non-emissive </a:t>
             </a:r>
             <a:r>
-              <a:rPr lang="en-US" dirty="0"/>
+              <a:rPr lang="en-US"/>
               <a:t>displays ( or non-emitters) use optical effects to convert sunlight or light from some other source into graphics pattern </a:t>
             </a:r>
             <a:r>
-              <a:rPr lang="en-US" dirty="0" err="1"/>
+              <a:rPr lang="en-US"/>
               <a:t>e.g</a:t>
             </a:r>
             <a:r>
-              <a:rPr lang="en-US" dirty="0"/>
+              <a:rPr lang="en-US"/>
               <a:t> Liquid Crystal Display (LCD) </a:t>
             </a:r>
-          </a:p>
-          <a:p>
-            <a:pPr algn="just"/>
-            <a:endParaRPr lang="en-US" dirty="0"/>
+            <a:endParaRPr/>
+          </a:p>
+          <a:p>
+            <a:pPr algn="just">
+              <a:defRPr/>
+            </a:pPr>
+            <a:endParaRPr lang="en-US"/>
           </a:p>
         </p:txBody>
       </p:sp>
     </p:spTree>
-    <p:extLst>
-      <p:ext uri="{BB962C8B-B14F-4D97-AF65-F5344CB8AC3E}">
-        <p14:creationId xmlns:p14="http://schemas.microsoft.com/office/powerpoint/2010/main" val="947378683"/>
-      </p:ext>
-    </p:extLst>
   </p:cSld>
   <p:clrMapOvr>
     <a:masterClrMapping/>
   </p:clrMapOvr>
+  <mc:AlternateContent xmlns:mc="http://schemas.openxmlformats.org/markup-compatibility/2006">
+    <mc:Choice xmlns:p159="http://schemas.microsoft.com/office/powerpoint/2015/09/main" xmlns:p14="http://schemas.microsoft.com/office/powerpoint/2010/main" Requires="p159">
+      <p:transition p14:dur="500" advClick="1"/>
+    </mc:Choice>
+    <mc:Fallback>
+      <p:transition advClick="1"/>
+    </mc:Fallback>
+  </mc:AlternateContent>
 </p:sld>
 </file>
 
 <file path=ppt/slides/slide3.xml><?xml version="1.0" encoding="utf-8"?>
-<p:sld xmlns:a="http://schemas.openxmlformats.org/drawingml/2006/main" xmlns:r="http://schemas.openxmlformats.org/officeDocument/2006/relationships" xmlns:p="http://schemas.openxmlformats.org/presentationml/2006/main">
-  <p:cSld>
+<p:sld xmlns:a="http://schemas.openxmlformats.org/drawingml/2006/main" xmlns:r="http://schemas.openxmlformats.org/officeDocument/2006/relationships" xmlns:p="http://schemas.openxmlformats.org/presentationml/2006/main" xmlns:m="http://schemas.openxmlformats.org/officeDocument/2006/math" xmlns:w="http://schemas.openxmlformats.org/wordprocessingml/2006/main" xmlns:mc="http://schemas.openxmlformats.org/markup-compatibility/2006" showMasterPhAnim="0" showMasterSp="1" show="1">
+  <p:cSld name="">
     <p:spTree>
       <p:nvGrpSpPr>
         <p:cNvPr id="1" name=""/>
         <p:cNvGrpSpPr/>
         <p:nvPr/>
       </p:nvGrpSpPr>
-      <p:grpSpPr>
+      <p:grpSpPr bwMode="auto">
         <a:xfrm>
           <a:off x="0" y="0"/>
           <a:ext cx="0" cy="0"/>
@@ -4912,7 +7248,7 @@
       </p:grpSpPr>
       <p:sp>
         <p:nvSpPr>
-          <p:cNvPr id="2" name="Title 1"/>
+          <p:cNvPr id="19733786" name="Title 1"/>
           <p:cNvSpPr>
             <a:spLocks noGrp="1"/>
           </p:cNvSpPr>
@@ -4920,23 +7256,27 @@
             <p:ph type="title"/>
           </p:nvPr>
         </p:nvSpPr>
-        <p:spPr/>
+        <p:spPr bwMode="auto"/>
         <p:txBody>
           <a:bodyPr>
             <a:normAutofit/>
           </a:bodyPr>
           <a:lstStyle/>
           <a:p>
-            <a:r>
-              <a:rPr lang="en-US" dirty="0"/>
+            <a:pPr>
+              <a:defRPr/>
+            </a:pPr>
+            <a:r>
+              <a:rPr lang="en-US"/>
               <a:t>Liquid Crystal Display (LCD) </a:t>
             </a:r>
-          </a:p>
-        </p:txBody>
-      </p:sp>
-      <p:sp>
-        <p:nvSpPr>
-          <p:cNvPr id="3" name="Content Placeholder 2"/>
+            <a:endParaRPr/>
+          </a:p>
+        </p:txBody>
+      </p:sp>
+      <p:sp>
+        <p:nvSpPr>
+          <p:cNvPr id="1439425382" name="Content Placeholder 2"/>
           <p:cNvSpPr>
             <a:spLocks noGrp="1"/>
           </p:cNvSpPr>
@@ -4944,142 +7284,168 @@
             <p:ph idx="1"/>
           </p:nvPr>
         </p:nvSpPr>
-        <p:spPr/>
+        <p:spPr bwMode="auto"/>
         <p:txBody>
           <a:bodyPr>
             <a:normAutofit fontScale="70000" lnSpcReduction="20000"/>
           </a:bodyPr>
           <a:lstStyle/>
           <a:p>
-            <a:pPr algn="just"/>
-            <a:r>
-              <a:rPr lang="en-US" dirty="0" smtClean="0"/>
+            <a:pPr algn="just">
+              <a:defRPr/>
+            </a:pPr>
+            <a:r>
+              <a:rPr lang="en-US"/>
               <a:t>A </a:t>
             </a:r>
             <a:r>
-              <a:rPr lang="en-US" b="1" dirty="0"/>
+              <a:rPr lang="en-US" b="1"/>
               <a:t>liquid crystal display </a:t>
             </a:r>
             <a:r>
-              <a:rPr lang="en-US" dirty="0"/>
+              <a:rPr lang="en-US"/>
               <a:t>is a thin, flat display device made up of any number of pixels arrayed in front of a light source or reflector. </a:t>
             </a:r>
-          </a:p>
-          <a:p>
-            <a:pPr algn="just"/>
-            <a:r>
-              <a:rPr lang="en-US" dirty="0" smtClean="0"/>
+            <a:endParaRPr/>
+          </a:p>
+          <a:p>
+            <a:pPr algn="just">
+              <a:defRPr/>
+            </a:pPr>
+            <a:r>
+              <a:rPr lang="en-US"/>
               <a:t>It </a:t>
             </a:r>
             <a:r>
-              <a:rPr lang="en-US" dirty="0"/>
+              <a:rPr lang="en-US"/>
               <a:t>uses very small amounts of electric power, and is suitable for use in battery-powered electronic devices. </a:t>
             </a:r>
-          </a:p>
-          <a:p>
-            <a:pPr algn="just"/>
-            <a:r>
-              <a:rPr lang="en-US" dirty="0" err="1" smtClean="0"/>
+            <a:endParaRPr/>
+          </a:p>
+          <a:p>
+            <a:pPr algn="just">
+              <a:defRPr/>
+            </a:pPr>
+            <a:r>
+              <a:rPr lang="en-US"/>
               <a:t>Colour</a:t>
             </a:r>
             <a:r>
-              <a:rPr lang="en-US" dirty="0" smtClean="0"/>
+              <a:rPr lang="en-US"/>
               <a:t> </a:t>
             </a:r>
             <a:r>
-              <a:rPr lang="en-US" dirty="0"/>
+              <a:rPr lang="en-US"/>
               <a:t>displays are possible by incorporating </a:t>
             </a:r>
             <a:r>
-              <a:rPr lang="en-US" dirty="0" err="1"/>
+              <a:rPr lang="en-US"/>
               <a:t>colour</a:t>
             </a:r>
             <a:r>
-              <a:rPr lang="en-US" dirty="0"/>
+              <a:rPr lang="en-US"/>
               <a:t> filters. </a:t>
             </a:r>
-          </a:p>
-          <a:p>
-            <a:pPr algn="just"/>
-            <a:r>
-              <a:rPr lang="en-US" dirty="0" smtClean="0"/>
+            <a:endParaRPr/>
+          </a:p>
+          <a:p>
+            <a:pPr algn="just">
+              <a:defRPr/>
+            </a:pPr>
+            <a:r>
+              <a:rPr lang="en-US"/>
               <a:t>The </a:t>
             </a:r>
             <a:r>
-              <a:rPr lang="en-US" dirty="0"/>
+              <a:rPr lang="en-US"/>
               <a:t>heart of all liquid crystal displays (LCDs) is a liquid crystal itself. A liquid crystal is a substance that flows like a liquid, but its molecules orient themselves in the manner of a crystal. </a:t>
             </a:r>
-          </a:p>
-          <a:p>
-            <a:pPr algn="just"/>
-            <a:r>
-              <a:rPr lang="en-US" dirty="0" smtClean="0"/>
+            <a:endParaRPr/>
+          </a:p>
+          <a:p>
+            <a:pPr algn="just">
+              <a:defRPr/>
+            </a:pPr>
+            <a:r>
+              <a:rPr lang="en-US"/>
               <a:t>That </a:t>
             </a:r>
             <a:r>
-              <a:rPr lang="en-US" dirty="0"/>
+              <a:rPr lang="en-US"/>
               <a:t>is, it is an organic compounds, whose macroscopic behavior resemble that of liquid but shows physical properties of crystals. </a:t>
             </a:r>
-          </a:p>
-          <a:p>
-            <a:pPr algn="just"/>
-            <a:r>
-              <a:rPr lang="en-US" dirty="0" smtClean="0"/>
+            <a:endParaRPr/>
+          </a:p>
+          <a:p>
+            <a:pPr algn="just">
+              <a:defRPr/>
+            </a:pPr>
+            <a:r>
+              <a:rPr lang="en-US"/>
               <a:t>A </a:t>
             </a:r>
             <a:r>
-              <a:rPr lang="en-US" dirty="0"/>
+              <a:rPr lang="en-US"/>
               <a:t>plane has </a:t>
             </a:r>
             <a:r>
-              <a:rPr lang="en-US" dirty="0" err="1"/>
+              <a:rPr lang="en-US"/>
               <a:t>nematic</a:t>
             </a:r>
             <a:r>
-              <a:rPr lang="en-US" dirty="0"/>
+              <a:rPr lang="en-US"/>
               <a:t>-like structure, but with each plane molecules change their direction. As a result the molecules display a helical twist through the material. </a:t>
             </a:r>
-          </a:p>
-          <a:p>
-            <a:pPr algn="just"/>
-            <a:r>
-              <a:rPr lang="en-US" dirty="0" smtClean="0"/>
+            <a:endParaRPr/>
+          </a:p>
+          <a:p>
+            <a:pPr algn="just">
+              <a:defRPr/>
+            </a:pPr>
+            <a:r>
+              <a:rPr lang="en-US"/>
               <a:t>They </a:t>
             </a:r>
             <a:r>
-              <a:rPr lang="en-US" dirty="0"/>
+              <a:rPr lang="en-US"/>
               <a:t>have characteristics like: rod-like molecular structure, or easily polarizable constituents. </a:t>
             </a:r>
-          </a:p>
-          <a:p>
-            <a:pPr algn="just"/>
-            <a:endParaRPr lang="en-US" dirty="0"/>
+            <a:endParaRPr/>
+          </a:p>
+          <a:p>
+            <a:pPr algn="just">
+              <a:defRPr/>
+            </a:pPr>
+            <a:endParaRPr lang="en-US"/>
           </a:p>
         </p:txBody>
       </p:sp>
     </p:spTree>
-    <p:extLst>
-      <p:ext uri="{BB962C8B-B14F-4D97-AF65-F5344CB8AC3E}">
-        <p14:creationId xmlns:p14="http://schemas.microsoft.com/office/powerpoint/2010/main" val="2188680089"/>
-      </p:ext>
-    </p:extLst>
   </p:cSld>
   <p:clrMapOvr>
     <a:masterClrMapping/>
   </p:clrMapOvr>
+  <mc:AlternateContent xmlns:mc="http://schemas.openxmlformats.org/markup-compatibility/2006">
+    <mc:Choice xmlns:p159="http://schemas.microsoft.com/office/powerpoint/2015/09/main" xmlns:p14="http://schemas.microsoft.com/office/powerpoint/2010/main" Requires="p159">
+      <p:transition p14:dur="500" advClick="1"/>
+    </mc:Choice>
+    <mc:Fallback>
+      <p:transition advClick="1"/>
+    </mc:Fallback>
+  </mc:AlternateContent>
 </p:sld>
 </file>
 
 <file path=ppt/slides/slide4.xml><?xml version="1.0" encoding="utf-8"?>
-<p:sld xmlns:a="http://schemas.openxmlformats.org/drawingml/2006/main" xmlns:r="http://schemas.openxmlformats.org/officeDocument/2006/relationships" xmlns:p="http://schemas.openxmlformats.org/presentationml/2006/main">
-  <p:cSld>
+<p:sld xmlns:a="http://schemas.openxmlformats.org/drawingml/2006/main" xmlns:r="http://schemas.openxmlformats.org/officeDocument/2006/relationships" xmlns:p="http://schemas.openxmlformats.org/presentationml/2006/main" xmlns:m="http://schemas.openxmlformats.org/officeDocument/2006/math" xmlns:w="http://schemas.openxmlformats.org/wordprocessingml/2006/main" xmlns:mc="http://schemas.openxmlformats.org/markup-compatibility/2006" showMasterPhAnim="0" showMasterSp="1" show="1">
+  <p:cSld name="">
     <p:spTree>
       <p:nvGrpSpPr>
         <p:cNvPr id="1" name=""/>
         <p:cNvGrpSpPr/>
         <p:nvPr/>
       </p:nvGrpSpPr>
-      <p:grpSpPr>
+      <p:grpSpPr bwMode="auto">
         <a:xfrm>
           <a:off x="0" y="0"/>
           <a:ext cx="0" cy="0"/>
@@ -5089,7 +7455,7 @@
       </p:grpSpPr>
       <p:sp>
         <p:nvSpPr>
-          <p:cNvPr id="2" name="Title 1"/>
+          <p:cNvPr id="1568579072" name="Title 1"/>
           <p:cNvSpPr>
             <a:spLocks noGrp="1"/>
           </p:cNvSpPr>
@@ -5097,23 +7463,27 @@
             <p:ph type="title"/>
           </p:nvPr>
         </p:nvSpPr>
-        <p:spPr/>
+        <p:spPr bwMode="auto"/>
         <p:txBody>
           <a:bodyPr>
             <a:normAutofit/>
           </a:bodyPr>
           <a:lstStyle/>
           <a:p>
-            <a:r>
-              <a:rPr lang="en-US" dirty="0"/>
+            <a:pPr>
+              <a:defRPr/>
+            </a:pPr>
+            <a:r>
+              <a:rPr lang="en-US"/>
               <a:t>LCD Construction </a:t>
             </a:r>
-          </a:p>
-        </p:txBody>
-      </p:sp>
-      <p:sp>
-        <p:nvSpPr>
-          <p:cNvPr id="3" name="Content Placeholder 2"/>
+            <a:endParaRPr/>
+          </a:p>
+        </p:txBody>
+      </p:sp>
+      <p:sp>
+        <p:nvSpPr>
+          <p:cNvPr id="718106055" name="Content Placeholder 2"/>
           <p:cNvSpPr>
             <a:spLocks noGrp="1"/>
           </p:cNvSpPr>
@@ -5121,70 +7491,71 @@
             <p:ph idx="1"/>
           </p:nvPr>
         </p:nvSpPr>
-        <p:spPr/>
-        <p:txBody>
-          <a:bodyPr/>
-          <a:lstStyle/>
-          <a:p>
-            <a:pPr algn="just"/>
-            <a:r>
-              <a:rPr lang="en-US" sz="2400" dirty="0" smtClean="0"/>
+        <p:spPr bwMode="auto"/>
+        <p:txBody>
+          <a:bodyPr/>
+          <a:lstStyle/>
+          <a:p>
+            <a:pPr algn="just">
+              <a:defRPr/>
+            </a:pPr>
+            <a:r>
+              <a:rPr lang="en-US" sz="2400"/>
               <a:t>Each </a:t>
             </a:r>
             <a:r>
-              <a:rPr lang="en-US" sz="2400" dirty="0"/>
+              <a:rPr lang="en-US" sz="2400"/>
               <a:t>pixel of an LCD consists of a layer of molecules aligned between two transparent electrodes, and two polarizing filters, whose axes are perpendicular. </a:t>
             </a:r>
-          </a:p>
-          <a:p>
-            <a:pPr algn="just"/>
-            <a:r>
-              <a:rPr lang="en-US" sz="2400" dirty="0" smtClean="0"/>
+            <a:endParaRPr/>
+          </a:p>
+          <a:p>
+            <a:pPr algn="just">
+              <a:defRPr/>
+            </a:pPr>
+            <a:r>
+              <a:rPr lang="en-US" sz="2400"/>
               <a:t>Orientation </a:t>
             </a:r>
             <a:r>
-              <a:rPr lang="en-US" sz="2400" dirty="0"/>
+              <a:rPr lang="en-US" sz="2400"/>
               <a:t>of the liquid crystal molecules is determined by the alignment at the surfaces. </a:t>
             </a:r>
-          </a:p>
-          <a:p>
-            <a:pPr algn="just"/>
-            <a:r>
-              <a:rPr lang="en-US" sz="2400" b="1" dirty="0" smtClean="0"/>
+            <a:endParaRPr/>
+          </a:p>
+          <a:p>
+            <a:pPr algn="just">
+              <a:defRPr/>
+            </a:pPr>
+            <a:r>
+              <a:rPr lang="en-US" sz="2400" b="1"/>
               <a:t>Six </a:t>
             </a:r>
             <a:r>
-              <a:rPr lang="en-US" sz="2400" b="1" dirty="0"/>
+              <a:rPr lang="en-US" sz="2400" b="1"/>
               <a:t>Layers: </a:t>
             </a:r>
-            <a:endParaRPr lang="en-US" sz="2400" dirty="0"/>
-          </a:p>
-          <a:p>
-            <a:pPr algn="just"/>
-            <a:endParaRPr lang="en-US" dirty="0"/>
+            <a:endParaRPr lang="en-US" sz="2400"/>
+          </a:p>
+          <a:p>
+            <a:pPr algn="just">
+              <a:defRPr/>
+            </a:pPr>
+            <a:endParaRPr lang="en-US"/>
           </a:p>
         </p:txBody>
       </p:sp>
       <p:pic>
         <p:nvPicPr>
-          <p:cNvPr id="16386" name="Picture 2"/>
+          <p:cNvPr id="337282573" name="Picture 2"/>
           <p:cNvPicPr>
             <a:picLocks noChangeAspect="1" noChangeArrowheads="1"/>
           </p:cNvPicPr>
           <p:nvPr/>
         </p:nvPicPr>
-        <p:blipFill>
-          <a:blip r:embed="rId2">
-            <a:extLst>
-              <a:ext uri="{28A0092B-C50C-407E-A947-70E740481C1C}">
-                <a14:useLocalDpi xmlns:a14="http://schemas.microsoft.com/office/drawing/2010/main" val="0"/>
-              </a:ext>
-            </a:extLst>
-          </a:blip>
-          <a:srcRect/>
-          <a:stretch>
-            <a:fillRect/>
-          </a:stretch>
+        <p:blipFill rotWithShape="1">
+          <a:blip r:embed="rId3"/>
+          <a:stretch/>
         </p:blipFill>
         <p:spPr bwMode="auto">
           <a:xfrm>
@@ -5199,59 +7570,34 @@
             <a:noFill/>
           </a:ln>
           <a:effectLst/>
-          <a:extLst>
-            <a:ext uri="{909E8E84-426E-40DD-AFC4-6F175D3DCCD1}">
-              <a14:hiddenFill xmlns:a14="http://schemas.microsoft.com/office/drawing/2010/main">
-                <a:solidFill>
-                  <a:schemeClr val="accent1"/>
-                </a:solidFill>
-              </a14:hiddenFill>
-            </a:ext>
-            <a:ext uri="{91240B29-F687-4F45-9708-019B960494DF}">
-              <a14:hiddenLine xmlns:a14="http://schemas.microsoft.com/office/drawing/2010/main" w="9525">
-                <a:solidFill>
-                  <a:schemeClr val="tx1"/>
-                </a:solidFill>
-                <a:miter lim="800000"/>
-                <a:headEnd/>
-                <a:tailEnd/>
-              </a14:hiddenLine>
-            </a:ext>
-            <a:ext uri="{AF507438-7753-43E0-B8FC-AC1667EBCBE1}">
-              <a14:hiddenEffects xmlns:a14="http://schemas.microsoft.com/office/drawing/2010/main">
-                <a:effectLst>
-                  <a:outerShdw dist="35921" dir="2700000" algn="ctr" rotWithShape="0">
-                    <a:schemeClr val="bg2"/>
-                  </a:outerShdw>
-                </a:effectLst>
-              </a14:hiddenEffects>
-            </a:ext>
-          </a:extLst>
         </p:spPr>
       </p:pic>
     </p:spTree>
-    <p:extLst>
-      <p:ext uri="{BB962C8B-B14F-4D97-AF65-F5344CB8AC3E}">
-        <p14:creationId xmlns:p14="http://schemas.microsoft.com/office/powerpoint/2010/main" val="390775330"/>
-      </p:ext>
-    </p:extLst>
   </p:cSld>
   <p:clrMapOvr>
     <a:masterClrMapping/>
   </p:clrMapOvr>
+  <mc:AlternateContent xmlns:mc="http://schemas.openxmlformats.org/markup-compatibility/2006">
+    <mc:Choice xmlns:p159="http://schemas.microsoft.com/office/powerpoint/2015/09/main" xmlns:p14="http://schemas.microsoft.com/office/powerpoint/2010/main" Requires="p159">
+      <p:transition p14:dur="500" advClick="1"/>
+    </mc:Choice>
+    <mc:Fallback>
+      <p:transition advClick="1"/>
+    </mc:Fallback>
+  </mc:AlternateContent>
 </p:sld>
 </file>
 
 <file path=ppt/slides/slide5.xml><?xml version="1.0" encoding="utf-8"?>
-<p:sld xmlns:a="http://schemas.openxmlformats.org/drawingml/2006/main" xmlns:r="http://schemas.openxmlformats.org/officeDocument/2006/relationships" xmlns:p="http://schemas.openxmlformats.org/presentationml/2006/main">
-  <p:cSld>
+<p:sld xmlns:a="http://schemas.openxmlformats.org/drawingml/2006/main" xmlns:r="http://schemas.openxmlformats.org/officeDocument/2006/relationships" xmlns:p="http://schemas.openxmlformats.org/presentationml/2006/main" xmlns:m="http://schemas.openxmlformats.org/officeDocument/2006/math" xmlns:w="http://schemas.openxmlformats.org/wordprocessingml/2006/main" xmlns:mc="http://schemas.openxmlformats.org/markup-compatibility/2006" showMasterPhAnim="0" showMasterSp="1" show="1">
+  <p:cSld name="">
     <p:spTree>
       <p:nvGrpSpPr>
         <p:cNvPr id="1" name=""/>
         <p:cNvGrpSpPr/>
         <p:nvPr/>
       </p:nvGrpSpPr>
-      <p:grpSpPr>
+      <p:grpSpPr bwMode="auto">
         <a:xfrm>
           <a:off x="0" y="0"/>
           <a:ext cx="0" cy="0"/>
@@ -5261,7 +7607,7 @@
       </p:grpSpPr>
       <p:sp>
         <p:nvSpPr>
-          <p:cNvPr id="2" name="Title 1"/>
+          <p:cNvPr id="3069451" name="Title 1"/>
           <p:cNvSpPr>
             <a:spLocks noGrp="1"/>
           </p:cNvSpPr>
@@ -5269,18 +7615,21 @@
             <p:ph type="title"/>
           </p:nvPr>
         </p:nvSpPr>
-        <p:spPr/>
-        <p:txBody>
-          <a:bodyPr/>
-          <a:lstStyle/>
-          <a:p>
+        <p:spPr bwMode="auto"/>
+        <p:txBody>
+          <a:bodyPr/>
+          <a:lstStyle/>
+          <a:p>
+            <a:pPr>
+              <a:defRPr/>
+            </a:pPr>
             <a:endParaRPr lang="en-US"/>
           </a:p>
         </p:txBody>
       </p:sp>
       <p:sp>
         <p:nvSpPr>
-          <p:cNvPr id="3" name="Content Placeholder 2"/>
+          <p:cNvPr id="1646726596" name="Content Placeholder 2"/>
           <p:cNvSpPr>
             <a:spLocks noGrp="1"/>
           </p:cNvSpPr>
@@ -5288,35 +7637,29 @@
             <p:ph idx="1"/>
           </p:nvPr>
         </p:nvSpPr>
-        <p:spPr/>
-        <p:txBody>
-          <a:bodyPr/>
-          <a:lstStyle/>
-          <a:p>
-            <a:endParaRPr lang="en-US" dirty="0"/>
+        <p:spPr bwMode="auto"/>
+        <p:txBody>
+          <a:bodyPr/>
+          <a:lstStyle/>
+          <a:p>
+            <a:pPr>
+              <a:defRPr/>
+            </a:pPr>
+            <a:endParaRPr lang="en-US"/>
           </a:p>
         </p:txBody>
       </p:sp>
       <p:pic>
         <p:nvPicPr>
-          <p:cNvPr id="17410" name="Picture 2"/>
+          <p:cNvPr id="1051858687" name="Picture 2"/>
           <p:cNvPicPr>
             <a:picLocks noChangeAspect="1" noChangeArrowheads="1"/>
           </p:cNvPicPr>
           <p:nvPr/>
         </p:nvPicPr>
-        <p:blipFill>
-          <a:blip r:embed="rId2">
-            <a:extLst>
-              <a:ext uri="{28A0092B-C50C-407E-A947-70E740481C1C}">
-                <a14:useLocalDpi xmlns:a14="http://schemas.microsoft.com/office/drawing/2010/main" val="0"/>
-              </a:ext>
-            </a:extLst>
-          </a:blip>
-          <a:srcRect/>
-          <a:stretch>
-            <a:fillRect/>
-          </a:stretch>
+        <p:blipFill rotWithShape="1">
+          <a:blip r:embed="rId3"/>
+          <a:stretch/>
         </p:blipFill>
         <p:spPr bwMode="auto">
           <a:xfrm>
@@ -5331,59 +7674,34 @@
             <a:noFill/>
           </a:ln>
           <a:effectLst/>
-          <a:extLst>
-            <a:ext uri="{909E8E84-426E-40DD-AFC4-6F175D3DCCD1}">
-              <a14:hiddenFill xmlns:a14="http://schemas.microsoft.com/office/drawing/2010/main">
-                <a:solidFill>
-                  <a:schemeClr val="accent1"/>
-                </a:solidFill>
-              </a14:hiddenFill>
-            </a:ext>
-            <a:ext uri="{91240B29-F687-4F45-9708-019B960494DF}">
-              <a14:hiddenLine xmlns:a14="http://schemas.microsoft.com/office/drawing/2010/main" w="9525">
-                <a:solidFill>
-                  <a:schemeClr val="tx1"/>
-                </a:solidFill>
-                <a:miter lim="800000"/>
-                <a:headEnd/>
-                <a:tailEnd/>
-              </a14:hiddenLine>
-            </a:ext>
-            <a:ext uri="{AF507438-7753-43E0-B8FC-AC1667EBCBE1}">
-              <a14:hiddenEffects xmlns:a14="http://schemas.microsoft.com/office/drawing/2010/main">
-                <a:effectLst>
-                  <a:outerShdw dist="35921" dir="2700000" algn="ctr" rotWithShape="0">
-                    <a:schemeClr val="bg2"/>
-                  </a:outerShdw>
-                </a:effectLst>
-              </a14:hiddenEffects>
-            </a:ext>
-          </a:extLst>
         </p:spPr>
       </p:pic>
     </p:spTree>
-    <p:extLst>
-      <p:ext uri="{BB962C8B-B14F-4D97-AF65-F5344CB8AC3E}">
-        <p14:creationId xmlns:p14="http://schemas.microsoft.com/office/powerpoint/2010/main" val="1179609911"/>
-      </p:ext>
-    </p:extLst>
   </p:cSld>
   <p:clrMapOvr>
     <a:masterClrMapping/>
   </p:clrMapOvr>
+  <mc:AlternateContent xmlns:mc="http://schemas.openxmlformats.org/markup-compatibility/2006">
+    <mc:Choice xmlns:p159="http://schemas.microsoft.com/office/powerpoint/2015/09/main" xmlns:p14="http://schemas.microsoft.com/office/powerpoint/2010/main" Requires="p159">
+      <p:transition p14:dur="500" advClick="1"/>
+    </mc:Choice>
+    <mc:Fallback>
+      <p:transition advClick="1"/>
+    </mc:Fallback>
+  </mc:AlternateContent>
 </p:sld>
 </file>
 
 <file path=ppt/slides/slide6.xml><?xml version="1.0" encoding="utf-8"?>
-<p:sld xmlns:a="http://schemas.openxmlformats.org/drawingml/2006/main" xmlns:r="http://schemas.openxmlformats.org/officeDocument/2006/relationships" xmlns:p="http://schemas.openxmlformats.org/presentationml/2006/main">
-  <p:cSld>
+<p:sld xmlns:a="http://schemas.openxmlformats.org/drawingml/2006/main" xmlns:r="http://schemas.openxmlformats.org/officeDocument/2006/relationships" xmlns:p="http://schemas.openxmlformats.org/presentationml/2006/main" xmlns:m="http://schemas.openxmlformats.org/officeDocument/2006/math" xmlns:w="http://schemas.openxmlformats.org/wordprocessingml/2006/main" xmlns:mc="http://schemas.openxmlformats.org/markup-compatibility/2006" showMasterPhAnim="0" showMasterSp="1" show="1">
+  <p:cSld name="">
     <p:spTree>
       <p:nvGrpSpPr>
         <p:cNvPr id="1" name=""/>
         <p:cNvGrpSpPr/>
         <p:nvPr/>
       </p:nvGrpSpPr>
-      <p:grpSpPr>
+      <p:grpSpPr bwMode="auto">
         <a:xfrm>
           <a:off x="0" y="0"/>
           <a:ext cx="0" cy="0"/>
@@ -5393,7 +7711,7 @@
       </p:grpSpPr>
       <p:sp>
         <p:nvSpPr>
-          <p:cNvPr id="2" name="Title 1"/>
+          <p:cNvPr id="165215923" name="Title 1"/>
           <p:cNvSpPr>
             <a:spLocks noGrp="1"/>
           </p:cNvSpPr>
@@ -5401,28 +7719,31 @@
             <p:ph type="title"/>
           </p:nvPr>
         </p:nvSpPr>
-        <p:spPr/>
+        <p:spPr bwMode="auto"/>
         <p:txBody>
           <a:bodyPr>
             <a:normAutofit/>
           </a:bodyPr>
           <a:lstStyle/>
           <a:p>
-            <a:r>
-              <a:rPr lang="en-US" b="1" dirty="0"/>
+            <a:pPr>
+              <a:defRPr/>
+            </a:pPr>
+            <a:r>
+              <a:rPr lang="en-US" b="1"/>
               <a:t>Types of Liquid </a:t>
             </a:r>
             <a:r>
-              <a:rPr lang="en-US" b="1" dirty="0" smtClean="0"/>
+              <a:rPr lang="en-US" b="1"/>
               <a:t>Crystals</a:t>
             </a:r>
-            <a:endParaRPr lang="en-US" dirty="0"/>
-          </a:p>
-        </p:txBody>
-      </p:sp>
-      <p:sp>
-        <p:nvSpPr>
-          <p:cNvPr id="3" name="Content Placeholder 2"/>
+            <a:endParaRPr lang="en-US"/>
+          </a:p>
+        </p:txBody>
+      </p:sp>
+      <p:sp>
+        <p:nvSpPr>
+          <p:cNvPr id="892958649" name="Content Placeholder 2"/>
           <p:cNvSpPr>
             <a:spLocks noGrp="1"/>
           </p:cNvSpPr>
@@ -5430,99 +7751,114 @@
             <p:ph idx="1"/>
           </p:nvPr>
         </p:nvSpPr>
-        <p:spPr/>
-        <p:txBody>
-          <a:bodyPr/>
-          <a:lstStyle/>
-          <a:p>
-            <a:pPr algn="just"/>
-            <a:r>
-              <a:rPr lang="en-US" b="1" dirty="0" err="1" smtClean="0"/>
+        <p:spPr bwMode="auto"/>
+        <p:txBody>
+          <a:bodyPr/>
+          <a:lstStyle/>
+          <a:p>
+            <a:pPr algn="just">
+              <a:defRPr/>
+            </a:pPr>
+            <a:r>
+              <a:rPr lang="en-US" b="1"/>
               <a:t>Nematic</a:t>
             </a:r>
             <a:r>
-              <a:rPr lang="en-US" b="1" dirty="0" smtClean="0"/>
+              <a:rPr lang="en-US" b="1"/>
               <a:t> </a:t>
             </a:r>
             <a:r>
-              <a:rPr lang="en-US" b="1" dirty="0"/>
+              <a:rPr lang="en-US" b="1"/>
               <a:t>Liquid Crystal</a:t>
             </a:r>
             <a:r>
-              <a:rPr lang="en-US" dirty="0"/>
+              <a:rPr lang="en-US"/>
               <a:t> – molecules are aligned in the same direction but not arranged in layers.</a:t>
             </a:r>
-          </a:p>
-          <a:p>
-            <a:pPr algn="just"/>
-            <a:r>
-              <a:rPr lang="en-US" b="1" dirty="0" err="1"/>
+            <a:endParaRPr/>
+          </a:p>
+          <a:p>
+            <a:pPr algn="just">
+              <a:defRPr/>
+            </a:pPr>
+            <a:r>
+              <a:rPr lang="en-US" b="1"/>
               <a:t>Smectic</a:t>
             </a:r>
             <a:r>
-              <a:rPr lang="en-US" b="1" dirty="0"/>
+              <a:rPr lang="en-US" b="1"/>
               <a:t> Liquid Crystal</a:t>
             </a:r>
             <a:r>
-              <a:rPr lang="en-US" dirty="0"/>
+              <a:rPr lang="en-US"/>
               <a:t> – molecules form </a:t>
             </a:r>
             <a:r>
-              <a:rPr lang="en-US" b="1" dirty="0"/>
+              <a:rPr lang="en-US" b="1"/>
               <a:t>layered structures</a:t>
             </a:r>
             <a:r>
-              <a:rPr lang="en-US" dirty="0"/>
+              <a:rPr lang="en-US"/>
               <a:t>.</a:t>
             </a:r>
-          </a:p>
-          <a:p>
-            <a:pPr algn="just"/>
-            <a:r>
-              <a:rPr lang="en-US" b="1" dirty="0"/>
+            <a:endParaRPr/>
+          </a:p>
+          <a:p>
+            <a:pPr algn="just">
+              <a:defRPr/>
+            </a:pPr>
+            <a:r>
+              <a:rPr lang="en-US" b="1"/>
               <a:t>Cholesteric Liquid Crystal</a:t>
             </a:r>
             <a:r>
-              <a:rPr lang="en-US" dirty="0"/>
+              <a:rPr lang="en-US"/>
               <a:t> – molecules form a </a:t>
             </a:r>
             <a:r>
-              <a:rPr lang="en-US" b="1" dirty="0"/>
+              <a:rPr lang="en-US" b="1"/>
               <a:t>twisted or spiral arrangement</a:t>
             </a:r>
             <a:r>
-              <a:rPr lang="en-US" dirty="0"/>
+              <a:rPr lang="en-US"/>
               <a:t>.</a:t>
             </a:r>
-          </a:p>
-          <a:p>
-            <a:endParaRPr lang="en-US" dirty="0"/>
+            <a:endParaRPr/>
+          </a:p>
+          <a:p>
+            <a:pPr>
+              <a:defRPr/>
+            </a:pPr>
+            <a:endParaRPr lang="en-US"/>
           </a:p>
         </p:txBody>
       </p:sp>
     </p:spTree>
-    <p:extLst>
-      <p:ext uri="{BB962C8B-B14F-4D97-AF65-F5344CB8AC3E}">
-        <p14:creationId xmlns:p14="http://schemas.microsoft.com/office/powerpoint/2010/main" val="3557874558"/>
-      </p:ext>
-    </p:extLst>
   </p:cSld>
   <p:clrMapOvr>
     <a:masterClrMapping/>
   </p:clrMapOvr>
+  <mc:AlternateContent xmlns:mc="http://schemas.openxmlformats.org/markup-compatibility/2006">
+    <mc:Choice xmlns:p159="http://schemas.microsoft.com/office/powerpoint/2015/09/main" xmlns:p14="http://schemas.microsoft.com/office/powerpoint/2010/main" Requires="p159">
+      <p:transition p14:dur="500" advClick="1"/>
+    </mc:Choice>
+    <mc:Fallback>
+      <p:transition advClick="1"/>
+    </mc:Fallback>
+  </mc:AlternateContent>
 </p:sld>
 </file>
 
 <file path=ppt/slides/slide7.xml><?xml version="1.0" encoding="utf-8"?>
-<p:sld xmlns:a="http://schemas.openxmlformats.org/drawingml/2006/main" xmlns:r="http://schemas.openxmlformats.org/officeDocument/2006/relationships" xmlns:p="http://schemas.openxmlformats.org/presentationml/2006/main">
-  <p:cSld>
+<p:sld xmlns:a="http://schemas.openxmlformats.org/drawingml/2006/main" xmlns:r="http://schemas.openxmlformats.org/officeDocument/2006/relationships" xmlns:p="http://schemas.openxmlformats.org/presentationml/2006/main" xmlns:m="http://schemas.openxmlformats.org/officeDocument/2006/math" xmlns:w="http://schemas.openxmlformats.org/wordprocessingml/2006/main" xmlns:mc="http://schemas.openxmlformats.org/markup-compatibility/2006" showMasterPhAnim="0" showMasterSp="1" show="1">
+  <p:cSld name="">
     <p:spTree>
       <p:nvGrpSpPr>
         <p:cNvPr id="1" name=""/>
         <p:cNvGrpSpPr/>
         <p:nvPr/>
       </p:nvGrpSpPr>
-      <p:grpSpPr>
+      <p:grpSpPr bwMode="auto">
         <a:xfrm>
           <a:off x="0" y="0"/>
           <a:ext cx="0" cy="0"/>
@@ -5532,7 +7868,7 @@
       </p:grpSpPr>
       <p:sp>
         <p:nvSpPr>
-          <p:cNvPr id="2" name="Title 1"/>
+          <p:cNvPr id="858125072" name="Title 1"/>
           <p:cNvSpPr>
             <a:spLocks noGrp="1"/>
           </p:cNvSpPr>
@@ -5540,23 +7876,27 @@
             <p:ph type="title"/>
           </p:nvPr>
         </p:nvSpPr>
-        <p:spPr/>
+        <p:spPr bwMode="auto"/>
         <p:txBody>
           <a:bodyPr>
             <a:normAutofit/>
           </a:bodyPr>
           <a:lstStyle/>
           <a:p>
-            <a:r>
-              <a:rPr lang="en-US" dirty="0"/>
+            <a:pPr>
+              <a:defRPr/>
+            </a:pPr>
+            <a:r>
+              <a:rPr lang="en-US"/>
               <a:t>Basic Principle </a:t>
             </a:r>
-          </a:p>
-        </p:txBody>
-      </p:sp>
-      <p:sp>
-        <p:nvSpPr>
-          <p:cNvPr id="3" name="Content Placeholder 2"/>
+            <a:endParaRPr/>
+          </a:p>
+        </p:txBody>
+      </p:sp>
+      <p:sp>
+        <p:nvSpPr>
+          <p:cNvPr id="1001182725" name="Content Placeholder 2"/>
           <p:cNvSpPr>
             <a:spLocks noGrp="1"/>
           </p:cNvSpPr>
@@ -5564,106 +7904,111 @@
             <p:ph idx="1"/>
           </p:nvPr>
         </p:nvSpPr>
-        <p:spPr/>
+        <p:spPr bwMode="auto"/>
         <p:txBody>
           <a:bodyPr>
             <a:normAutofit/>
           </a:bodyPr>
           <a:lstStyle/>
           <a:p>
-            <a:pPr algn="just"/>
-            <a:r>
-              <a:rPr lang="en-US" sz="2000" dirty="0" smtClean="0"/>
+            <a:pPr algn="just">
+              <a:defRPr/>
+            </a:pPr>
+            <a:r>
+              <a:rPr lang="en-US" sz="2000"/>
               <a:t>Most </a:t>
             </a:r>
             <a:r>
-              <a:rPr lang="en-US" sz="2000" dirty="0"/>
+              <a:rPr lang="en-US" sz="2000"/>
               <a:t>of the LCDs use twisted </a:t>
             </a:r>
             <a:r>
-              <a:rPr lang="en-US" sz="2000" dirty="0" err="1"/>
+              <a:rPr lang="en-US" sz="2000"/>
               <a:t>nematic</a:t>
             </a:r>
             <a:r>
-              <a:rPr lang="en-US" sz="2000" dirty="0"/>
+              <a:rPr lang="en-US" sz="2000"/>
               <a:t> cells. </a:t>
             </a:r>
-          </a:p>
-          <a:p>
-            <a:pPr algn="just"/>
-            <a:r>
-              <a:rPr lang="en-US" sz="2000" dirty="0" smtClean="0"/>
+            <a:endParaRPr/>
+          </a:p>
+          <a:p>
+            <a:pPr algn="just">
+              <a:defRPr/>
+            </a:pPr>
+            <a:r>
+              <a:rPr lang="en-US" sz="2000"/>
               <a:t>When </a:t>
             </a:r>
             <a:r>
-              <a:rPr lang="en-US" sz="2000" dirty="0"/>
+              <a:rPr lang="en-US" sz="2000"/>
               <a:t>a </a:t>
             </a:r>
             <a:r>
-              <a:rPr lang="en-US" sz="2000" dirty="0" err="1"/>
+              <a:rPr lang="en-US" sz="2000"/>
               <a:t>nematic</a:t>
             </a:r>
             <a:r>
-              <a:rPr lang="en-US" sz="2000" dirty="0"/>
+              <a:rPr lang="en-US" sz="2000"/>
               <a:t> liquid crystal material comes into contact with a solid surface molecules become aligned either perpendicular to the surface (</a:t>
             </a:r>
             <a:r>
-              <a:rPr lang="en-US" sz="2000" dirty="0" err="1"/>
+              <a:rPr lang="en-US" sz="2000"/>
               <a:t>homeotropic</a:t>
             </a:r>
             <a:r>
-              <a:rPr lang="en-US" sz="2000" dirty="0"/>
+              <a:rPr lang="en-US" sz="2000"/>
               <a:t> ordering) or parallel to the surface (homogeneous ordering). </a:t>
             </a:r>
-          </a:p>
-          <a:p>
-            <a:pPr algn="just"/>
-            <a:r>
-              <a:rPr lang="en-US" sz="2000" dirty="0" smtClean="0"/>
+            <a:endParaRPr/>
+          </a:p>
+          <a:p>
+            <a:pPr algn="just">
+              <a:defRPr/>
+            </a:pPr>
+            <a:r>
+              <a:rPr lang="en-US" sz="2000"/>
               <a:t>These </a:t>
             </a:r>
             <a:r>
-              <a:rPr lang="en-US" sz="2000" dirty="0"/>
+              <a:rPr lang="en-US" sz="2000"/>
               <a:t>two forms can be produced by suitable treatment of the surface. </a:t>
             </a:r>
-          </a:p>
-          <a:p>
-            <a:pPr algn="just"/>
-            <a:r>
-              <a:rPr lang="en-US" sz="2000" dirty="0" smtClean="0"/>
+            <a:endParaRPr/>
+          </a:p>
+          <a:p>
+            <a:pPr algn="just">
+              <a:defRPr/>
+            </a:pPr>
+            <a:r>
+              <a:rPr lang="en-US" sz="2000"/>
               <a:t>The </a:t>
             </a:r>
             <a:r>
-              <a:rPr lang="en-US" sz="2000" dirty="0"/>
+              <a:rPr lang="en-US" sz="2000"/>
               <a:t>most important electrical characteristic of liquid crystal materials is that the direction of the molecules can be controlled by the electric field. Usually the molecules tend to be orientated along the electric field. </a:t>
             </a:r>
-          </a:p>
-          <a:p>
-            <a:pPr algn="just"/>
-            <a:endParaRPr lang="en-US" sz="2000" dirty="0"/>
+            <a:endParaRPr/>
+          </a:p>
+          <a:p>
+            <a:pPr algn="just">
+              <a:defRPr/>
+            </a:pPr>
+            <a:endParaRPr lang="en-US" sz="2000"/>
           </a:p>
         </p:txBody>
       </p:sp>
       <p:pic>
         <p:nvPicPr>
-          <p:cNvPr id="18434" name="Picture 2"/>
+          <p:cNvPr id="2029820458" name="Picture 2"/>
           <p:cNvPicPr>
             <a:picLocks noChangeAspect="1" noChangeArrowheads="1"/>
           </p:cNvPicPr>
           <p:nvPr/>
         </p:nvPicPr>
-        <p:blipFill>
-          <a:blip r:embed="rId2">
-            <a:extLst>
-              <a:ext uri="{28A0092B-C50C-407E-A947-70E740481C1C}">
-                <a14:useLocalDpi xmlns:a14="http://schemas.microsoft.com/office/drawing/2010/main" val="0"/>
-              </a:ext>
-            </a:extLst>
-          </a:blip>
-          <a:srcRect/>
-          <a:stretch>
-            <a:fillRect/>
-          </a:stretch>
+        <p:blipFill rotWithShape="1">
+          <a:blip r:embed="rId3"/>
+          <a:stretch/>
         </p:blipFill>
         <p:spPr bwMode="auto">
           <a:xfrm>
@@ -5678,59 +8023,34 @@
             <a:noFill/>
           </a:ln>
           <a:effectLst/>
-          <a:extLst>
-            <a:ext uri="{909E8E84-426E-40DD-AFC4-6F175D3DCCD1}">
-              <a14:hiddenFill xmlns:a14="http://schemas.microsoft.com/office/drawing/2010/main">
-                <a:solidFill>
-                  <a:schemeClr val="accent1"/>
-                </a:solidFill>
-              </a14:hiddenFill>
-            </a:ext>
-            <a:ext uri="{91240B29-F687-4F45-9708-019B960494DF}">
-              <a14:hiddenLine xmlns:a14="http://schemas.microsoft.com/office/drawing/2010/main" w="9525">
-                <a:solidFill>
-                  <a:schemeClr val="tx1"/>
-                </a:solidFill>
-                <a:miter lim="800000"/>
-                <a:headEnd/>
-                <a:tailEnd/>
-              </a14:hiddenLine>
-            </a:ext>
-            <a:ext uri="{AF507438-7753-43E0-B8FC-AC1667EBCBE1}">
-              <a14:hiddenEffects xmlns:a14="http://schemas.microsoft.com/office/drawing/2010/main">
-                <a:effectLst>
-                  <a:outerShdw dist="35921" dir="2700000" algn="ctr" rotWithShape="0">
-                    <a:schemeClr val="bg2"/>
-                  </a:outerShdw>
-                </a:effectLst>
-              </a14:hiddenEffects>
-            </a:ext>
-          </a:extLst>
         </p:spPr>
       </p:pic>
     </p:spTree>
-    <p:extLst>
-      <p:ext uri="{BB962C8B-B14F-4D97-AF65-F5344CB8AC3E}">
-        <p14:creationId xmlns:p14="http://schemas.microsoft.com/office/powerpoint/2010/main" val="1247240203"/>
-      </p:ext>
-    </p:extLst>
   </p:cSld>
   <p:clrMapOvr>
     <a:masterClrMapping/>
   </p:clrMapOvr>
+  <mc:AlternateContent xmlns:mc="http://schemas.openxmlformats.org/markup-compatibility/2006">
+    <mc:Choice xmlns:p159="http://schemas.microsoft.com/office/powerpoint/2015/09/main" xmlns:p14="http://schemas.microsoft.com/office/powerpoint/2010/main" Requires="p159">
+      <p:transition p14:dur="500" advClick="1"/>
+    </mc:Choice>
+    <mc:Fallback>
+      <p:transition advClick="1"/>
+    </mc:Fallback>
+  </mc:AlternateContent>
 </p:sld>
 </file>
 
 <file path=ppt/slides/slide8.xml><?xml version="1.0" encoding="utf-8"?>
-<p:sld xmlns:a="http://schemas.openxmlformats.org/drawingml/2006/main" xmlns:r="http://schemas.openxmlformats.org/officeDocument/2006/relationships" xmlns:p="http://schemas.openxmlformats.org/presentationml/2006/main">
-  <p:cSld>
+<p:sld xmlns:a="http://schemas.openxmlformats.org/drawingml/2006/main" xmlns:r="http://schemas.openxmlformats.org/officeDocument/2006/relationships" xmlns:p="http://schemas.openxmlformats.org/presentationml/2006/main" xmlns:m="http://schemas.openxmlformats.org/officeDocument/2006/math" xmlns:w="http://schemas.openxmlformats.org/wordprocessingml/2006/main" xmlns:mc="http://schemas.openxmlformats.org/markup-compatibility/2006" showMasterPhAnim="0" showMasterSp="1" show="1">
+  <p:cSld name="">
     <p:spTree>
       <p:nvGrpSpPr>
         <p:cNvPr id="1" name=""/>
         <p:cNvGrpSpPr/>
         <p:nvPr/>
       </p:nvGrpSpPr>
-      <p:grpSpPr>
+      <p:grpSpPr bwMode="auto">
         <a:xfrm>
           <a:off x="0" y="0"/>
           <a:ext cx="0" cy="0"/>
@@ -5740,7 +8060,7 @@
       </p:grpSpPr>
       <p:sp>
         <p:nvSpPr>
-          <p:cNvPr id="2" name="Title 1"/>
+          <p:cNvPr id="43714518" name="Title 1"/>
           <p:cNvSpPr>
             <a:spLocks noGrp="1"/>
           </p:cNvSpPr>
@@ -5748,28 +8068,31 @@
             <p:ph type="title"/>
           </p:nvPr>
         </p:nvSpPr>
-        <p:spPr/>
+        <p:spPr bwMode="auto"/>
         <p:txBody>
           <a:bodyPr>
             <a:normAutofit/>
           </a:bodyPr>
           <a:lstStyle/>
           <a:p>
-            <a:r>
-              <a:rPr lang="en-US" dirty="0"/>
+            <a:pPr>
+              <a:defRPr/>
+            </a:pPr>
+            <a:r>
+              <a:rPr lang="en-US"/>
               <a:t>Basic Principle (2</a:t>
             </a:r>
             <a:r>
-              <a:rPr lang="en-US" dirty="0" smtClean="0"/>
+              <a:rPr lang="en-US"/>
               <a:t>)</a:t>
             </a:r>
-            <a:endParaRPr lang="en-US" dirty="0"/>
-          </a:p>
-        </p:txBody>
-      </p:sp>
-      <p:sp>
-        <p:nvSpPr>
-          <p:cNvPr id="3" name="Content Placeholder 2"/>
+            <a:endParaRPr lang="en-US"/>
+          </a:p>
+        </p:txBody>
+      </p:sp>
+      <p:sp>
+        <p:nvSpPr>
+          <p:cNvPr id="1583178330" name="Content Placeholder 2"/>
           <p:cNvSpPr>
             <a:spLocks noGrp="1"/>
           </p:cNvSpPr>
@@ -5777,76 +8100,75 @@
             <p:ph idx="1"/>
           </p:nvPr>
         </p:nvSpPr>
-        <p:spPr/>
+        <p:spPr bwMode="auto"/>
         <p:txBody>
           <a:bodyPr>
             <a:normAutofit/>
           </a:bodyPr>
           <a:lstStyle/>
           <a:p>
-            <a:pPr algn="just"/>
-            <a:r>
-              <a:rPr lang="en-US" sz="2400" dirty="0" smtClean="0"/>
+            <a:pPr algn="just">
+              <a:defRPr/>
+            </a:pPr>
+            <a:r>
+              <a:rPr lang="en-US" sz="2400"/>
               <a:t>When </a:t>
             </a:r>
             <a:r>
-              <a:rPr lang="en-US" sz="2400" dirty="0"/>
+              <a:rPr lang="en-US" sz="2400"/>
               <a:t>a beam of </a:t>
             </a:r>
             <a:r>
-              <a:rPr lang="en-US" sz="2400" dirty="0" err="1"/>
+              <a:rPr lang="en-US" sz="2400"/>
               <a:t>polarised</a:t>
             </a:r>
             <a:r>
-              <a:rPr lang="en-US" sz="2400" dirty="0"/>
+              <a:rPr lang="en-US" sz="2400"/>
               <a:t> light is incident on the cell the liquid causes rotation of </a:t>
             </a:r>
             <a:r>
-              <a:rPr lang="en-US" sz="2400" dirty="0" err="1"/>
+              <a:rPr lang="en-US" sz="2400"/>
               <a:t>polarisation</a:t>
             </a:r>
             <a:r>
-              <a:rPr lang="en-US" sz="2400" dirty="0"/>
+              <a:rPr lang="en-US" sz="2400"/>
               <a:t> plane. </a:t>
             </a:r>
-          </a:p>
-          <a:p>
-            <a:pPr algn="just"/>
-            <a:r>
-              <a:rPr lang="en-US" sz="2400" dirty="0" smtClean="0"/>
+            <a:endParaRPr/>
+          </a:p>
+          <a:p>
+            <a:pPr algn="just">
+              <a:defRPr/>
+            </a:pPr>
+            <a:r>
+              <a:rPr lang="en-US" sz="2400"/>
               <a:t>A </a:t>
             </a:r>
             <a:r>
-              <a:rPr lang="en-US" sz="2400" dirty="0"/>
+              <a:rPr lang="en-US" sz="2400"/>
               <a:t>strong enough electric field changes orientation of molecules and in this state the molecules have no effect on an incident light beam. </a:t>
             </a:r>
-          </a:p>
-          <a:p>
-            <a:pPr algn="just"/>
-            <a:endParaRPr lang="en-US" sz="2400" dirty="0"/>
+            <a:endParaRPr/>
+          </a:p>
+          <a:p>
+            <a:pPr algn="just">
+              <a:defRPr/>
+            </a:pPr>
+            <a:endParaRPr lang="en-US" sz="2400"/>
           </a:p>
         </p:txBody>
       </p:sp>
       <p:pic>
         <p:nvPicPr>
-          <p:cNvPr id="19458" name="Picture 2"/>
+          <p:cNvPr id="1104102535" name="Picture 2"/>
           <p:cNvPicPr>
             <a:picLocks noChangeAspect="1" noChangeArrowheads="1"/>
           </p:cNvPicPr>
           <p:nvPr/>
         </p:nvPicPr>
-        <p:blipFill>
-          <a:blip r:embed="rId2">
-            <a:extLst>
-              <a:ext uri="{28A0092B-C50C-407E-A947-70E740481C1C}">
-                <a14:useLocalDpi xmlns:a14="http://schemas.microsoft.com/office/drawing/2010/main" val="0"/>
-              </a:ext>
-            </a:extLst>
-          </a:blip>
-          <a:srcRect/>
-          <a:stretch>
-            <a:fillRect/>
-          </a:stretch>
+        <p:blipFill rotWithShape="1">
+          <a:blip r:embed="rId3"/>
+          <a:stretch/>
         </p:blipFill>
         <p:spPr bwMode="auto">
           <a:xfrm>
@@ -5861,59 +8183,34 @@
             <a:noFill/>
           </a:ln>
           <a:effectLst/>
-          <a:extLst>
-            <a:ext uri="{909E8E84-426E-40DD-AFC4-6F175D3DCCD1}">
-              <a14:hiddenFill xmlns:a14="http://schemas.microsoft.com/office/drawing/2010/main">
-                <a:solidFill>
-                  <a:schemeClr val="accent1"/>
-                </a:solidFill>
-              </a14:hiddenFill>
-            </a:ext>
-            <a:ext uri="{91240B29-F687-4F45-9708-019B960494DF}">
-              <a14:hiddenLine xmlns:a14="http://schemas.microsoft.com/office/drawing/2010/main" w="9525">
-                <a:solidFill>
-                  <a:schemeClr val="tx1"/>
-                </a:solidFill>
-                <a:miter lim="800000"/>
-                <a:headEnd/>
-                <a:tailEnd/>
-              </a14:hiddenLine>
-            </a:ext>
-            <a:ext uri="{AF507438-7753-43E0-B8FC-AC1667EBCBE1}">
-              <a14:hiddenEffects xmlns:a14="http://schemas.microsoft.com/office/drawing/2010/main">
-                <a:effectLst>
-                  <a:outerShdw dist="35921" dir="2700000" algn="ctr" rotWithShape="0">
-                    <a:schemeClr val="bg2"/>
-                  </a:outerShdw>
-                </a:effectLst>
-              </a14:hiddenEffects>
-            </a:ext>
-          </a:extLst>
         </p:spPr>
       </p:pic>
     </p:spTree>
-    <p:extLst>
-      <p:ext uri="{BB962C8B-B14F-4D97-AF65-F5344CB8AC3E}">
-        <p14:creationId xmlns:p14="http://schemas.microsoft.com/office/powerpoint/2010/main" val="3692528896"/>
-      </p:ext>
-    </p:extLst>
   </p:cSld>
   <p:clrMapOvr>
     <a:masterClrMapping/>
   </p:clrMapOvr>
+  <mc:AlternateContent xmlns:mc="http://schemas.openxmlformats.org/markup-compatibility/2006">
+    <mc:Choice xmlns:p159="http://schemas.microsoft.com/office/powerpoint/2015/09/main" xmlns:p14="http://schemas.microsoft.com/office/powerpoint/2010/main" Requires="p159">
+      <p:transition p14:dur="500" advClick="1"/>
+    </mc:Choice>
+    <mc:Fallback>
+      <p:transition advClick="1"/>
+    </mc:Fallback>
+  </mc:AlternateContent>
 </p:sld>
 </file>
 
 <file path=ppt/slides/slide9.xml><?xml version="1.0" encoding="utf-8"?>
-<p:sld xmlns:a="http://schemas.openxmlformats.org/drawingml/2006/main" xmlns:r="http://schemas.openxmlformats.org/officeDocument/2006/relationships" xmlns:p="http://schemas.openxmlformats.org/presentationml/2006/main">
-  <p:cSld>
+<p:sld xmlns:a="http://schemas.openxmlformats.org/drawingml/2006/main" xmlns:r="http://schemas.openxmlformats.org/officeDocument/2006/relationships" xmlns:p="http://schemas.openxmlformats.org/presentationml/2006/main" xmlns:m="http://schemas.openxmlformats.org/officeDocument/2006/math" xmlns:w="http://schemas.openxmlformats.org/wordprocessingml/2006/main" xmlns:mc="http://schemas.openxmlformats.org/markup-compatibility/2006" showMasterPhAnim="0" showMasterSp="1" show="1">
+  <p:cSld name="">
     <p:spTree>
       <p:nvGrpSpPr>
         <p:cNvPr id="1" name=""/>
         <p:cNvGrpSpPr/>
         <p:nvPr/>
       </p:nvGrpSpPr>
-      <p:grpSpPr>
+      <p:grpSpPr bwMode="auto">
         <a:xfrm>
           <a:off x="0" y="0"/>
           <a:ext cx="0" cy="0"/>
@@ -5923,7 +8220,7 @@
       </p:grpSpPr>
       <p:sp>
         <p:nvSpPr>
-          <p:cNvPr id="2" name="Title 1"/>
+          <p:cNvPr id="1408596457" name="Title 1"/>
           <p:cNvSpPr>
             <a:spLocks noGrp="1"/>
           </p:cNvSpPr>
@@ -5931,57 +8228,33 @@
             <p:ph type="title"/>
           </p:nvPr>
         </p:nvSpPr>
-        <p:spPr/>
-        <p:txBody>
-          <a:bodyPr/>
-          <a:lstStyle/>
-          <a:p>
-            <a:r>
-              <a:rPr lang="en-US" dirty="0"/>
+        <p:spPr bwMode="auto"/>
+        <p:txBody>
+          <a:bodyPr/>
+          <a:lstStyle/>
+          <a:p>
+            <a:pPr>
+              <a:defRPr/>
+            </a:pPr>
+            <a:r>
+              <a:rPr lang="en-US"/>
               <a:t>Characteristics </a:t>
             </a:r>
-          </a:p>
-        </p:txBody>
-      </p:sp>
-      <p:sp>
-        <p:nvSpPr>
-          <p:cNvPr id="3" name="Content Placeholder 2"/>
-          <p:cNvSpPr>
-            <a:spLocks noGrp="1"/>
-          </p:cNvSpPr>
-          <p:nvPr>
-            <p:ph idx="1"/>
-          </p:nvPr>
-        </p:nvSpPr>
-        <p:spPr/>
-        <p:txBody>
-          <a:bodyPr/>
-          <a:lstStyle/>
-          <a:p>
-            <a:endParaRPr lang="en-US" dirty="0"/>
+            <a:endParaRPr/>
           </a:p>
         </p:txBody>
       </p:sp>
       <p:pic>
         <p:nvPicPr>
-          <p:cNvPr id="20482" name="Picture 2"/>
+          <p:cNvPr id="781727164" name="Picture 2"/>
           <p:cNvPicPr>
             <a:picLocks noChangeAspect="1" noChangeArrowheads="1"/>
           </p:cNvPicPr>
           <p:nvPr/>
         </p:nvPicPr>
-        <p:blipFill>
-          <a:blip r:embed="rId2">
-            <a:extLst>
-              <a:ext uri="{28A0092B-C50C-407E-A947-70E740481C1C}">
-                <a14:useLocalDpi xmlns:a14="http://schemas.microsoft.com/office/drawing/2010/main" val="0"/>
-              </a:ext>
-            </a:extLst>
-          </a:blip>
-          <a:srcRect/>
-          <a:stretch>
-            <a:fillRect/>
-          </a:stretch>
+        <p:blipFill rotWithShape="1">
+          <a:blip r:embed="rId3"/>
+          <a:stretch/>
         </p:blipFill>
         <p:spPr bwMode="auto">
           <a:xfrm>
@@ -5996,51 +8269,26 @@
             <a:noFill/>
           </a:ln>
           <a:effectLst/>
-          <a:extLst>
-            <a:ext uri="{909E8E84-426E-40DD-AFC4-6F175D3DCCD1}">
-              <a14:hiddenFill xmlns:a14="http://schemas.microsoft.com/office/drawing/2010/main">
-                <a:solidFill>
-                  <a:schemeClr val="accent1"/>
-                </a:solidFill>
-              </a14:hiddenFill>
-            </a:ext>
-            <a:ext uri="{91240B29-F687-4F45-9708-019B960494DF}">
-              <a14:hiddenLine xmlns:a14="http://schemas.microsoft.com/office/drawing/2010/main" w="9525">
-                <a:solidFill>
-                  <a:schemeClr val="tx1"/>
-                </a:solidFill>
-                <a:miter lim="800000"/>
-                <a:headEnd/>
-                <a:tailEnd/>
-              </a14:hiddenLine>
-            </a:ext>
-            <a:ext uri="{AF507438-7753-43E0-B8FC-AC1667EBCBE1}">
-              <a14:hiddenEffects xmlns:a14="http://schemas.microsoft.com/office/drawing/2010/main">
-                <a:effectLst>
-                  <a:outerShdw dist="35921" dir="2700000" algn="ctr" rotWithShape="0">
-                    <a:schemeClr val="bg2"/>
-                  </a:outerShdw>
-                </a:effectLst>
-              </a14:hiddenEffects>
-            </a:ext>
-          </a:extLst>
         </p:spPr>
       </p:pic>
     </p:spTree>
-    <p:extLst>
-      <p:ext uri="{BB962C8B-B14F-4D97-AF65-F5344CB8AC3E}">
-        <p14:creationId xmlns:p14="http://schemas.microsoft.com/office/powerpoint/2010/main" val="4039884668"/>
-      </p:ext>
-    </p:extLst>
   </p:cSld>
   <p:clrMapOvr>
     <a:masterClrMapping/>
   </p:clrMapOvr>
+  <mc:AlternateContent xmlns:mc="http://schemas.openxmlformats.org/markup-compatibility/2006">
+    <mc:Choice xmlns:p159="http://schemas.microsoft.com/office/powerpoint/2015/09/main" xmlns:p14="http://schemas.microsoft.com/office/powerpoint/2010/main" Requires="p159">
+      <p:transition p14:dur="500" advClick="1"/>
+    </mc:Choice>
+    <mc:Fallback>
+      <p:transition advClick="1"/>
+    </mc:Fallback>
+  </mc:AlternateContent>
 </p:sld>
 </file>
 
 <file path=ppt/theme/theme1.xml><?xml version="1.0" encoding="utf-8"?>
-<a:theme xmlns:a="http://schemas.openxmlformats.org/drawingml/2006/main" name="Office Theme">
+<a:theme xmlns:a="http://schemas.openxmlformats.org/drawingml/2006/main" xmlns:r="http://schemas.openxmlformats.org/officeDocument/2006/relationships" xmlns:p="http://schemas.openxmlformats.org/presentationml/2006/main" name="Office Theme">
   <a:themeElements>
     <a:clrScheme name="Office">
       <a:dk1>
@@ -6083,71 +8331,13 @@
     <a:fontScheme name="Office">
       <a:majorFont>
         <a:latin typeface="Calibri"/>
-        <a:ea typeface=""/>
-        <a:cs typeface=""/>
-        <a:font script="Jpan" typeface="ＭＳ Ｐゴシック"/>
-        <a:font script="Hang" typeface="맑은 고딕"/>
-        <a:font script="Hans" typeface="宋体"/>
-        <a:font script="Hant" typeface="新細明體"/>
-        <a:font script="Arab" typeface="Times New Roman"/>
-        <a:font script="Hebr" typeface="Times New Roman"/>
-        <a:font script="Thai" typeface="Angsana New"/>
-        <a:font script="Ethi" typeface="Nyala"/>
-        <a:font script="Beng" typeface="Vrinda"/>
-        <a:font script="Gujr" typeface="Shruti"/>
-        <a:font script="Khmr" typeface="MoolBoran"/>
-        <a:font script="Knda" typeface="Tunga"/>
-        <a:font script="Guru" typeface="Raavi"/>
-        <a:font script="Cans" typeface="Euphemia"/>
-        <a:font script="Cher" typeface="Plantagenet Cherokee"/>
-        <a:font script="Yiii" typeface="Microsoft Yi Baiti"/>
-        <a:font script="Tibt" typeface="Microsoft Himalaya"/>
-        <a:font script="Thaa" typeface="MV Boli"/>
-        <a:font script="Deva" typeface="Mangal"/>
-        <a:font script="Telu" typeface="Gautami"/>
-        <a:font script="Taml" typeface="Latha"/>
-        <a:font script="Syrc" typeface="Estrangelo Edessa"/>
-        <a:font script="Orya" typeface="Kalinga"/>
-        <a:font script="Mlym" typeface="Kartika"/>
-        <a:font script="Laoo" typeface="DokChampa"/>
-        <a:font script="Sinh" typeface="Iskoola Pota"/>
-        <a:font script="Mong" typeface="Mongolian Baiti"/>
-        <a:font script="Viet" typeface="Times New Roman"/>
-        <a:font script="Uigh" typeface="Microsoft Uighur"/>
+        <a:ea typeface="Arial"/>
+        <a:cs typeface="Arial"/>
       </a:majorFont>
       <a:minorFont>
         <a:latin typeface="Calibri"/>
-        <a:ea typeface=""/>
-        <a:cs typeface=""/>
-        <a:font script="Jpan" typeface="ＭＳ Ｐゴシック"/>
-        <a:font script="Hang" typeface="맑은 고딕"/>
-        <a:font script="Hans" typeface="宋体"/>
-        <a:font script="Hant" typeface="新細明體"/>
-        <a:font script="Arab" typeface="Arial"/>
-        <a:font script="Hebr" typeface="Arial"/>
-        <a:font script="Thai" typeface="Cordia New"/>
-        <a:font script="Ethi" typeface="Nyala"/>
-        <a:font script="Beng" typeface="Vrinda"/>
-        <a:font script="Gujr" typeface="Shruti"/>
-        <a:font script="Khmr" typeface="DaunPenh"/>
-        <a:font script="Knda" typeface="Tunga"/>
-        <a:font script="Guru" typeface="Raavi"/>
-        <a:font script="Cans" typeface="Euphemia"/>
-        <a:font script="Cher" typeface="Plantagenet Cherokee"/>
-        <a:font script="Yiii" typeface="Microsoft Yi Baiti"/>
-        <a:font script="Tibt" typeface="Microsoft Himalaya"/>
-        <a:font script="Thaa" typeface="MV Boli"/>
-        <a:font script="Deva" typeface="Mangal"/>
-        <a:font script="Telu" typeface="Gautami"/>
-        <a:font script="Taml" typeface="Latha"/>
-        <a:font script="Syrc" typeface="Estrangelo Edessa"/>
-        <a:font script="Orya" typeface="Kalinga"/>
-        <a:font script="Mlym" typeface="Kartika"/>
-        <a:font script="Laoo" typeface="DokChampa"/>
-        <a:font script="Sinh" typeface="Iskoola Pota"/>
-        <a:font script="Mong" typeface="Mongolian Baiti"/>
-        <a:font script="Viet" typeface="Arial"/>
-        <a:font script="Uigh" typeface="Microsoft Uighur"/>
+        <a:ea typeface="Arial"/>
+        <a:cs typeface="Arial"/>
       </a:minorFont>
     </a:fontScheme>
     <a:fmtScheme name="Office">
@@ -6155,7 +8345,7 @@
         <a:solidFill>
           <a:schemeClr val="phClr"/>
         </a:solidFill>
-        <a:gradFill rotWithShape="1">
+        <a:gradFill>
           <a:gsLst>
             <a:gs pos="0">
               <a:schemeClr val="phClr">
@@ -6178,7 +8368,7 @@
           </a:gsLst>
           <a:lin ang="16200000" scaled="1"/>
         </a:gradFill>
-        <a:gradFill rotWithShape="1">
+        <a:gradFill>
           <a:gsLst>
             <a:gs pos="0">
               <a:schemeClr val="phClr">
@@ -6269,7 +8459,7 @@
         <a:solidFill>
           <a:schemeClr val="phClr"/>
         </a:solidFill>
-        <a:gradFill rotWithShape="1">
+        <a:gradFill>
           <a:gsLst>
             <a:gs pos="0">
               <a:schemeClr val="phClr">
@@ -6291,11 +8481,9 @@
               </a:schemeClr>
             </a:gs>
           </a:gsLst>
-          <a:path path="circle">
-            <a:fillToRect l="50000" t="-80000" r="50000" b="180000"/>
-          </a:path>
+          <a:path path="circle"/>
         </a:gradFill>
-        <a:gradFill rotWithShape="1">
+        <a:gradFill>
           <a:gsLst>
             <a:gs pos="0">
               <a:schemeClr val="phClr">
@@ -6310,14 +8498,231 @@
               </a:schemeClr>
             </a:gs>
           </a:gsLst>
-          <a:path path="circle">
-            <a:fillToRect l="50000" t="50000" r="50000" b="50000"/>
-          </a:path>
+          <a:path path="circle"/>
         </a:gradFill>
       </a:bgFillStyleLst>
     </a:fmtScheme>
   </a:themeElements>
   <a:objectDefaults/>
-  <a:extraClrSchemeLst/>
+</a:theme>
+</file>
+
+<file path=ppt/theme/theme2.xml><?xml version="1.0" encoding="utf-8"?>
+<a:theme xmlns:a="http://schemas.openxmlformats.org/drawingml/2006/main" xmlns:r="http://schemas.openxmlformats.org/officeDocument/2006/relationships" xmlns:p="http://schemas.openxmlformats.org/presentationml/2006/main" name="Office Theme">
+  <a:themeElements>
+    <a:clrScheme name="Office">
+      <a:dk1>
+        <a:sysClr val="windowText" lastClr="000000"/>
+      </a:dk1>
+      <a:lt1>
+        <a:sysClr val="window" lastClr="FFFFFF"/>
+      </a:lt1>
+      <a:dk2>
+        <a:srgbClr val="1F497D"/>
+      </a:dk2>
+      <a:lt2>
+        <a:srgbClr val="EEECE1"/>
+      </a:lt2>
+      <a:accent1>
+        <a:srgbClr val="4F81BD"/>
+      </a:accent1>
+      <a:accent2>
+        <a:srgbClr val="C0504D"/>
+      </a:accent2>
+      <a:accent3>
+        <a:srgbClr val="9BBB59"/>
+      </a:accent3>
+      <a:accent4>
+        <a:srgbClr val="8064A2"/>
+      </a:accent4>
+      <a:accent5>
+        <a:srgbClr val="4BACC6"/>
+      </a:accent5>
+      <a:accent6>
+        <a:srgbClr val="F79646"/>
+      </a:accent6>
+      <a:hlink>
+        <a:srgbClr val="0000FF"/>
+      </a:hlink>
+      <a:folHlink>
+        <a:srgbClr val="800080"/>
+      </a:folHlink>
+    </a:clrScheme>
+    <a:fontScheme name="">
+      <a:majorFont>
+        <a:latin typeface="Calibri"/>
+        <a:ea typeface="Arial"/>
+        <a:cs typeface="Arial"/>
+      </a:majorFont>
+      <a:minorFont>
+        <a:latin typeface="Calibri"/>
+        <a:ea typeface="Arial"/>
+        <a:cs typeface="Arial"/>
+      </a:minorFont>
+    </a:fontScheme>
+    <a:fmtScheme name="Office">
+      <a:fillStyleLst>
+        <a:solidFill>
+          <a:schemeClr val="phClr"/>
+        </a:solidFill>
+        <a:gradFill>
+          <a:gsLst>
+            <a:gs pos="0">
+              <a:schemeClr val="phClr">
+                <a:tint val="50000"/>
+                <a:satMod val="300000"/>
+              </a:schemeClr>
+            </a:gs>
+            <a:gs pos="35000">
+              <a:schemeClr val="phClr">
+                <a:tint val="37000"/>
+                <a:satMod val="300000"/>
+              </a:schemeClr>
+            </a:gs>
+            <a:gs pos="100000">
+              <a:schemeClr val="phClr">
+                <a:tint val="15000"/>
+                <a:satMod val="350000"/>
+              </a:schemeClr>
+            </a:gs>
+          </a:gsLst>
+          <a:lin ang="16200000" scaled="1"/>
+        </a:gradFill>
+        <a:gradFill>
+          <a:gsLst>
+            <a:gs pos="0">
+              <a:schemeClr val="phClr">
+                <a:shade val="51000"/>
+                <a:satMod val="130000"/>
+              </a:schemeClr>
+            </a:gs>
+            <a:gs pos="80000">
+              <a:schemeClr val="phClr">
+                <a:shade val="93000"/>
+                <a:satMod val="130000"/>
+              </a:schemeClr>
+            </a:gs>
+            <a:gs pos="100000">
+              <a:schemeClr val="phClr">
+                <a:shade val="94000"/>
+                <a:satMod val="135000"/>
+              </a:schemeClr>
+            </a:gs>
+          </a:gsLst>
+          <a:lin ang="16200000" scaled="0"/>
+        </a:gradFill>
+      </a:fillStyleLst>
+      <a:lnStyleLst>
+        <a:ln w="9525" cap="flat" cmpd="sng" algn="ctr">
+          <a:solidFill>
+            <a:schemeClr val="phClr">
+              <a:shade val="95000"/>
+              <a:satMod val="105000"/>
+            </a:schemeClr>
+          </a:solidFill>
+          <a:prstDash val="solid"/>
+        </a:ln>
+        <a:ln w="25400" cap="flat" cmpd="sng" algn="ctr">
+          <a:solidFill>
+            <a:schemeClr val="phClr"/>
+          </a:solidFill>
+          <a:prstDash val="solid"/>
+        </a:ln>
+        <a:ln w="38100" cap="flat" cmpd="sng" algn="ctr">
+          <a:solidFill>
+            <a:schemeClr val="phClr"/>
+          </a:solidFill>
+          <a:prstDash val="solid"/>
+        </a:ln>
+      </a:lnStyleLst>
+      <a:effectStyleLst>
+        <a:effectStyle>
+          <a:effectLst>
+            <a:outerShdw blurRad="40000" dist="20000" dir="5400000" rotWithShape="0">
+              <a:srgbClr val="000000">
+                <a:alpha val="38000"/>
+              </a:srgbClr>
+            </a:outerShdw>
+          </a:effectLst>
+        </a:effectStyle>
+        <a:effectStyle>
+          <a:effectLst>
+            <a:outerShdw blurRad="40000" dist="23000" dir="5400000" rotWithShape="0">
+              <a:srgbClr val="000000">
+                <a:alpha val="35000"/>
+              </a:srgbClr>
+            </a:outerShdw>
+          </a:effectLst>
+        </a:effectStyle>
+        <a:effectStyle>
+          <a:effectLst>
+            <a:outerShdw blurRad="40000" dist="23000" dir="5400000" rotWithShape="0">
+              <a:srgbClr val="000000">
+                <a:alpha val="35000"/>
+              </a:srgbClr>
+            </a:outerShdw>
+          </a:effectLst>
+          <a:scene3d>
+            <a:camera prst="orthographicFront">
+              <a:rot lat="0" lon="0" rev="0"/>
+            </a:camera>
+            <a:lightRig rig="threePt" dir="t">
+              <a:rot lat="0" lon="0" rev="1200000"/>
+            </a:lightRig>
+          </a:scene3d>
+          <a:sp3d>
+            <a:bevelT w="63500" h="25400"/>
+          </a:sp3d>
+        </a:effectStyle>
+      </a:effectStyleLst>
+      <a:bgFillStyleLst>
+        <a:solidFill>
+          <a:schemeClr val="phClr"/>
+        </a:solidFill>
+        <a:gradFill>
+          <a:gsLst>
+            <a:gs pos="0">
+              <a:schemeClr val="phClr">
+                <a:tint val="40000"/>
+                <a:satMod val="350000"/>
+              </a:schemeClr>
+            </a:gs>
+            <a:gs pos="40000">
+              <a:schemeClr val="phClr">
+                <a:tint val="45000"/>
+                <a:shade val="99000"/>
+                <a:satMod val="350000"/>
+              </a:schemeClr>
+            </a:gs>
+            <a:gs pos="100000">
+              <a:schemeClr val="phClr">
+                <a:shade val="20000"/>
+                <a:satMod val="255000"/>
+              </a:schemeClr>
+            </a:gs>
+          </a:gsLst>
+          <a:path path="circle"/>
+        </a:gradFill>
+        <a:gradFill>
+          <a:gsLst>
+            <a:gs pos="0">
+              <a:schemeClr val="phClr">
+                <a:tint val="80000"/>
+                <a:satMod val="300000"/>
+              </a:schemeClr>
+            </a:gs>
+            <a:gs pos="100000">
+              <a:schemeClr val="phClr">
+                <a:shade val="30000"/>
+                <a:satMod val="200000"/>
+              </a:schemeClr>
+            </a:gs>
+          </a:gsLst>
+          <a:path path="circle"/>
+        </a:gradFill>
+      </a:bgFillStyleLst>
+    </a:fmtScheme>
+  </a:themeElements>
+  <a:objectDefaults/>
 </a:theme>
 </file>